--- a/Takeaway.pptx
+++ b/Takeaway.pptx
@@ -1,26 +1,121 @@
 
 <file path=ppt/presentation.xml><?xml version="1.0" encoding="utf-8"?>
-<p:presentation xmlns:p="http://schemas.openxmlformats.org/presentationml/2006/main">
+<p:presentation xmlns:a="http://schemas.openxmlformats.org/drawingml/2006/main" xmlns:r="http://schemas.openxmlformats.org/officeDocument/2006/relationships" xmlns:p="http://schemas.openxmlformats.org/presentationml/2006/main">
   <p:sldMasterIdLst>
-    <p:sldMasterId xmlns:r="http://schemas.openxmlformats.org/officeDocument/2006/relationships" id="2147483648" r:id="Rfbc425c6fcd14e7f"/>
+    <p:sldMasterId id="2147483648" r:id="rId1"/>
   </p:sldMasterIdLst>
   <p:notesMasterIdLst>
-    <p:notesMasterId xmlns:r="http://schemas.openxmlformats.org/officeDocument/2006/relationships" r:id="R0a8e1cd2bc3c4c8d"/>
+    <p:notesMasterId r:id="rId3"/>
   </p:notesMasterIdLst>
   <p:sldIdLst>
-    <p:sldId xmlns:r="http://schemas.openxmlformats.org/officeDocument/2006/relationships" id="256" r:id="R1dd234b619434438"/>
+    <p:sldId id="256" r:id="rId2"/>
   </p:sldIdLst>
   <p:sldSz cx="19192875" cy="11887200"/>
   <p:notesSz cx="6858000" cy="9144000"/>
+  <p:defaultTextStyle>
+    <a:defPPr>
+      <a:defRPr lang="en-US"/>
+    </a:defPPr>
+    <a:lvl1pPr marL="0" algn="l" defTabSz="914400" rtl="0" eaLnBrk="1" latinLnBrk="0" hangingPunct="1">
+      <a:defRPr sz="1800" kern="1200">
+        <a:solidFill>
+          <a:schemeClr val="tx1"/>
+        </a:solidFill>
+        <a:latin typeface="+mn-lt"/>
+        <a:ea typeface="+mn-ea"/>
+        <a:cs typeface="+mn-cs"/>
+      </a:defRPr>
+    </a:lvl1pPr>
+    <a:lvl2pPr marL="457200" algn="l" defTabSz="914400" rtl="0" eaLnBrk="1" latinLnBrk="0" hangingPunct="1">
+      <a:defRPr sz="1800" kern="1200">
+        <a:solidFill>
+          <a:schemeClr val="tx1"/>
+        </a:solidFill>
+        <a:latin typeface="+mn-lt"/>
+        <a:ea typeface="+mn-ea"/>
+        <a:cs typeface="+mn-cs"/>
+      </a:defRPr>
+    </a:lvl2pPr>
+    <a:lvl3pPr marL="914400" algn="l" defTabSz="914400" rtl="0" eaLnBrk="1" latinLnBrk="0" hangingPunct="1">
+      <a:defRPr sz="1800" kern="1200">
+        <a:solidFill>
+          <a:schemeClr val="tx1"/>
+        </a:solidFill>
+        <a:latin typeface="+mn-lt"/>
+        <a:ea typeface="+mn-ea"/>
+        <a:cs typeface="+mn-cs"/>
+      </a:defRPr>
+    </a:lvl3pPr>
+    <a:lvl4pPr marL="1371600" algn="l" defTabSz="914400" rtl="0" eaLnBrk="1" latinLnBrk="0" hangingPunct="1">
+      <a:defRPr sz="1800" kern="1200">
+        <a:solidFill>
+          <a:schemeClr val="tx1"/>
+        </a:solidFill>
+        <a:latin typeface="+mn-lt"/>
+        <a:ea typeface="+mn-ea"/>
+        <a:cs typeface="+mn-cs"/>
+      </a:defRPr>
+    </a:lvl4pPr>
+    <a:lvl5pPr marL="1828800" algn="l" defTabSz="914400" rtl="0" eaLnBrk="1" latinLnBrk="0" hangingPunct="1">
+      <a:defRPr sz="1800" kern="1200">
+        <a:solidFill>
+          <a:schemeClr val="tx1"/>
+        </a:solidFill>
+        <a:latin typeface="+mn-lt"/>
+        <a:ea typeface="+mn-ea"/>
+        <a:cs typeface="+mn-cs"/>
+      </a:defRPr>
+    </a:lvl5pPr>
+    <a:lvl6pPr marL="2286000" algn="l" defTabSz="914400" rtl="0" eaLnBrk="1" latinLnBrk="0" hangingPunct="1">
+      <a:defRPr sz="1800" kern="1200">
+        <a:solidFill>
+          <a:schemeClr val="tx1"/>
+        </a:solidFill>
+        <a:latin typeface="+mn-lt"/>
+        <a:ea typeface="+mn-ea"/>
+        <a:cs typeface="+mn-cs"/>
+      </a:defRPr>
+    </a:lvl6pPr>
+    <a:lvl7pPr marL="2743200" algn="l" defTabSz="914400" rtl="0" eaLnBrk="1" latinLnBrk="0" hangingPunct="1">
+      <a:defRPr sz="1800" kern="1200">
+        <a:solidFill>
+          <a:schemeClr val="tx1"/>
+        </a:solidFill>
+        <a:latin typeface="+mn-lt"/>
+        <a:ea typeface="+mn-ea"/>
+        <a:cs typeface="+mn-cs"/>
+      </a:defRPr>
+    </a:lvl7pPr>
+    <a:lvl8pPr marL="3200400" algn="l" defTabSz="914400" rtl="0" eaLnBrk="1" latinLnBrk="0" hangingPunct="1">
+      <a:defRPr sz="1800" kern="1200">
+        <a:solidFill>
+          <a:schemeClr val="tx1"/>
+        </a:solidFill>
+        <a:latin typeface="+mn-lt"/>
+        <a:ea typeface="+mn-ea"/>
+        <a:cs typeface="+mn-cs"/>
+      </a:defRPr>
+    </a:lvl8pPr>
+    <a:lvl9pPr marL="3657600" algn="l" defTabSz="914400" rtl="0" eaLnBrk="1" latinLnBrk="0" hangingPunct="1">
+      <a:defRPr sz="1800" kern="1200">
+        <a:solidFill>
+          <a:schemeClr val="tx1"/>
+        </a:solidFill>
+        <a:latin typeface="+mn-lt"/>
+        <a:ea typeface="+mn-ea"/>
+        <a:cs typeface="+mn-cs"/>
+      </a:defRPr>
+    </a:lvl9pPr>
+  </p:defaultTextStyle>
 </p:presentation>
 </file>
 
 <file path=ppt/notesMasters/notesMaster1.xml><?xml version="1.0" encoding="utf-8"?>
-<p:notesMaster xmlns:p="http://schemas.openxmlformats.org/presentationml/2006/main">
+<p:notesMaster xmlns:a="http://schemas.openxmlformats.org/drawingml/2006/main" xmlns:r="http://schemas.openxmlformats.org/officeDocument/2006/relationships" xmlns:p="http://schemas.openxmlformats.org/presentationml/2006/main">
   <p:cSld>
     <p:bg>
       <p:bgRef idx="1001">
-        <a:schemeClr xmlns:a="http://schemas.openxmlformats.org/drawingml/2006/main" val="bg1"/>
+        <a:schemeClr val="bg1"/>
       </p:bgRef>
     </p:bg>
     <p:spTree>
@@ -30,380 +125,164 @@
         <p:nvPr/>
       </p:nvGrpSpPr>
       <p:grpSpPr>
-        <a:xfrm xmlns:a="http://schemas.openxmlformats.org/drawingml/2006/main"/>
+        <a:xfrm>
+          <a:off x="0" y="0"/>
+          <a:ext cx="0" cy="0"/>
+          <a:chOff x="0" y="0"/>
+          <a:chExt cx="0" cy="0"/>
+        </a:xfrm>
       </p:grpSpPr>
       <p:sp>
         <p:nvSpPr>
           <p:cNvPr id="2" name="Header Placeholder"/>
-          <p:cNvSpPr/>
+          <p:cNvSpPr>
+            <a:spLocks noGrp="1"/>
+          </p:cNvSpPr>
           <p:nvPr>
             <p:ph type="hdr" sz="quarter"/>
           </p:nvPr>
         </p:nvSpPr>
         <p:spPr>
-          <a:prstGeom xmlns:a="http://schemas.openxmlformats.org/drawingml/2006/main" prst="rect">
+          <a:prstGeom prst="rect">
             <a:avLst/>
           </a:prstGeom>
         </p:spPr>
         <p:txBody>
-          <a:bodyPr xmlns:a="http://schemas.openxmlformats.org/drawingml/2006/main"/>
-          <a:lstStyle xmlns:a="http://schemas.openxmlformats.org/drawingml/2006/main"/>
-          <a:p xmlns:a="http://schemas.openxmlformats.org/drawingml/2006/main"/>
+          <a:bodyPr/>
+          <a:lstStyle/>
+          <a:p>
+            <a:endParaRPr/>
+          </a:p>
         </p:txBody>
       </p:sp>
       <p:sp>
         <p:nvSpPr>
           <p:cNvPr id="3" name="Date Placeholder"/>
-          <p:cNvSpPr/>
+          <p:cNvSpPr>
+            <a:spLocks noGrp="1"/>
+          </p:cNvSpPr>
           <p:nvPr>
             <p:ph type="dt" sz="quarter" idx="1"/>
           </p:nvPr>
         </p:nvSpPr>
         <p:spPr>
-          <a:prstGeom xmlns:a="http://schemas.openxmlformats.org/drawingml/2006/main" prst="rect">
+          <a:prstGeom prst="rect">
             <a:avLst/>
           </a:prstGeom>
         </p:spPr>
         <p:txBody>
-          <a:bodyPr xmlns:a="http://schemas.openxmlformats.org/drawingml/2006/main"/>
-          <a:lstStyle xmlns:a="http://schemas.openxmlformats.org/drawingml/2006/main"/>
-          <a:p xmlns:a="http://schemas.openxmlformats.org/drawingml/2006/main"/>
+          <a:bodyPr/>
+          <a:lstStyle/>
+          <a:p>
+            <a:endParaRPr/>
+          </a:p>
         </p:txBody>
       </p:sp>
       <p:sp>
         <p:nvSpPr>
           <p:cNvPr id="4" name="Slide Image Placeholder"/>
-          <p:cNvSpPr/>
+          <p:cNvSpPr>
+            <a:spLocks noGrp="1" noRot="1" noChangeAspect="1"/>
+          </p:cNvSpPr>
           <p:nvPr>
             <p:ph type="sldImg" idx="2"/>
           </p:nvPr>
         </p:nvSpPr>
         <p:spPr>
-          <a:prstGeom xmlns:a="http://schemas.openxmlformats.org/drawingml/2006/main" prst="rect">
+          <a:prstGeom prst="rect">
             <a:avLst/>
           </a:prstGeom>
         </p:spPr>
         <p:txBody>
-          <a:bodyPr xmlns:a="http://schemas.openxmlformats.org/drawingml/2006/main"/>
-          <a:lstStyle xmlns:a="http://schemas.openxmlformats.org/drawingml/2006/main"/>
-          <a:p xmlns:a="http://schemas.openxmlformats.org/drawingml/2006/main"/>
+          <a:bodyPr/>
+          <a:lstStyle/>
+          <a:p>
+            <a:endParaRPr/>
+          </a:p>
         </p:txBody>
       </p:sp>
       <p:sp>
         <p:nvSpPr>
           <p:cNvPr id="5" name="Notes Placeholder"/>
-          <p:cNvSpPr/>
+          <p:cNvSpPr>
+            <a:spLocks noGrp="1"/>
+          </p:cNvSpPr>
           <p:nvPr>
             <p:ph type="body" sz="quarter" idx="3"/>
           </p:nvPr>
         </p:nvSpPr>
         <p:spPr>
-          <a:prstGeom xmlns:a="http://schemas.openxmlformats.org/drawingml/2006/main" prst="rect">
+          <a:prstGeom prst="rect">
             <a:avLst/>
           </a:prstGeom>
         </p:spPr>
         <p:txBody>
-          <a:bodyPr xmlns:a="http://schemas.openxmlformats.org/drawingml/2006/main"/>
-          <a:lstStyle xmlns:a="http://schemas.openxmlformats.org/drawingml/2006/main"/>
-          <a:p xmlns:a="http://schemas.openxmlformats.org/drawingml/2006/main"/>
+          <a:bodyPr/>
+          <a:lstStyle/>
+          <a:p>
+            <a:endParaRPr/>
+          </a:p>
         </p:txBody>
       </p:sp>
       <p:sp>
         <p:nvSpPr>
           <p:cNvPr id="6" name="Footer Placeholder"/>
-          <p:cNvSpPr/>
+          <p:cNvSpPr>
+            <a:spLocks noGrp="1"/>
+          </p:cNvSpPr>
           <p:nvPr>
             <p:ph type="ftr" sz="quarter" idx="4"/>
           </p:nvPr>
         </p:nvSpPr>
         <p:spPr>
-          <a:prstGeom xmlns:a="http://schemas.openxmlformats.org/drawingml/2006/main" prst="rect">
+          <a:prstGeom prst="rect">
             <a:avLst/>
           </a:prstGeom>
         </p:spPr>
         <p:txBody>
-          <a:bodyPr xmlns:a="http://schemas.openxmlformats.org/drawingml/2006/main"/>
-          <a:lstStyle xmlns:a="http://schemas.openxmlformats.org/drawingml/2006/main"/>
-          <a:p xmlns:a="http://schemas.openxmlformats.org/drawingml/2006/main"/>
+          <a:bodyPr/>
+          <a:lstStyle/>
+          <a:p>
+            <a:endParaRPr/>
+          </a:p>
         </p:txBody>
       </p:sp>
       <p:sp>
         <p:nvSpPr>
           <p:cNvPr id="7" name="Slide Number Placeholder"/>
-          <p:cNvSpPr/>
+          <p:cNvSpPr>
+            <a:spLocks noGrp="1"/>
+          </p:cNvSpPr>
           <p:nvPr>
             <p:ph type="sldNum" sz="quarter" idx="5"/>
           </p:nvPr>
         </p:nvSpPr>
         <p:spPr>
-          <a:prstGeom xmlns:a="http://schemas.openxmlformats.org/drawingml/2006/main" prst="rect">
+          <a:prstGeom prst="rect">
             <a:avLst/>
           </a:prstGeom>
         </p:spPr>
         <p:txBody>
-          <a:bodyPr xmlns:a="http://schemas.openxmlformats.org/drawingml/2006/main"/>
-          <a:lstStyle xmlns:a="http://schemas.openxmlformats.org/drawingml/2006/main"/>
-          <a:p xmlns:a="http://schemas.openxmlformats.org/drawingml/2006/main"/>
+          <a:bodyPr/>
+          <a:lstStyle/>
+          <a:p>
+            <a:endParaRPr/>
+          </a:p>
         </p:txBody>
       </p:sp>
     </p:spTree>
   </p:cSld>
   <p:clrMap bg1="lt1" tx1="dk1" bg2="lt2" tx2="dk2" accent1="accent1" accent2="accent2" accent3="accent3" accent4="accent4" accent5="accent5" accent6="accent6" hlink="hlink" folHlink="folHlink"/>
   <p:notesStyle>
-    <a:lvl1pPr xmlns:a="http://schemas.openxmlformats.org/drawingml/2006/main" marL="0" algn="l" defTabSz="914400" rtl="0" eaLnBrk="1" latinLnBrk="0" hangingPunct="1">
+    <a:lvl1pPr marL="0" algn="l" defTabSz="914400" rtl="0" eaLnBrk="1" latinLnBrk="0" hangingPunct="1">
       <a:defRPr sz="1200" kern="1200"/>
     </a:lvl1pPr>
   </p:notesStyle>
 </p:notesMaster>
 </file>
 
-<file path=ppt/notesMasters/theme/theme3.xml><?xml version="1.0" encoding="utf-8"?>
-<a:theme xmlns:a="http://schemas.openxmlformats.org/drawingml/2006/main" name="ChatGPT">
-  <a:themeElements>
-    <a:clrScheme name="ChatGPT">
-      <a:dk1>
-        <a:srgbClr val="000000"/>
-      </a:dk1>
-      <a:lt1>
-        <a:srgbClr val="FFFFFF"/>
-      </a:lt1>
-      <a:dk2>
-        <a:srgbClr val="0E2841"/>
-      </a:dk2>
-      <a:lt2>
-        <a:srgbClr val="E8E8E8"/>
-      </a:lt2>
-      <a:accent1>
-        <a:srgbClr val="156082"/>
-      </a:accent1>
-      <a:accent2>
-        <a:srgbClr val="E97132"/>
-      </a:accent2>
-      <a:accent3>
-        <a:srgbClr val="196B24"/>
-      </a:accent3>
-      <a:accent4>
-        <a:srgbClr val="0F9ED5"/>
-      </a:accent4>
-      <a:accent5>
-        <a:srgbClr val="A02B93"/>
-      </a:accent5>
-      <a:accent6>
-        <a:srgbClr val="4EA72E"/>
-      </a:accent6>
-      <a:hlink>
-        <a:srgbClr val="467886"/>
-      </a:hlink>
-      <a:folHlink>
-        <a:srgbClr val="96607D"/>
-      </a:folHlink>
-    </a:clrScheme>
-    <a:fontScheme name="">
-      <a:majorFont>
-        <a:latin typeface="Aptos"/>
-        <a:ea typeface=""/>
-        <a:cs typeface=""/>
-      </a:majorFont>
-      <a:minorFont>
-        <a:latin typeface="Aptos"/>
-        <a:ea typeface=""/>
-        <a:cs typeface=""/>
-      </a:minorFont>
-    </a:fontScheme>
-    <a:fmtScheme name="ChatGPT">
-      <a:fillStyleLst>
-        <a:solidFill>
-          <a:schemeClr val="phClr"/>
-        </a:solidFill>
-        <a:gradFill>
-          <a:gsLst>
-            <a:gs pos="0">
-              <a:schemeClr val="phClr">
-                <a:tint val="67000"/>
-                <a:lumMod val="110000"/>
-                <a:satMod val="105000"/>
-              </a:schemeClr>
-            </a:gs>
-            <a:gs pos="50000">
-              <a:schemeClr val="phClr">
-                <a:tint val="73000"/>
-                <a:lumMod val="105000"/>
-                <a:satMod val="103000"/>
-              </a:schemeClr>
-            </a:gs>
-            <a:gs pos="100000">
-              <a:schemeClr val="phClr">
-                <a:tint val="81000"/>
-                <a:lumMod val="105000"/>
-                <a:satMod val="109000"/>
-              </a:schemeClr>
-            </a:gs>
-          </a:gsLst>
-          <a:lin ang="5400000" scaled="0"/>
-        </a:gradFill>
-        <a:gradFill>
-          <a:gsLst>
-            <a:gs pos="0">
-              <a:schemeClr val="phClr">
-                <a:tint val="94000"/>
-                <a:lumMod val="102000"/>
-                <a:satMod val="103000"/>
-              </a:schemeClr>
-            </a:gs>
-            <a:gs pos="50000">
-              <a:schemeClr val="phClr">
-                <a:shade val="100000"/>
-                <a:lumMod val="100000"/>
-                <a:satMod val="110000"/>
-              </a:schemeClr>
-            </a:gs>
-            <a:gs pos="100000">
-              <a:schemeClr val="phClr">
-                <a:shade val="78000"/>
-                <a:lumMod val="99000"/>
-                <a:satMod val="120000"/>
-              </a:schemeClr>
-            </a:gs>
-          </a:gsLst>
-          <a:lin ang="5400000" scaled="0"/>
-        </a:gradFill>
-      </a:fillStyleLst>
-      <a:lnStyleLst>
-        <a:ln w="12700">
-          <a:solidFill>
-            <a:schemeClr val="phClr"/>
-          </a:solidFill>
-          <a:prstDash val="solid"/>
-        </a:ln>
-        <a:ln w="19050">
-          <a:solidFill>
-            <a:schemeClr val="phClr"/>
-          </a:solidFill>
-          <a:prstDash val="solid"/>
-        </a:ln>
-        <a:ln w="25400">
-          <a:solidFill>
-            <a:schemeClr val="phClr"/>
-          </a:solidFill>
-          <a:prstDash val="solid"/>
-        </a:ln>
-      </a:lnStyleLst>
-      <a:effectStyleLst>
-        <a:effectStyle>
-          <a:effectLst/>
-        </a:effectStyle>
-        <a:effectStyle>
-          <a:effectLst/>
-        </a:effectStyle>
-        <a:effectStyle>
-          <a:effectLst>
-            <a:outerShdw blurRad="57150" dist="19050" dir="5400000">
-              <a:srgbClr val="000000">
-                <a:alpha val="16000"/>
-              </a:srgbClr>
-            </a:outerShdw>
-          </a:effectLst>
-        </a:effectStyle>
-        <a:effectStyle>
-          <a:effectLst>
-            <a:outerShdw blurRad="19050" dist="9525" dir="5400000">
-              <a:srgbClr val="000000">
-                <a:alpha val="6000"/>
-              </a:srgbClr>
-            </a:outerShdw>
-          </a:effectLst>
-        </a:effectStyle>
-        <a:effectStyle>
-          <a:effectLst>
-            <a:outerShdw blurRad="28575" dist="9525" dir="5400000">
-              <a:srgbClr val="000000">
-                <a:alpha val="8000"/>
-              </a:srgbClr>
-            </a:outerShdw>
-          </a:effectLst>
-        </a:effectStyle>
-        <a:effectStyle>
-          <a:effectLst>
-            <a:outerShdw blurRad="57150" dist="19050" dir="5400000">
-              <a:srgbClr val="000000">
-                <a:alpha val="10000"/>
-              </a:srgbClr>
-            </a:outerShdw>
-          </a:effectLst>
-        </a:effectStyle>
-        <a:effectStyle>
-          <a:effectLst>
-            <a:outerShdw blurRad="114300" dist="38100" dir="5400000">
-              <a:srgbClr val="000000">
-                <a:alpha val="12000"/>
-              </a:srgbClr>
-            </a:outerShdw>
-          </a:effectLst>
-        </a:effectStyle>
-        <a:effectStyle>
-          <a:effectLst>
-            <a:outerShdw blurRad="171450" dist="57150" dir="5400000">
-              <a:srgbClr val="000000">
-                <a:alpha val="16000"/>
-              </a:srgbClr>
-            </a:outerShdw>
-          </a:effectLst>
-        </a:effectStyle>
-        <a:effectStyle>
-          <a:effectLst>
-            <a:outerShdw blurRad="266700" dist="95250" dir="5400000">
-              <a:srgbClr val="000000">
-                <a:alpha val="24000"/>
-              </a:srgbClr>
-            </a:outerShdw>
-          </a:effectLst>
-        </a:effectStyle>
-      </a:effectStyleLst>
-      <a:bgFillStyleLst>
-        <a:solidFill>
-          <a:schemeClr val="phClr"/>
-        </a:solidFill>
-        <a:solidFill>
-          <a:schemeClr val="phClr">
-            <a:tint val="95000"/>
-            <a:satMod val="170000"/>
-          </a:schemeClr>
-        </a:solidFill>
-        <a:gradFill>
-          <a:gsLst>
-            <a:gs pos="0">
-              <a:schemeClr val="phClr">
-                <a:tint val="93000"/>
-                <a:shade val="98000"/>
-                <a:lumMod val="102000"/>
-                <a:satMod val="150000"/>
-              </a:schemeClr>
-            </a:gs>
-            <a:gs pos="50000">
-              <a:schemeClr val="phClr">
-                <a:tint val="98000"/>
-                <a:shade val="90000"/>
-                <a:lumMod val="103000"/>
-                <a:satMod val="130000"/>
-              </a:schemeClr>
-            </a:gs>
-            <a:gs pos="100000">
-              <a:schemeClr val="phClr">
-                <a:shade val="63000"/>
-                <a:satMod val="120000"/>
-              </a:schemeClr>
-            </a:gs>
-          </a:gsLst>
-          <a:lin ang="5400000" scaled="0"/>
-        </a:gradFill>
-      </a:bgFillStyleLst>
-    </a:fmtScheme>
-  </a:themeElements>
-</a:theme>
-</file>
-
 <file path=ppt/notesSlides/notesSlide1.xml><?xml version="1.0" encoding="utf-8"?>
-<p:notes xmlns:p="http://schemas.openxmlformats.org/presentationml/2006/main">
+<p:notes xmlns:a="http://schemas.openxmlformats.org/drawingml/2006/main" xmlns:r="http://schemas.openxmlformats.org/officeDocument/2006/relationships" xmlns:p="http://schemas.openxmlformats.org/presentationml/2006/main">
   <p:cSld>
     <p:spTree>
       <p:nvGrpSpPr>
@@ -412,16 +291,21 @@
         <p:nvPr/>
       </p:nvGrpSpPr>
       <p:grpSpPr>
-        <a:xfrm xmlns:a="http://schemas.openxmlformats.org/drawingml/2006/main"/>
+        <a:xfrm>
+          <a:off x="0" y="0"/>
+          <a:ext cx="0" cy="0"/>
+          <a:chOff x="0" y="0"/>
+          <a:chExt cx="0" cy="0"/>
+        </a:xfrm>
       </p:grpSpPr>
       <p:sp>
         <p:nvSpPr>
           <p:cNvPr id="2" name="Slide Image Placeholder 1"/>
           <p:cNvSpPr>
-            <a:spLocks xmlns:a="http://schemas.openxmlformats.org/drawingml/2006/main" noGrp="1"/>
+            <a:spLocks noGrp="1" noRot="1" noChangeAspect="1"/>
           </p:cNvSpPr>
           <p:nvPr>
-            <p:ph type="sldImg" idx="0"/>
+            <p:ph type="sldImg"/>
           </p:nvPr>
         </p:nvSpPr>
         <p:spPr/>
@@ -430,7 +314,7 @@
         <p:nvSpPr>
           <p:cNvPr id="3" name="Notes Placeholder 2"/>
           <p:cNvSpPr>
-            <a:spLocks xmlns:a="http://schemas.openxmlformats.org/drawingml/2006/main" noGrp="1"/>
+            <a:spLocks noGrp="1"/>
           </p:cNvSpPr>
           <p:nvPr>
             <p:ph type="body" idx="1"/>
@@ -438,16 +322,18 @@
         </p:nvSpPr>
         <p:spPr/>
         <p:txBody>
-          <a:bodyPr xmlns:a="http://schemas.openxmlformats.org/drawingml/2006/main"/>
-          <a:lstStyle xmlns:a="http://schemas.openxmlformats.org/drawingml/2006/main"/>
-          <a:p xmlns:a="http://schemas.openxmlformats.org/drawingml/2006/main"/>
+          <a:bodyPr/>
+          <a:lstStyle/>
+          <a:p>
+            <a:endParaRPr/>
+          </a:p>
         </p:txBody>
       </p:sp>
       <p:sp>
         <p:nvSpPr>
           <p:cNvPr id="4" name="Slide Number Placeholder 3"/>
           <p:cNvSpPr>
-            <a:spLocks xmlns:a="http://schemas.openxmlformats.org/drawingml/2006/main" noGrp="1"/>
+            <a:spLocks noGrp="1"/>
           </p:cNvSpPr>
           <p:nvPr>
             <p:ph type="sldNum" idx="5"/>
@@ -455,21 +341,23 @@
         </p:nvSpPr>
         <p:spPr/>
         <p:txBody>
-          <a:bodyPr xmlns:a="http://schemas.openxmlformats.org/drawingml/2006/main"/>
-          <a:lstStyle xmlns:a="http://schemas.openxmlformats.org/drawingml/2006/main"/>
-          <a:p xmlns:a="http://schemas.openxmlformats.org/drawingml/2006/main"/>
+          <a:bodyPr/>
+          <a:lstStyle/>
+          <a:p>
+            <a:endParaRPr/>
+          </a:p>
         </p:txBody>
       </p:sp>
     </p:spTree>
   </p:cSld>
   <p:clrMapOvr>
-    <a:masterClrMapping xmlns:a="http://schemas.openxmlformats.org/drawingml/2006/main"/>
+    <a:masterClrMapping/>
   </p:clrMapOvr>
 </p:notes>
 </file>
 
 <file path=ppt/slideLayouts/slideLayout1.xml><?xml version="1.0" encoding="utf-8"?>
-<p:sldLayout xmlns:p="http://schemas.openxmlformats.org/presentationml/2006/main" type="title">
+<p:sldLayout xmlns:a="http://schemas.openxmlformats.org/drawingml/2006/main" xmlns:r="http://schemas.openxmlformats.org/officeDocument/2006/relationships" xmlns:p="http://schemas.openxmlformats.org/presentationml/2006/main" type="title">
   <p:cSld name="Title Slide">
     <p:spTree>
       <p:nvGrpSpPr>
@@ -478,43 +366,48 @@
         <p:nvPr/>
       </p:nvGrpSpPr>
       <p:grpSpPr>
-        <a:xfrm xmlns:a="http://schemas.openxmlformats.org/drawingml/2006/main"/>
+        <a:xfrm>
+          <a:off x="0" y="0"/>
+          <a:ext cx="0" cy="0"/>
+          <a:chOff x="0" y="0"/>
+          <a:chExt cx="0" cy="0"/>
+        </a:xfrm>
       </p:grpSpPr>
       <p:sp>
         <p:nvSpPr>
           <p:cNvPr id="3" name="Title">
-            <a:extLst xmlns:a="http://schemas.openxmlformats.org/drawingml/2006/main">
+            <a:extLst>
               <a:ext uri="{FF2B5EF4-FFF2-40B4-BE49-F238E27FC236}">
                 <a16:creationId xmlns:a16="http://schemas.microsoft.com/office/drawing/2014/main" id="{2151AB8D-BEAA-4C5E-8A66-C68A8E50078E}"/>
               </a:ext>
             </a:extLst>
           </p:cNvPr>
           <p:cNvSpPr>
-            <a:spLocks xmlns:a="http://schemas.openxmlformats.org/drawingml/2006/main" noGrp="1"/>
+            <a:spLocks noGrp="1"/>
           </p:cNvSpPr>
           <p:nvPr>
-            <p:ph type="title" idx="0"/>
+            <p:ph type="title"/>
           </p:nvPr>
         </p:nvSpPr>
         <p:spPr>
-          <a:xfrm xmlns:a="http://schemas.openxmlformats.org/drawingml/2006/main">
+          <a:xfrm>
             <a:off x="1919288" y="4490720"/>
             <a:ext cx="15354300" cy="1717040"/>
           </a:xfrm>
-          <a:prstGeom xmlns:a="http://schemas.openxmlformats.org/drawingml/2006/main" prst="rect">
+          <a:prstGeom prst="rect">
             <a:avLst/>
           </a:prstGeom>
-          <a:noFill xmlns:a="http://schemas.openxmlformats.org/drawingml/2006/main"/>
-          <a:ln xmlns:a="http://schemas.openxmlformats.org/drawingml/2006/main">
+          <a:noFill/>
+          <a:ln>
             <a:noFill/>
             <a:prstDash val="solid"/>
           </a:ln>
         </p:spPr>
         <p:txBody>
-          <a:bodyPr xmlns:a="http://schemas.openxmlformats.org/drawingml/2006/main" wrap="square" lIns="0" tIns="0" rIns="0" bIns="0" anchor="ctr">
+          <a:bodyPr wrap="square" lIns="0" tIns="0" rIns="0" bIns="0" anchor="ctr">
             <a:normAutofit/>
           </a:bodyPr>
-          <a:lstStyle xmlns:a="http://schemas.openxmlformats.org/drawingml/2006/main">
+          <a:lstStyle>
             <a:defPPr algn="ctr">
               <a:defRPr sz="7556" b="1">
                 <a:solidFill>
@@ -706,44 +599,46 @@
               </a:defRPr>
             </a:lvl9pPr>
           </a:lstStyle>
-          <a:p xmlns:a="http://schemas.openxmlformats.org/drawingml/2006/main"/>
+          <a:p>
+            <a:endParaRPr/>
+          </a:p>
         </p:txBody>
       </p:sp>
       <p:sp>
         <p:nvSpPr>
           <p:cNvPr id="2" name="Subtitle">
-            <a:extLst xmlns:a="http://schemas.openxmlformats.org/drawingml/2006/main">
+            <a:extLst>
               <a:ext uri="{FF2B5EF4-FFF2-40B4-BE49-F238E27FC236}">
                 <a16:creationId xmlns:a16="http://schemas.microsoft.com/office/drawing/2014/main" id="{974C4C7D-B64A-4330-9780-BFA53C8EBA15}"/>
               </a:ext>
             </a:extLst>
           </p:cNvPr>
           <p:cNvSpPr>
-            <a:spLocks xmlns:a="http://schemas.openxmlformats.org/drawingml/2006/main" noGrp="1"/>
+            <a:spLocks noGrp="1"/>
           </p:cNvSpPr>
           <p:nvPr>
             <p:ph type="subTitle" idx="1"/>
           </p:nvPr>
         </p:nvSpPr>
         <p:spPr>
-          <a:xfrm xmlns:a="http://schemas.openxmlformats.org/drawingml/2006/main">
+          <a:xfrm>
             <a:off x="2878931" y="6537960"/>
             <a:ext cx="13435013" cy="1320800"/>
           </a:xfrm>
-          <a:prstGeom xmlns:a="http://schemas.openxmlformats.org/drawingml/2006/main" prst="rect">
+          <a:prstGeom prst="rect">
             <a:avLst/>
           </a:prstGeom>
-          <a:noFill xmlns:a="http://schemas.openxmlformats.org/drawingml/2006/main"/>
-          <a:ln xmlns:a="http://schemas.openxmlformats.org/drawingml/2006/main">
+          <a:noFill/>
+          <a:ln>
             <a:noFill/>
             <a:prstDash val="solid"/>
           </a:ln>
         </p:spPr>
         <p:txBody>
-          <a:bodyPr xmlns:a="http://schemas.openxmlformats.org/drawingml/2006/main" wrap="square" lIns="0" tIns="0" rIns="0" bIns="0" anchor="ctr">
+          <a:bodyPr wrap="square" lIns="0" tIns="0" rIns="0" bIns="0" anchor="ctr">
             <a:normAutofit/>
           </a:bodyPr>
-          <a:lstStyle xmlns:a="http://schemas.openxmlformats.org/drawingml/2006/main">
+          <a:lstStyle>
             <a:defPPr algn="ctr">
               <a:defRPr sz="3306" b="0">
                 <a:solidFill>
@@ -935,16 +830,21 @@
               </a:defRPr>
             </a:lvl9pPr>
           </a:lstStyle>
-          <a:p xmlns:a="http://schemas.openxmlformats.org/drawingml/2006/main"/>
+          <a:p>
+            <a:endParaRPr/>
+          </a:p>
         </p:txBody>
       </p:sp>
     </p:spTree>
   </p:cSld>
+  <p:clrMapOvr>
+    <a:masterClrMapping/>
+  </p:clrMapOvr>
 </p:sldLayout>
 </file>
 
 <file path=ppt/slideLayouts/slideLayout2.xml><?xml version="1.0" encoding="utf-8"?>
-<p:sldLayout xmlns:p="http://schemas.openxmlformats.org/presentationml/2006/main">
+<p:sldLayout xmlns:a="http://schemas.openxmlformats.org/drawingml/2006/main" xmlns:r="http://schemas.openxmlformats.org/officeDocument/2006/relationships" xmlns:p="http://schemas.openxmlformats.org/presentationml/2006/main">
   <p:cSld name="Section Header">
     <p:spTree>
       <p:nvGrpSpPr>
@@ -953,43 +853,48 @@
         <p:nvPr/>
       </p:nvGrpSpPr>
       <p:grpSpPr>
-        <a:xfrm xmlns:a="http://schemas.openxmlformats.org/drawingml/2006/main"/>
+        <a:xfrm>
+          <a:off x="0" y="0"/>
+          <a:ext cx="0" cy="0"/>
+          <a:chOff x="0" y="0"/>
+          <a:chExt cx="0" cy="0"/>
+        </a:xfrm>
       </p:grpSpPr>
       <p:sp>
         <p:nvSpPr>
           <p:cNvPr id="2" name="Section title">
-            <a:extLst xmlns:a="http://schemas.openxmlformats.org/drawingml/2006/main">
+            <a:extLst>
               <a:ext uri="{FF2B5EF4-FFF2-40B4-BE49-F238E27FC236}">
                 <a16:creationId xmlns:a16="http://schemas.microsoft.com/office/drawing/2014/main" id="{4B510C7E-E150-4F83-808E-96114CC211E5}"/>
               </a:ext>
             </a:extLst>
           </p:cNvPr>
           <p:cNvSpPr>
-            <a:spLocks xmlns:a="http://schemas.openxmlformats.org/drawingml/2006/main" noGrp="1"/>
+            <a:spLocks noGrp="1"/>
           </p:cNvSpPr>
           <p:nvPr>
-            <p:ph type="title" idx="0"/>
+            <p:ph type="title"/>
           </p:nvPr>
         </p:nvSpPr>
         <p:spPr>
-          <a:xfrm xmlns:a="http://schemas.openxmlformats.org/drawingml/2006/main">
+          <a:xfrm>
             <a:off x="1919288" y="4953000"/>
             <a:ext cx="15354300" cy="1981200"/>
           </a:xfrm>
-          <a:prstGeom xmlns:a="http://schemas.openxmlformats.org/drawingml/2006/main" prst="rect">
+          <a:prstGeom prst="rect">
             <a:avLst/>
           </a:prstGeom>
-          <a:noFill xmlns:a="http://schemas.openxmlformats.org/drawingml/2006/main"/>
-          <a:ln xmlns:a="http://schemas.openxmlformats.org/drawingml/2006/main">
+          <a:noFill/>
+          <a:ln>
             <a:noFill/>
             <a:prstDash val="solid"/>
           </a:ln>
         </p:spPr>
         <p:txBody>
-          <a:bodyPr xmlns:a="http://schemas.openxmlformats.org/drawingml/2006/main" wrap="square" lIns="0" tIns="0" rIns="0" bIns="0" anchor="ctr">
+          <a:bodyPr wrap="square" lIns="0" tIns="0" rIns="0" bIns="0" anchor="ctr">
             <a:normAutofit/>
           </a:bodyPr>
-          <a:lstStyle xmlns:a="http://schemas.openxmlformats.org/drawingml/2006/main">
+          <a:lstStyle>
             <a:defPPr algn="ctr">
               <a:defRPr sz="6612" b="1">
                 <a:solidFill>
@@ -1181,16 +1086,21 @@
               </a:defRPr>
             </a:lvl9pPr>
           </a:lstStyle>
-          <a:p xmlns:a="http://schemas.openxmlformats.org/drawingml/2006/main"/>
+          <a:p>
+            <a:endParaRPr/>
+          </a:p>
         </p:txBody>
       </p:sp>
     </p:spTree>
   </p:cSld>
+  <p:clrMapOvr>
+    <a:masterClrMapping/>
+  </p:clrMapOvr>
 </p:sldLayout>
 </file>
 
 <file path=ppt/slideLayouts/slideLayout3.xml><?xml version="1.0" encoding="utf-8"?>
-<p:sldLayout xmlns:p="http://schemas.openxmlformats.org/presentationml/2006/main">
+<p:sldLayout xmlns:a="http://schemas.openxmlformats.org/drawingml/2006/main" xmlns:r="http://schemas.openxmlformats.org/officeDocument/2006/relationships" xmlns:p="http://schemas.openxmlformats.org/presentationml/2006/main">
   <p:cSld name="Title and Body">
     <p:spTree>
       <p:nvGrpSpPr>
@@ -1199,43 +1109,48 @@
         <p:nvPr/>
       </p:nvGrpSpPr>
       <p:grpSpPr>
-        <a:xfrm xmlns:a="http://schemas.openxmlformats.org/drawingml/2006/main"/>
+        <a:xfrm>
+          <a:off x="0" y="0"/>
+          <a:ext cx="0" cy="0"/>
+          <a:chOff x="0" y="0"/>
+          <a:chExt cx="0" cy="0"/>
+        </a:xfrm>
       </p:grpSpPr>
       <p:sp>
         <p:nvSpPr>
           <p:cNvPr id="3" name="Title">
-            <a:extLst xmlns:a="http://schemas.openxmlformats.org/drawingml/2006/main">
+            <a:extLst>
               <a:ext uri="{FF2B5EF4-FFF2-40B4-BE49-F238E27FC236}">
                 <a16:creationId xmlns:a16="http://schemas.microsoft.com/office/drawing/2014/main" id="{960196F0-77FA-45C6-A383-9FB71A7DC5C0}"/>
               </a:ext>
             </a:extLst>
           </p:cNvPr>
           <p:cNvSpPr>
-            <a:spLocks xmlns:a="http://schemas.openxmlformats.org/drawingml/2006/main" noGrp="1"/>
+            <a:spLocks noGrp="1"/>
           </p:cNvSpPr>
           <p:nvPr>
-            <p:ph type="title" idx="0"/>
+            <p:ph type="title"/>
           </p:nvPr>
         </p:nvSpPr>
         <p:spPr>
-          <a:xfrm xmlns:a="http://schemas.openxmlformats.org/drawingml/2006/main">
+          <a:xfrm>
             <a:off x="1079599" y="924560"/>
             <a:ext cx="17033677" cy="1452880"/>
           </a:xfrm>
-          <a:prstGeom xmlns:a="http://schemas.openxmlformats.org/drawingml/2006/main" prst="rect">
+          <a:prstGeom prst="rect">
             <a:avLst/>
           </a:prstGeom>
-          <a:noFill xmlns:a="http://schemas.openxmlformats.org/drawingml/2006/main"/>
-          <a:ln xmlns:a="http://schemas.openxmlformats.org/drawingml/2006/main">
+          <a:noFill/>
+          <a:ln>
             <a:noFill/>
             <a:prstDash val="solid"/>
           </a:ln>
         </p:spPr>
         <p:txBody>
-          <a:bodyPr xmlns:a="http://schemas.openxmlformats.org/drawingml/2006/main" wrap="square" lIns="0" tIns="0" rIns="0" bIns="0" anchor="t">
+          <a:bodyPr wrap="square" lIns="0" tIns="0" rIns="0" bIns="0" anchor="t">
             <a:normAutofit/>
           </a:bodyPr>
-          <a:lstStyle xmlns:a="http://schemas.openxmlformats.org/drawingml/2006/main">
+          <a:lstStyle>
             <a:defPPr algn="l">
               <a:defRPr sz="5195" b="1">
                 <a:solidFill>
@@ -1427,44 +1342,46 @@
               </a:defRPr>
             </a:lvl9pPr>
           </a:lstStyle>
-          <a:p xmlns:a="http://schemas.openxmlformats.org/drawingml/2006/main"/>
+          <a:p>
+            <a:endParaRPr/>
+          </a:p>
         </p:txBody>
       </p:sp>
       <p:sp>
         <p:nvSpPr>
           <p:cNvPr id="2" name="Body">
-            <a:extLst xmlns:a="http://schemas.openxmlformats.org/drawingml/2006/main">
+            <a:extLst>
               <a:ext uri="{FF2B5EF4-FFF2-40B4-BE49-F238E27FC236}">
                 <a16:creationId xmlns:a16="http://schemas.microsoft.com/office/drawing/2014/main" id="{6B20D1CD-D847-4DF6-BC22-7D177492D2C8}"/>
               </a:ext>
             </a:extLst>
           </p:cNvPr>
           <p:cNvSpPr>
-            <a:spLocks xmlns:a="http://schemas.openxmlformats.org/drawingml/2006/main" noGrp="1"/>
+            <a:spLocks noGrp="1"/>
           </p:cNvSpPr>
           <p:nvPr>
             <p:ph type="body" idx="1"/>
           </p:nvPr>
         </p:nvSpPr>
         <p:spPr>
-          <a:xfrm xmlns:a="http://schemas.openxmlformats.org/drawingml/2006/main">
+          <a:xfrm>
             <a:off x="1079599" y="3302000"/>
             <a:ext cx="17033677" cy="7396480"/>
           </a:xfrm>
-          <a:prstGeom xmlns:a="http://schemas.openxmlformats.org/drawingml/2006/main" prst="rect">
+          <a:prstGeom prst="rect">
             <a:avLst/>
           </a:prstGeom>
-          <a:noFill xmlns:a="http://schemas.openxmlformats.org/drawingml/2006/main"/>
-          <a:ln xmlns:a="http://schemas.openxmlformats.org/drawingml/2006/main">
+          <a:noFill/>
+          <a:ln>
             <a:noFill/>
             <a:prstDash val="solid"/>
           </a:ln>
         </p:spPr>
         <p:txBody>
-          <a:bodyPr xmlns:a="http://schemas.openxmlformats.org/drawingml/2006/main" wrap="square" lIns="0" tIns="0" rIns="0" bIns="0" anchor="t">
+          <a:bodyPr wrap="square" lIns="0" tIns="0" rIns="0" bIns="0" anchor="t">
             <a:normAutofit/>
           </a:bodyPr>
-          <a:lstStyle xmlns:a="http://schemas.openxmlformats.org/drawingml/2006/main">
+          <a:lstStyle>
             <a:defPPr algn="l">
               <a:defRPr sz="3542" b="0">
                 <a:solidFill>
@@ -1656,16 +1573,21 @@
               </a:defRPr>
             </a:lvl9pPr>
           </a:lstStyle>
-          <a:p xmlns:a="http://schemas.openxmlformats.org/drawingml/2006/main"/>
+          <a:p>
+            <a:endParaRPr/>
+          </a:p>
         </p:txBody>
       </p:sp>
     </p:spTree>
   </p:cSld>
+  <p:clrMapOvr>
+    <a:masterClrMapping/>
+  </p:clrMapOvr>
 </p:sldLayout>
 </file>
 
 <file path=ppt/slideLayouts/slideLayout4.xml><?xml version="1.0" encoding="utf-8"?>
-<p:sldLayout xmlns:p="http://schemas.openxmlformats.org/presentationml/2006/main">
+<p:sldLayout xmlns:a="http://schemas.openxmlformats.org/drawingml/2006/main" xmlns:r="http://schemas.openxmlformats.org/officeDocument/2006/relationships" xmlns:p="http://schemas.openxmlformats.org/presentationml/2006/main">
   <p:cSld name="Title and Two Column">
     <p:spTree>
       <p:nvGrpSpPr>
@@ -1674,43 +1596,48 @@
         <p:nvPr/>
       </p:nvGrpSpPr>
       <p:grpSpPr>
-        <a:xfrm xmlns:a="http://schemas.openxmlformats.org/drawingml/2006/main"/>
+        <a:xfrm>
+          <a:off x="0" y="0"/>
+          <a:ext cx="0" cy="0"/>
+          <a:chOff x="0" y="0"/>
+          <a:chExt cx="0" cy="0"/>
+        </a:xfrm>
       </p:grpSpPr>
       <p:sp>
         <p:nvSpPr>
           <p:cNvPr id="4" name="Title">
-            <a:extLst xmlns:a="http://schemas.openxmlformats.org/drawingml/2006/main">
+            <a:extLst>
               <a:ext uri="{FF2B5EF4-FFF2-40B4-BE49-F238E27FC236}">
                 <a16:creationId xmlns:a16="http://schemas.microsoft.com/office/drawing/2014/main" id="{159AED94-560C-4618-9604-7A37E8062D8B}"/>
               </a:ext>
             </a:extLst>
           </p:cNvPr>
           <p:cNvSpPr>
-            <a:spLocks xmlns:a="http://schemas.openxmlformats.org/drawingml/2006/main" noGrp="1"/>
+            <a:spLocks noGrp="1"/>
           </p:cNvSpPr>
           <p:nvPr>
-            <p:ph type="title" idx="0"/>
+            <p:ph type="title"/>
           </p:nvPr>
         </p:nvSpPr>
         <p:spPr>
-          <a:xfrm xmlns:a="http://schemas.openxmlformats.org/drawingml/2006/main">
+          <a:xfrm>
             <a:off x="1079599" y="924560"/>
             <a:ext cx="17033677" cy="1452880"/>
           </a:xfrm>
-          <a:prstGeom xmlns:a="http://schemas.openxmlformats.org/drawingml/2006/main" prst="rect">
+          <a:prstGeom prst="rect">
             <a:avLst/>
           </a:prstGeom>
-          <a:noFill xmlns:a="http://schemas.openxmlformats.org/drawingml/2006/main"/>
-          <a:ln xmlns:a="http://schemas.openxmlformats.org/drawingml/2006/main">
+          <a:noFill/>
+          <a:ln>
             <a:noFill/>
             <a:prstDash val="solid"/>
           </a:ln>
         </p:spPr>
         <p:txBody>
-          <a:bodyPr xmlns:a="http://schemas.openxmlformats.org/drawingml/2006/main" wrap="square" lIns="0" tIns="0" rIns="0" bIns="0" anchor="t">
+          <a:bodyPr wrap="square" lIns="0" tIns="0" rIns="0" bIns="0" anchor="t">
             <a:normAutofit/>
           </a:bodyPr>
-          <a:lstStyle xmlns:a="http://schemas.openxmlformats.org/drawingml/2006/main">
+          <a:lstStyle>
             <a:defPPr algn="l">
               <a:defRPr sz="5195" b="1">
                 <a:solidFill>
@@ -1902,44 +1829,46 @@
               </a:defRPr>
             </a:lvl9pPr>
           </a:lstStyle>
-          <a:p xmlns:a="http://schemas.openxmlformats.org/drawingml/2006/main"/>
+          <a:p>
+            <a:endParaRPr/>
+          </a:p>
         </p:txBody>
       </p:sp>
       <p:sp>
         <p:nvSpPr>
           <p:cNvPr id="2" name="Left column">
-            <a:extLst xmlns:a="http://schemas.openxmlformats.org/drawingml/2006/main">
+            <a:extLst>
               <a:ext uri="{FF2B5EF4-FFF2-40B4-BE49-F238E27FC236}">
                 <a16:creationId xmlns:a16="http://schemas.microsoft.com/office/drawing/2014/main" id="{0A4328FD-2FAD-4193-8D5F-7630482A121E}"/>
               </a:ext>
             </a:extLst>
           </p:cNvPr>
           <p:cNvSpPr>
-            <a:spLocks xmlns:a="http://schemas.openxmlformats.org/drawingml/2006/main" noGrp="1"/>
+            <a:spLocks noGrp="1"/>
           </p:cNvSpPr>
           <p:nvPr>
             <p:ph type="body" idx="1"/>
           </p:nvPr>
         </p:nvSpPr>
         <p:spPr>
-          <a:xfrm xmlns:a="http://schemas.openxmlformats.org/drawingml/2006/main">
+          <a:xfrm>
             <a:off x="1079599" y="3302000"/>
             <a:ext cx="7917061" cy="7396480"/>
           </a:xfrm>
-          <a:prstGeom xmlns:a="http://schemas.openxmlformats.org/drawingml/2006/main" prst="rect">
+          <a:prstGeom prst="rect">
             <a:avLst/>
           </a:prstGeom>
-          <a:noFill xmlns:a="http://schemas.openxmlformats.org/drawingml/2006/main"/>
-          <a:ln xmlns:a="http://schemas.openxmlformats.org/drawingml/2006/main">
+          <a:noFill/>
+          <a:ln>
             <a:noFill/>
             <a:prstDash val="solid"/>
           </a:ln>
         </p:spPr>
         <p:txBody>
-          <a:bodyPr xmlns:a="http://schemas.openxmlformats.org/drawingml/2006/main" wrap="square" lIns="0" tIns="0" rIns="0" bIns="0" anchor="t">
+          <a:bodyPr wrap="square" lIns="0" tIns="0" rIns="0" bIns="0" anchor="t">
             <a:normAutofit/>
           </a:bodyPr>
-          <a:lstStyle xmlns:a="http://schemas.openxmlformats.org/drawingml/2006/main">
+          <a:lstStyle>
             <a:defPPr algn="l">
               <a:defRPr sz="3306" b="0">
                 <a:solidFill>
@@ -2131,44 +2060,46 @@
               </a:defRPr>
             </a:lvl9pPr>
           </a:lstStyle>
-          <a:p xmlns:a="http://schemas.openxmlformats.org/drawingml/2006/main"/>
+          <a:p>
+            <a:endParaRPr/>
+          </a:p>
         </p:txBody>
       </p:sp>
       <p:sp>
         <p:nvSpPr>
           <p:cNvPr id="3" name="Right column">
-            <a:extLst xmlns:a="http://schemas.openxmlformats.org/drawingml/2006/main">
+            <a:extLst>
               <a:ext uri="{FF2B5EF4-FFF2-40B4-BE49-F238E27FC236}">
                 <a16:creationId xmlns:a16="http://schemas.microsoft.com/office/drawing/2014/main" id="{F56F3050-07E4-46D2-B01E-301CE06593EA}"/>
               </a:ext>
             </a:extLst>
           </p:cNvPr>
           <p:cNvSpPr>
-            <a:spLocks xmlns:a="http://schemas.openxmlformats.org/drawingml/2006/main" noGrp="1"/>
+            <a:spLocks noGrp="1"/>
           </p:cNvSpPr>
           <p:nvPr>
             <p:ph type="body" idx="2"/>
           </p:nvPr>
         </p:nvSpPr>
         <p:spPr>
-          <a:xfrm xmlns:a="http://schemas.openxmlformats.org/drawingml/2006/main">
+          <a:xfrm>
             <a:off x="10196215" y="3302000"/>
             <a:ext cx="7917061" cy="7396480"/>
           </a:xfrm>
-          <a:prstGeom xmlns:a="http://schemas.openxmlformats.org/drawingml/2006/main" prst="rect">
+          <a:prstGeom prst="rect">
             <a:avLst/>
           </a:prstGeom>
-          <a:noFill xmlns:a="http://schemas.openxmlformats.org/drawingml/2006/main"/>
-          <a:ln xmlns:a="http://schemas.openxmlformats.org/drawingml/2006/main">
+          <a:noFill/>
+          <a:ln>
             <a:noFill/>
             <a:prstDash val="solid"/>
           </a:ln>
         </p:spPr>
         <p:txBody>
-          <a:bodyPr xmlns:a="http://schemas.openxmlformats.org/drawingml/2006/main" wrap="square" lIns="0" tIns="0" rIns="0" bIns="0" anchor="t">
+          <a:bodyPr wrap="square" lIns="0" tIns="0" rIns="0" bIns="0" anchor="t">
             <a:normAutofit/>
           </a:bodyPr>
-          <a:lstStyle xmlns:a="http://schemas.openxmlformats.org/drawingml/2006/main">
+          <a:lstStyle>
             <a:defPPr algn="l">
               <a:defRPr sz="3306" b="0">
                 <a:solidFill>
@@ -2360,16 +2291,21 @@
               </a:defRPr>
             </a:lvl9pPr>
           </a:lstStyle>
-          <a:p xmlns:a="http://schemas.openxmlformats.org/drawingml/2006/main"/>
+          <a:p>
+            <a:endParaRPr/>
+          </a:p>
         </p:txBody>
       </p:sp>
     </p:spTree>
   </p:cSld>
+  <p:clrMapOvr>
+    <a:masterClrMapping/>
+  </p:clrMapOvr>
 </p:sldLayout>
 </file>
 
 <file path=ppt/slideLayouts/slideLayout5.xml><?xml version="1.0" encoding="utf-8"?>
-<p:sldLayout xmlns:p="http://schemas.openxmlformats.org/presentationml/2006/main">
+<p:sldLayout xmlns:a="http://schemas.openxmlformats.org/drawingml/2006/main" xmlns:r="http://schemas.openxmlformats.org/officeDocument/2006/relationships" xmlns:p="http://schemas.openxmlformats.org/presentationml/2006/main">
   <p:cSld name="Title and One Column">
     <p:spTree>
       <p:nvGrpSpPr>
@@ -2378,43 +2314,48 @@
         <p:nvPr/>
       </p:nvGrpSpPr>
       <p:grpSpPr>
-        <a:xfrm xmlns:a="http://schemas.openxmlformats.org/drawingml/2006/main"/>
+        <a:xfrm>
+          <a:off x="0" y="0"/>
+          <a:ext cx="0" cy="0"/>
+          <a:chOff x="0" y="0"/>
+          <a:chExt cx="0" cy="0"/>
+        </a:xfrm>
       </p:grpSpPr>
       <p:sp>
         <p:nvSpPr>
           <p:cNvPr id="3" name="Title">
-            <a:extLst xmlns:a="http://schemas.openxmlformats.org/drawingml/2006/main">
+            <a:extLst>
               <a:ext uri="{FF2B5EF4-FFF2-40B4-BE49-F238E27FC236}">
                 <a16:creationId xmlns:a16="http://schemas.microsoft.com/office/drawing/2014/main" id="{F4AA8BCD-3F88-4490-AAA0-FE82F6E6152E}"/>
               </a:ext>
             </a:extLst>
           </p:cNvPr>
           <p:cNvSpPr>
-            <a:spLocks xmlns:a="http://schemas.openxmlformats.org/drawingml/2006/main" noGrp="1"/>
+            <a:spLocks noGrp="1"/>
           </p:cNvSpPr>
           <p:nvPr>
-            <p:ph type="title" idx="0"/>
+            <p:ph type="title"/>
           </p:nvPr>
         </p:nvSpPr>
         <p:spPr>
-          <a:xfrm xmlns:a="http://schemas.openxmlformats.org/drawingml/2006/main">
+          <a:xfrm>
             <a:off x="1079599" y="924560"/>
             <a:ext cx="17033677" cy="1452880"/>
           </a:xfrm>
-          <a:prstGeom xmlns:a="http://schemas.openxmlformats.org/drawingml/2006/main" prst="rect">
+          <a:prstGeom prst="rect">
             <a:avLst/>
           </a:prstGeom>
-          <a:noFill xmlns:a="http://schemas.openxmlformats.org/drawingml/2006/main"/>
-          <a:ln xmlns:a="http://schemas.openxmlformats.org/drawingml/2006/main">
+          <a:noFill/>
+          <a:ln>
             <a:noFill/>
             <a:prstDash val="solid"/>
           </a:ln>
         </p:spPr>
         <p:txBody>
-          <a:bodyPr xmlns:a="http://schemas.openxmlformats.org/drawingml/2006/main" wrap="square" lIns="0" tIns="0" rIns="0" bIns="0" anchor="t">
+          <a:bodyPr wrap="square" lIns="0" tIns="0" rIns="0" bIns="0" anchor="t">
             <a:normAutofit/>
           </a:bodyPr>
-          <a:lstStyle xmlns:a="http://schemas.openxmlformats.org/drawingml/2006/main">
+          <a:lstStyle>
             <a:defPPr algn="l">
               <a:defRPr sz="5195" b="1">
                 <a:solidFill>
@@ -2606,44 +2547,46 @@
               </a:defRPr>
             </a:lvl9pPr>
           </a:lstStyle>
-          <a:p xmlns:a="http://schemas.openxmlformats.org/drawingml/2006/main"/>
+          <a:p>
+            <a:endParaRPr/>
+          </a:p>
         </p:txBody>
       </p:sp>
       <p:sp>
         <p:nvSpPr>
           <p:cNvPr id="2" name="Left column">
-            <a:extLst xmlns:a="http://schemas.openxmlformats.org/drawingml/2006/main">
+            <a:extLst>
               <a:ext uri="{FF2B5EF4-FFF2-40B4-BE49-F238E27FC236}">
                 <a16:creationId xmlns:a16="http://schemas.microsoft.com/office/drawing/2014/main" id="{B81D3E0E-5861-4ABA-9DD9-69E378BCE3AA}"/>
               </a:ext>
             </a:extLst>
           </p:cNvPr>
           <p:cNvSpPr>
-            <a:spLocks xmlns:a="http://schemas.openxmlformats.org/drawingml/2006/main" noGrp="1"/>
+            <a:spLocks noGrp="1"/>
           </p:cNvSpPr>
           <p:nvPr>
             <p:ph type="body" idx="1"/>
           </p:nvPr>
         </p:nvSpPr>
         <p:spPr>
-          <a:xfrm xmlns:a="http://schemas.openxmlformats.org/drawingml/2006/main">
+          <a:xfrm>
             <a:off x="1079599" y="3302000"/>
             <a:ext cx="7917061" cy="7396480"/>
           </a:xfrm>
-          <a:prstGeom xmlns:a="http://schemas.openxmlformats.org/drawingml/2006/main" prst="rect">
+          <a:prstGeom prst="rect">
             <a:avLst/>
           </a:prstGeom>
-          <a:noFill xmlns:a="http://schemas.openxmlformats.org/drawingml/2006/main"/>
-          <a:ln xmlns:a="http://schemas.openxmlformats.org/drawingml/2006/main">
+          <a:noFill/>
+          <a:ln>
             <a:noFill/>
             <a:prstDash val="solid"/>
           </a:ln>
         </p:spPr>
         <p:txBody>
-          <a:bodyPr xmlns:a="http://schemas.openxmlformats.org/drawingml/2006/main" wrap="square" lIns="0" tIns="0" rIns="0" bIns="0" anchor="t">
+          <a:bodyPr wrap="square" lIns="0" tIns="0" rIns="0" bIns="0" anchor="t">
             <a:normAutofit/>
           </a:bodyPr>
-          <a:lstStyle xmlns:a="http://schemas.openxmlformats.org/drawingml/2006/main">
+          <a:lstStyle>
             <a:defPPr algn="l">
               <a:defRPr sz="3542" b="0">
                 <a:solidFill>
@@ -2835,16 +2778,21 @@
               </a:defRPr>
             </a:lvl9pPr>
           </a:lstStyle>
-          <a:p xmlns:a="http://schemas.openxmlformats.org/drawingml/2006/main"/>
+          <a:p>
+            <a:endParaRPr/>
+          </a:p>
         </p:txBody>
       </p:sp>
     </p:spTree>
   </p:cSld>
+  <p:clrMapOvr>
+    <a:masterClrMapping/>
+  </p:clrMapOvr>
 </p:sldLayout>
 </file>
 
 <file path=ppt/slideLayouts/slideLayout6.xml><?xml version="1.0" encoding="utf-8"?>
-<p:sldLayout xmlns:p="http://schemas.openxmlformats.org/presentationml/2006/main" type="blank">
+<p:sldLayout xmlns:a="http://schemas.openxmlformats.org/drawingml/2006/main" xmlns:r="http://schemas.openxmlformats.org/officeDocument/2006/relationships" xmlns:p="http://schemas.openxmlformats.org/presentationml/2006/main" type="blank">
   <p:cSld name="Blank">
     <p:spTree>
       <p:nvGrpSpPr>
@@ -2853,19 +2801,27 @@
         <p:nvPr/>
       </p:nvGrpSpPr>
       <p:grpSpPr>
-        <a:xfrm xmlns:a="http://schemas.openxmlformats.org/drawingml/2006/main"/>
+        <a:xfrm>
+          <a:off x="0" y="0"/>
+          <a:ext cx="0" cy="0"/>
+          <a:chOff x="0" y="0"/>
+          <a:chExt cx="0" cy="0"/>
+        </a:xfrm>
       </p:grpSpPr>
     </p:spTree>
   </p:cSld>
+  <p:clrMapOvr>
+    <a:masterClrMapping/>
+  </p:clrMapOvr>
 </p:sldLayout>
 </file>
 
 <file path=ppt/slideMasters/slideMaster1.xml><?xml version="1.0" encoding="utf-8"?>
-<p:sldMaster xmlns:p="http://schemas.openxmlformats.org/presentationml/2006/main">
+<p:sldMaster xmlns:a="http://schemas.openxmlformats.org/drawingml/2006/main" xmlns:r="http://schemas.openxmlformats.org/officeDocument/2006/relationships" xmlns:p="http://schemas.openxmlformats.org/presentationml/2006/main">
   <p:cSld name="Master">
     <p:bg>
       <p:bgRef idx="1001">
-        <a:schemeClr xmlns:a="http://schemas.openxmlformats.org/drawingml/2006/main" val="bg1"/>
+        <a:schemeClr val="bg1"/>
       </p:bgRef>
     </p:bg>
     <p:spTree>
@@ -2875,22 +2831,27 @@
         <p:nvPr/>
       </p:nvGrpSpPr>
       <p:grpSpPr>
-        <a:xfrm xmlns:a="http://schemas.openxmlformats.org/drawingml/2006/main"/>
+        <a:xfrm>
+          <a:off x="0" y="0"/>
+          <a:ext cx="0" cy="0"/>
+          <a:chOff x="0" y="0"/>
+          <a:chExt cx="0" cy="0"/>
+        </a:xfrm>
       </p:grpSpPr>
     </p:spTree>
   </p:cSld>
   <p:clrMap bg1="lt1" tx1="dk1" bg2="lt2" tx2="dk2" accent1="accent1" accent2="accent2" accent3="accent3" accent4="accent4" accent5="accent5" accent6="accent6" hlink="hlink" folHlink="folHlink"/>
   <p:sldLayoutIdLst>
-    <p:sldLayoutId xmlns:r="http://schemas.openxmlformats.org/officeDocument/2006/relationships" id="2147483649" r:id="R2f709bbd60ab41f0"/>
-    <p:sldLayoutId xmlns:r="http://schemas.openxmlformats.org/officeDocument/2006/relationships" id="2147483650" r:id="R93a83fe9b51f42ed"/>
-    <p:sldLayoutId xmlns:r="http://schemas.openxmlformats.org/officeDocument/2006/relationships" id="2147483651" r:id="R389b20a4570743cb"/>
-    <p:sldLayoutId xmlns:r="http://schemas.openxmlformats.org/officeDocument/2006/relationships" id="2147483652" r:id="Ra8644196e2f44be2"/>
-    <p:sldLayoutId xmlns:r="http://schemas.openxmlformats.org/officeDocument/2006/relationships" id="2147483653" r:id="Rf4cb726eef814c18"/>
-    <p:sldLayoutId xmlns:r="http://schemas.openxmlformats.org/officeDocument/2006/relationships" id="2147483654" r:id="Rfdabe938022c4a0c"/>
+    <p:sldLayoutId id="2147483649" r:id="rId1"/>
+    <p:sldLayoutId id="2147483650" r:id="rId2"/>
+    <p:sldLayoutId id="2147483651" r:id="rId3"/>
+    <p:sldLayoutId id="2147483652" r:id="rId4"/>
+    <p:sldLayoutId id="2147483653" r:id="rId5"/>
+    <p:sldLayoutId id="2147483654" r:id="rId6"/>
   </p:sldLayoutIdLst>
   <p:txStyles>
     <p:titleStyle>
-      <a:lvl1pPr xmlns:a="http://schemas.openxmlformats.org/drawingml/2006/main" algn="l">
+      <a:lvl1pPr algn="l">
         <a:lnSpc>
           <a:spcPct val="90000"/>
         </a:lnSpc>
@@ -2909,7 +2870,7 @@
       </a:lvl1pPr>
     </p:titleStyle>
     <p:bodyStyle>
-      <a:lvl1pPr xmlns:a="http://schemas.openxmlformats.org/drawingml/2006/main" marL="228600" indent="-228600" algn="l">
+      <a:lvl1pPr marL="228600" indent="-228600" algn="l">
         <a:lnSpc>
           <a:spcPct val="90000"/>
         </a:lnSpc>
@@ -2926,7 +2887,7 @@
           <a:cs typeface="+mn-lt"/>
         </a:defRPr>
       </a:lvl1pPr>
-      <a:lvl2pPr xmlns:a="http://schemas.openxmlformats.org/drawingml/2006/main" marL="685800" indent="-228600" algn="l">
+      <a:lvl2pPr marL="685800" indent="-228600" algn="l">
         <a:lnSpc>
           <a:spcPct val="90000"/>
         </a:lnSpc>
@@ -2943,7 +2904,7 @@
           <a:cs typeface="+mn-lt"/>
         </a:defRPr>
       </a:lvl2pPr>
-      <a:lvl3pPr xmlns:a="http://schemas.openxmlformats.org/drawingml/2006/main" marL="1143000" indent="-228600" algn="l">
+      <a:lvl3pPr marL="1143000" indent="-228600" algn="l">
         <a:lnSpc>
           <a:spcPct val="90000"/>
         </a:lnSpc>
@@ -2960,7 +2921,7 @@
           <a:cs typeface="+mn-lt"/>
         </a:defRPr>
       </a:lvl3pPr>
-      <a:lvl4pPr xmlns:a="http://schemas.openxmlformats.org/drawingml/2006/main" marL="1600200" indent="-228600" algn="l">
+      <a:lvl4pPr marL="1600200" indent="-228600" algn="l">
         <a:lnSpc>
           <a:spcPct val="90000"/>
         </a:lnSpc>
@@ -2977,7 +2938,7 @@
           <a:cs typeface="+mn-lt"/>
         </a:defRPr>
       </a:lvl4pPr>
-      <a:lvl5pPr xmlns:a="http://schemas.openxmlformats.org/drawingml/2006/main" marL="2057400" indent="-228600" algn="l">
+      <a:lvl5pPr marL="2057400" indent="-228600" algn="l">
         <a:lnSpc>
           <a:spcPct val="90000"/>
         </a:lnSpc>
@@ -2994,7 +2955,7 @@
           <a:cs typeface="+mn-lt"/>
         </a:defRPr>
       </a:lvl5pPr>
-      <a:lvl6pPr xmlns:a="http://schemas.openxmlformats.org/drawingml/2006/main" marL="2514600" indent="-228600" algn="l">
+      <a:lvl6pPr marL="2514600" indent="-228600" algn="l">
         <a:lnSpc>
           <a:spcPct val="90000"/>
         </a:lnSpc>
@@ -3011,7 +2972,7 @@
           <a:cs typeface="+mn-lt"/>
         </a:defRPr>
       </a:lvl6pPr>
-      <a:lvl7pPr xmlns:a="http://schemas.openxmlformats.org/drawingml/2006/main" marL="2971800" indent="-228600" algn="l">
+      <a:lvl7pPr marL="2971800" indent="-228600" algn="l">
         <a:lnSpc>
           <a:spcPct val="90000"/>
         </a:lnSpc>
@@ -3028,7 +2989,7 @@
           <a:cs typeface="+mn-lt"/>
         </a:defRPr>
       </a:lvl7pPr>
-      <a:lvl8pPr xmlns:a="http://schemas.openxmlformats.org/drawingml/2006/main" marL="3429000" indent="-228600" algn="l">
+      <a:lvl8pPr marL="3429000" indent="-228600" algn="l">
         <a:lnSpc>
           <a:spcPct val="90000"/>
         </a:lnSpc>
@@ -3045,7 +3006,7 @@
           <a:cs typeface="+mn-lt"/>
         </a:defRPr>
       </a:lvl8pPr>
-      <a:lvl9pPr xmlns:a="http://schemas.openxmlformats.org/drawingml/2006/main" marL="3886200" indent="-228600" algn="l">
+      <a:lvl9pPr marL="3886200" indent="-228600" algn="l">
         <a:lnSpc>
           <a:spcPct val="90000"/>
         </a:lnSpc>
@@ -3064,7 +3025,7 @@
       </a:lvl9pPr>
     </p:bodyStyle>
     <p:otherStyle>
-      <a:lvl1pPr xmlns:a="http://schemas.openxmlformats.org/drawingml/2006/main" marL="0" algn="l">
+      <a:lvl1pPr marL="0" algn="l">
         <a:buNone/>
         <a:defRPr sz="1800">
           <a:solidFill>
@@ -3075,7 +3036,7 @@
           <a:cs typeface="+mn-lt"/>
         </a:defRPr>
       </a:lvl1pPr>
-      <a:lvl2pPr xmlns:a="http://schemas.openxmlformats.org/drawingml/2006/main" marL="457200" algn="l">
+      <a:lvl2pPr marL="457200" algn="l">
         <a:buNone/>
         <a:defRPr sz="1800">
           <a:solidFill>
@@ -3086,7 +3047,7 @@
           <a:cs typeface="+mn-lt"/>
         </a:defRPr>
       </a:lvl2pPr>
-      <a:lvl3pPr xmlns:a="http://schemas.openxmlformats.org/drawingml/2006/main" marL="914400" algn="l">
+      <a:lvl3pPr marL="914400" algn="l">
         <a:buNone/>
         <a:defRPr sz="1800">
           <a:solidFill>
@@ -3097,7 +3058,7 @@
           <a:cs typeface="+mn-lt"/>
         </a:defRPr>
       </a:lvl3pPr>
-      <a:lvl4pPr xmlns:a="http://schemas.openxmlformats.org/drawingml/2006/main" marL="1371600" algn="l">
+      <a:lvl4pPr marL="1371600" algn="l">
         <a:buNone/>
         <a:defRPr sz="1800">
           <a:solidFill>
@@ -3108,7 +3069,7 @@
           <a:cs typeface="+mn-lt"/>
         </a:defRPr>
       </a:lvl4pPr>
-      <a:lvl5pPr xmlns:a="http://schemas.openxmlformats.org/drawingml/2006/main" marL="1828800" algn="l">
+      <a:lvl5pPr marL="1828800" algn="l">
         <a:buNone/>
         <a:defRPr sz="1800">
           <a:solidFill>
@@ -3119,7 +3080,7 @@
           <a:cs typeface="+mn-lt"/>
         </a:defRPr>
       </a:lvl5pPr>
-      <a:lvl6pPr xmlns:a="http://schemas.openxmlformats.org/drawingml/2006/main" marL="2286000" algn="l">
+      <a:lvl6pPr marL="2286000" algn="l">
         <a:buNone/>
         <a:defRPr sz="1800">
           <a:solidFill>
@@ -3130,7 +3091,7 @@
           <a:cs typeface="+mn-lt"/>
         </a:defRPr>
       </a:lvl6pPr>
-      <a:lvl7pPr xmlns:a="http://schemas.openxmlformats.org/drawingml/2006/main" marL="2743200" algn="l">
+      <a:lvl7pPr marL="2743200" algn="l">
         <a:buNone/>
         <a:defRPr sz="1800">
           <a:solidFill>
@@ -3141,7 +3102,7 @@
           <a:cs typeface="+mn-lt"/>
         </a:defRPr>
       </a:lvl7pPr>
-      <a:lvl8pPr xmlns:a="http://schemas.openxmlformats.org/drawingml/2006/main" marL="3200400" algn="l">
+      <a:lvl8pPr marL="3200400" algn="l">
         <a:buNone/>
         <a:defRPr sz="1800">
           <a:solidFill>
@@ -3152,7 +3113,7 @@
           <a:cs typeface="+mn-lt"/>
         </a:defRPr>
       </a:lvl8pPr>
-      <a:lvl9pPr xmlns:a="http://schemas.openxmlformats.org/drawingml/2006/main" marL="3657600" algn="l">
+      <a:lvl9pPr marL="3657600" algn="l">
         <a:buNone/>
         <a:defRPr sz="1800">
           <a:solidFill>
@@ -3168,259 +3129,15 @@
 </p:sldMaster>
 </file>
 
-<file path=ppt/slideMasters/theme/theme2.xml><?xml version="1.0" encoding="utf-8"?>
-<a:theme xmlns:a="http://schemas.openxmlformats.org/drawingml/2006/main" name="ChatGPT">
-  <a:themeElements>
-    <a:clrScheme name="ChatGPT">
-      <a:dk1>
-        <a:srgbClr val="000000"/>
-      </a:dk1>
-      <a:lt1>
-        <a:srgbClr val="FFFFFF"/>
-      </a:lt1>
-      <a:dk2>
-        <a:srgbClr val="0E2841"/>
-      </a:dk2>
-      <a:lt2>
-        <a:srgbClr val="E8E8E8"/>
-      </a:lt2>
-      <a:accent1>
-        <a:srgbClr val="156082"/>
-      </a:accent1>
-      <a:accent2>
-        <a:srgbClr val="E97132"/>
-      </a:accent2>
-      <a:accent3>
-        <a:srgbClr val="196B24"/>
-      </a:accent3>
-      <a:accent4>
-        <a:srgbClr val="0F9ED5"/>
-      </a:accent4>
-      <a:accent5>
-        <a:srgbClr val="A02B93"/>
-      </a:accent5>
-      <a:accent6>
-        <a:srgbClr val="4EA72E"/>
-      </a:accent6>
-      <a:hlink>
-        <a:srgbClr val="467886"/>
-      </a:hlink>
-      <a:folHlink>
-        <a:srgbClr val="96607D"/>
-      </a:folHlink>
-    </a:clrScheme>
-    <a:fontScheme name="">
-      <a:majorFont>
-        <a:latin typeface="Aptos"/>
-        <a:ea typeface=""/>
-        <a:cs typeface=""/>
-      </a:majorFont>
-      <a:minorFont>
-        <a:latin typeface="Aptos"/>
-        <a:ea typeface=""/>
-        <a:cs typeface=""/>
-      </a:minorFont>
-    </a:fontScheme>
-    <a:fmtScheme name="ChatGPT">
-      <a:fillStyleLst>
-        <a:solidFill>
-          <a:schemeClr val="phClr"/>
-        </a:solidFill>
-        <a:gradFill>
-          <a:gsLst>
-            <a:gs pos="0">
-              <a:schemeClr val="phClr">
-                <a:tint val="67000"/>
-                <a:lumMod val="110000"/>
-                <a:satMod val="105000"/>
-              </a:schemeClr>
-            </a:gs>
-            <a:gs pos="50000">
-              <a:schemeClr val="phClr">
-                <a:tint val="73000"/>
-                <a:lumMod val="105000"/>
-                <a:satMod val="103000"/>
-              </a:schemeClr>
-            </a:gs>
-            <a:gs pos="100000">
-              <a:schemeClr val="phClr">
-                <a:tint val="81000"/>
-                <a:lumMod val="105000"/>
-                <a:satMod val="109000"/>
-              </a:schemeClr>
-            </a:gs>
-          </a:gsLst>
-          <a:lin ang="5400000" scaled="0"/>
-        </a:gradFill>
-        <a:gradFill>
-          <a:gsLst>
-            <a:gs pos="0">
-              <a:schemeClr val="phClr">
-                <a:tint val="94000"/>
-                <a:lumMod val="102000"/>
-                <a:satMod val="103000"/>
-              </a:schemeClr>
-            </a:gs>
-            <a:gs pos="50000">
-              <a:schemeClr val="phClr">
-                <a:shade val="100000"/>
-                <a:lumMod val="100000"/>
-                <a:satMod val="110000"/>
-              </a:schemeClr>
-            </a:gs>
-            <a:gs pos="100000">
-              <a:schemeClr val="phClr">
-                <a:shade val="78000"/>
-                <a:lumMod val="99000"/>
-                <a:satMod val="120000"/>
-              </a:schemeClr>
-            </a:gs>
-          </a:gsLst>
-          <a:lin ang="5400000" scaled="0"/>
-        </a:gradFill>
-      </a:fillStyleLst>
-      <a:lnStyleLst>
-        <a:ln w="12700">
-          <a:solidFill>
-            <a:schemeClr val="phClr"/>
-          </a:solidFill>
-          <a:prstDash val="solid"/>
-        </a:ln>
-        <a:ln w="19050">
-          <a:solidFill>
-            <a:schemeClr val="phClr"/>
-          </a:solidFill>
-          <a:prstDash val="solid"/>
-        </a:ln>
-        <a:ln w="25400">
-          <a:solidFill>
-            <a:schemeClr val="phClr"/>
-          </a:solidFill>
-          <a:prstDash val="solid"/>
-        </a:ln>
-      </a:lnStyleLst>
-      <a:effectStyleLst>
-        <a:effectStyle>
-          <a:effectLst/>
-        </a:effectStyle>
-        <a:effectStyle>
-          <a:effectLst/>
-        </a:effectStyle>
-        <a:effectStyle>
-          <a:effectLst>
-            <a:outerShdw blurRad="57150" dist="19050" dir="5400000">
-              <a:srgbClr val="000000">
-                <a:alpha val="16000"/>
-              </a:srgbClr>
-            </a:outerShdw>
-          </a:effectLst>
-        </a:effectStyle>
-        <a:effectStyle>
-          <a:effectLst>
-            <a:outerShdw blurRad="19050" dist="9525" dir="5400000">
-              <a:srgbClr val="000000">
-                <a:alpha val="6000"/>
-              </a:srgbClr>
-            </a:outerShdw>
-          </a:effectLst>
-        </a:effectStyle>
-        <a:effectStyle>
-          <a:effectLst>
-            <a:outerShdw blurRad="28575" dist="9525" dir="5400000">
-              <a:srgbClr val="000000">
-                <a:alpha val="8000"/>
-              </a:srgbClr>
-            </a:outerShdw>
-          </a:effectLst>
-        </a:effectStyle>
-        <a:effectStyle>
-          <a:effectLst>
-            <a:outerShdw blurRad="57150" dist="19050" dir="5400000">
-              <a:srgbClr val="000000">
-                <a:alpha val="10000"/>
-              </a:srgbClr>
-            </a:outerShdw>
-          </a:effectLst>
-        </a:effectStyle>
-        <a:effectStyle>
-          <a:effectLst>
-            <a:outerShdw blurRad="114300" dist="38100" dir="5400000">
-              <a:srgbClr val="000000">
-                <a:alpha val="12000"/>
-              </a:srgbClr>
-            </a:outerShdw>
-          </a:effectLst>
-        </a:effectStyle>
-        <a:effectStyle>
-          <a:effectLst>
-            <a:outerShdw blurRad="171450" dist="57150" dir="5400000">
-              <a:srgbClr val="000000">
-                <a:alpha val="16000"/>
-              </a:srgbClr>
-            </a:outerShdw>
-          </a:effectLst>
-        </a:effectStyle>
-        <a:effectStyle>
-          <a:effectLst>
-            <a:outerShdw blurRad="266700" dist="95250" dir="5400000">
-              <a:srgbClr val="000000">
-                <a:alpha val="24000"/>
-              </a:srgbClr>
-            </a:outerShdw>
-          </a:effectLst>
-        </a:effectStyle>
-      </a:effectStyleLst>
-      <a:bgFillStyleLst>
-        <a:solidFill>
-          <a:schemeClr val="phClr"/>
-        </a:solidFill>
-        <a:solidFill>
-          <a:schemeClr val="phClr">
-            <a:tint val="95000"/>
-            <a:satMod val="170000"/>
-          </a:schemeClr>
-        </a:solidFill>
-        <a:gradFill>
-          <a:gsLst>
-            <a:gs pos="0">
-              <a:schemeClr val="phClr">
-                <a:tint val="93000"/>
-                <a:shade val="98000"/>
-                <a:lumMod val="102000"/>
-                <a:satMod val="150000"/>
-              </a:schemeClr>
-            </a:gs>
-            <a:gs pos="50000">
-              <a:schemeClr val="phClr">
-                <a:tint val="98000"/>
-                <a:shade val="90000"/>
-                <a:lumMod val="103000"/>
-                <a:satMod val="130000"/>
-              </a:schemeClr>
-            </a:gs>
-            <a:gs pos="100000">
-              <a:schemeClr val="phClr">
-                <a:shade val="63000"/>
-                <a:satMod val="120000"/>
-              </a:schemeClr>
-            </a:gs>
-          </a:gsLst>
-          <a:lin ang="5400000" scaled="0"/>
-        </a:gradFill>
-      </a:bgFillStyleLst>
-    </a:fmtScheme>
-  </a:themeElements>
-</a:theme>
-</file>
-
 <file path=ppt/slides/slide1.xml><?xml version="1.0" encoding="utf-8"?>
-<p:sld xmlns:p="http://schemas.openxmlformats.org/presentationml/2006/main">
+<p:sld xmlns:a="http://schemas.openxmlformats.org/drawingml/2006/main" xmlns:r="http://schemas.openxmlformats.org/officeDocument/2006/relationships" xmlns:p="http://schemas.openxmlformats.org/presentationml/2006/main">
   <p:cSld>
     <p:bg>
       <p:bgPr>
-        <a:solidFill xmlns:a="http://schemas.openxmlformats.org/drawingml/2006/main">
+        <a:solidFill>
           <a:srgbClr val="FAF8F6"/>
         </a:solidFill>
+        <a:effectLst/>
       </p:bgPr>
     </p:bg>
     <p:spTree>
@@ -3430,41 +3147,46 @@
         <p:nvPr/>
       </p:nvGrpSpPr>
       <p:grpSpPr>
-        <a:xfrm xmlns:a="http://schemas.openxmlformats.org/drawingml/2006/main"/>
+        <a:xfrm>
+          <a:off x="0" y="0"/>
+          <a:ext cx="0" cy="0"/>
+          <a:chOff x="0" y="0"/>
+          <a:chExt cx="0" cy="0"/>
+        </a:xfrm>
       </p:grpSpPr>
       <p:sp>
         <p:nvSpPr>
           <p:cNvPr id="67" name="header left">
-            <a:extLst xmlns:a="http://schemas.openxmlformats.org/drawingml/2006/main">
+            <a:extLst>
               <a:ext uri="{FF2B5EF4-FFF2-40B4-BE49-F238E27FC236}">
                 <a16:creationId xmlns:a16="http://schemas.microsoft.com/office/drawing/2014/main" id="{CE09003A-A504-4C3A-89B2-F68DDB06412C}"/>
               </a:ext>
             </a:extLst>
           </p:cNvPr>
           <p:cNvSpPr>
-            <a:spLocks xmlns:a="http://schemas.openxmlformats.org/drawingml/2006/main" noGrp="1"/>
+            <a:spLocks noGrp="1"/>
           </p:cNvSpPr>
           <p:nvPr/>
         </p:nvSpPr>
         <p:spPr>
-          <a:xfrm xmlns:a="http://schemas.openxmlformats.org/drawingml/2006/main">
+          <a:xfrm>
             <a:off x="123825" y="66675"/>
             <a:ext cx="9239250" cy="295275"/>
           </a:xfrm>
-          <a:prstGeom xmlns:a="http://schemas.openxmlformats.org/drawingml/2006/main" prst="rect">
+          <a:prstGeom prst="rect">
             <a:avLst/>
           </a:prstGeom>
-          <a:noFill xmlns:a="http://schemas.openxmlformats.org/drawingml/2006/main"/>
-          <a:ln xmlns:a="http://schemas.openxmlformats.org/drawingml/2006/main" w="0">
+          <a:noFill/>
+          <a:ln w="0">
             <a:noFill/>
             <a:prstDash val="solid"/>
           </a:ln>
         </p:spPr>
         <p:txBody>
-          <a:bodyPr xmlns:a="http://schemas.openxmlformats.org/drawingml/2006/main" wrap="square" lIns="0" tIns="0" rIns="0" bIns="0" anchor="ctr">
+          <a:bodyPr wrap="square" lIns="0" tIns="0" rIns="0" bIns="0" anchor="ctr">
             <a:noAutofit/>
           </a:bodyPr>
-          <a:lstStyle xmlns:a="http://schemas.openxmlformats.org/drawingml/2006/main">
+          <a:lstStyle>
             <a:defPPr algn="l">
               <a:defRPr sz="1448" b="1" i="0">
                 <a:solidFill>
@@ -3566,7 +3288,7 @@
               </a:defRPr>
             </a:lvl9pPr>
           </a:lstStyle>
-          <a:p xmlns:a="http://schemas.openxmlformats.org/drawingml/2006/main">
+          <a:p>
             <a:pPr algn="l">
               <a:lnSpc>
                 <a:spcPct val="102000"/>
@@ -3586,9 +3308,8 @@
                 <a:solidFill>
                   <a:srgbClr val="643545"/>
                 </a:solidFill>
-                <a:latin typeface="Nimbus Sans"/>
-                <a:ea typeface="Nimbus Sans"/>
-                <a:cs typeface="Nimbus Sans"/>
+                <a:latin typeface="Times New Roman" panose="02020603050405020304" pitchFamily="18" charset="0"/>
+                <a:cs typeface="Times New Roman" panose="02020603050405020304" pitchFamily="18" charset="0"/>
               </a:rPr>
               <a:t>B R O W N · A I    /    F O R M A T I V E   R E S E A R C H</a:t>
             </a:r>
@@ -3598,36 +3319,36 @@
       <p:sp>
         <p:nvSpPr>
           <p:cNvPr id="2" name="header right">
-            <a:extLst xmlns:a="http://schemas.openxmlformats.org/drawingml/2006/main">
+            <a:extLst>
               <a:ext uri="{FF2B5EF4-FFF2-40B4-BE49-F238E27FC236}">
                 <a16:creationId xmlns:a16="http://schemas.microsoft.com/office/drawing/2014/main" id="{439B3005-8D71-4222-A57B-4A7540905718}"/>
               </a:ext>
             </a:extLst>
           </p:cNvPr>
           <p:cNvSpPr>
-            <a:spLocks xmlns:a="http://schemas.openxmlformats.org/drawingml/2006/main" noGrp="1"/>
+            <a:spLocks noGrp="1"/>
           </p:cNvSpPr>
           <p:nvPr/>
         </p:nvSpPr>
         <p:spPr>
-          <a:xfrm xmlns:a="http://schemas.openxmlformats.org/drawingml/2006/main">
+          <a:xfrm>
             <a:off x="14982825" y="76200"/>
             <a:ext cx="3829050" cy="314325"/>
           </a:xfrm>
-          <a:prstGeom xmlns:a="http://schemas.openxmlformats.org/drawingml/2006/main" prst="rect">
+          <a:prstGeom prst="rect">
             <a:avLst/>
           </a:prstGeom>
-          <a:noFill xmlns:a="http://schemas.openxmlformats.org/drawingml/2006/main"/>
-          <a:ln xmlns:a="http://schemas.openxmlformats.org/drawingml/2006/main" w="0">
+          <a:noFill/>
+          <a:ln w="0">
             <a:noFill/>
             <a:prstDash val="solid"/>
           </a:ln>
         </p:spPr>
         <p:txBody>
-          <a:bodyPr xmlns:a="http://schemas.openxmlformats.org/drawingml/2006/main" wrap="square" lIns="0" tIns="0" rIns="0" bIns="0" anchor="ctr">
+          <a:bodyPr wrap="square" lIns="0" tIns="0" rIns="0" bIns="0" anchor="ctr">
             <a:noAutofit/>
           </a:bodyPr>
-          <a:lstStyle xmlns:a="http://schemas.openxmlformats.org/drawingml/2006/main">
+          <a:lstStyle>
             <a:defPPr algn="r">
               <a:defRPr sz="1748" b="1" i="0">
                 <a:solidFill>
@@ -3729,7 +3450,7 @@
               </a:defRPr>
             </a:lvl9pPr>
           </a:lstStyle>
-          <a:p xmlns:a="http://schemas.openxmlformats.org/drawingml/2006/main">
+          <a:p>
             <a:pPr algn="r">
               <a:lnSpc>
                 <a:spcPct val="102000"/>
@@ -3749,9 +3470,8 @@
                 <a:solidFill>
                   <a:srgbClr val="69777C"/>
                 </a:solidFill>
-                <a:latin typeface="Nimbus Sans"/>
-                <a:ea typeface="Nimbus Sans"/>
-                <a:cs typeface="Nimbus Sans"/>
+                <a:latin typeface="Times New Roman" panose="02020603050405020304" pitchFamily="18" charset="0"/>
+                <a:cs typeface="Times New Roman" panose="02020603050405020304" pitchFamily="18" charset="0"/>
               </a:rPr>
               <a:t>9 STUDENT INTERVIEWS</a:t>
             </a:r>
@@ -3761,36 +3481,36 @@
       <p:sp>
         <p:nvSpPr>
           <p:cNvPr id="3" name="main title">
-            <a:extLst xmlns:a="http://schemas.openxmlformats.org/drawingml/2006/main">
+            <a:extLst>
               <a:ext uri="{FF2B5EF4-FFF2-40B4-BE49-F238E27FC236}">
                 <a16:creationId xmlns:a16="http://schemas.microsoft.com/office/drawing/2014/main" id="{2E412D6E-9DB6-4735-8992-AF858CCD2AC7}"/>
               </a:ext>
             </a:extLst>
           </p:cNvPr>
           <p:cNvSpPr>
-            <a:spLocks xmlns:a="http://schemas.openxmlformats.org/drawingml/2006/main" noGrp="1"/>
+            <a:spLocks noGrp="1"/>
           </p:cNvSpPr>
           <p:nvPr/>
         </p:nvSpPr>
         <p:spPr>
-          <a:xfrm xmlns:a="http://schemas.openxmlformats.org/drawingml/2006/main">
+          <a:xfrm>
             <a:off x="133350" y="885825"/>
             <a:ext cx="17430750" cy="800100"/>
           </a:xfrm>
-          <a:prstGeom xmlns:a="http://schemas.openxmlformats.org/drawingml/2006/main" prst="rect">
+          <a:prstGeom prst="rect">
             <a:avLst/>
           </a:prstGeom>
-          <a:noFill xmlns:a="http://schemas.openxmlformats.org/drawingml/2006/main"/>
-          <a:ln xmlns:a="http://schemas.openxmlformats.org/drawingml/2006/main" w="0">
+          <a:noFill/>
+          <a:ln w="0">
             <a:noFill/>
             <a:prstDash val="solid"/>
           </a:ln>
         </p:spPr>
         <p:txBody>
-          <a:bodyPr xmlns:a="http://schemas.openxmlformats.org/drawingml/2006/main" wrap="square" lIns="0" tIns="0" rIns="0" bIns="0" anchor="ctr">
+          <a:bodyPr wrap="square" lIns="0" tIns="0" rIns="0" bIns="0" anchor="ctr">
             <a:noAutofit/>
           </a:bodyPr>
-          <a:lstStyle xmlns:a="http://schemas.openxmlformats.org/drawingml/2006/main">
+          <a:lstStyle>
             <a:defPPr algn="l">
               <a:defRPr sz="4875" b="1" i="0">
                 <a:solidFill>
@@ -3892,7 +3612,7 @@
               </a:defRPr>
             </a:lvl9pPr>
           </a:lstStyle>
-          <a:p xmlns:a="http://schemas.openxmlformats.org/drawingml/2006/main">
+          <a:p>
             <a:pPr algn="l">
               <a:lnSpc>
                 <a:spcPct val="102000"/>
@@ -3912,9 +3632,8 @@
                 <a:solidFill>
                   <a:srgbClr val="27333B"/>
                 </a:solidFill>
-                <a:latin typeface="Nimbus Sans"/>
-                <a:ea typeface="Nimbus Sans"/>
-                <a:cs typeface="Nimbus Sans"/>
+                <a:latin typeface="Times New Roman" panose="02020603050405020304" pitchFamily="18" charset="0"/>
+                <a:cs typeface="Times New Roman" panose="02020603050405020304" pitchFamily="18" charset="0"/>
               </a:rPr>
               <a:t>Why BrownAI? What Students Told Us.</a:t>
             </a:r>
@@ -3924,69 +3643,79 @@
       <p:sp>
         <p:nvSpPr>
           <p:cNvPr id="4" name="research banner">
-            <a:extLst xmlns:a="http://schemas.openxmlformats.org/drawingml/2006/main">
+            <a:extLst>
               <a:ext uri="{FF2B5EF4-FFF2-40B4-BE49-F238E27FC236}">
                 <a16:creationId xmlns:a16="http://schemas.microsoft.com/office/drawing/2014/main" id="{1A150115-B8E1-47FC-B2C6-8E1DE425E87B}"/>
               </a:ext>
             </a:extLst>
           </p:cNvPr>
           <p:cNvSpPr>
-            <a:spLocks xmlns:a="http://schemas.openxmlformats.org/drawingml/2006/main" noGrp="1"/>
+            <a:spLocks noGrp="1"/>
           </p:cNvSpPr>
           <p:nvPr/>
         </p:nvSpPr>
         <p:spPr>
-          <a:xfrm xmlns:a="http://schemas.openxmlformats.org/drawingml/2006/main">
-            <a:off x="152400" y="1743075"/>
-            <a:ext cx="18526125" cy="838200"/>
+          <a:xfrm>
+            <a:off x="152400" y="1847849"/>
+            <a:ext cx="18526125" cy="733425"/>
           </a:xfrm>
-          <a:prstGeom xmlns:a="http://schemas.openxmlformats.org/drawingml/2006/main" prst="roundRect">
+          <a:prstGeom prst="roundRect">
             <a:avLst>
               <a:gd name="adj" fmla="val 19318"/>
             </a:avLst>
           </a:prstGeom>
-          <a:solidFill xmlns:a="http://schemas.openxmlformats.org/drawingml/2006/main">
+          <a:solidFill>
             <a:srgbClr val="E3EFEB"/>
           </a:solidFill>
-          <a:ln xmlns:a="http://schemas.openxmlformats.org/drawingml/2006/main" w="0">
+          <a:ln w="0">
             <a:noFill/>
             <a:prstDash val="solid"/>
           </a:ln>
         </p:spPr>
+        <p:txBody>
+          <a:bodyPr/>
+          <a:lstStyle/>
+          <a:p>
+            <a:endParaRPr lang="en-US">
+              <a:latin typeface="Times New Roman" panose="02020603050405020304" pitchFamily="18" charset="0"/>
+              <a:cs typeface="Times New Roman" panose="02020603050405020304" pitchFamily="18" charset="0"/>
+            </a:endParaRPr>
+          </a:p>
+        </p:txBody>
       </p:sp>
       <p:sp>
         <p:nvSpPr>
           <p:cNvPr id="5" name="research-to-design">
-            <a:extLst xmlns:a="http://schemas.openxmlformats.org/drawingml/2006/main">
+            <a:extLst>
               <a:ext uri="{FF2B5EF4-FFF2-40B4-BE49-F238E27FC236}">
                 <a16:creationId xmlns:a16="http://schemas.microsoft.com/office/drawing/2014/main" id="{ACD4F7C0-3CBB-499E-ABD8-9140126E1ACA}"/>
               </a:ext>
             </a:extLst>
           </p:cNvPr>
           <p:cNvSpPr>
-            <a:spLocks xmlns:a="http://schemas.openxmlformats.org/drawingml/2006/main" noGrp="1"/>
+            <a:spLocks noGrp="1"/>
           </p:cNvSpPr>
           <p:nvPr/>
         </p:nvSpPr>
         <p:spPr>
-          <a:xfrm xmlns:a="http://schemas.openxmlformats.org/drawingml/2006/main">
+          <a:xfrm>
             <a:off x="485775" y="1962150"/>
             <a:ext cx="5381625" cy="447675"/>
           </a:xfrm>
-          <a:prstGeom xmlns:a="http://schemas.openxmlformats.org/drawingml/2006/main" prst="rect">
+          <a:prstGeom prst="rect">
             <a:avLst/>
           </a:prstGeom>
-          <a:noFill xmlns:a="http://schemas.openxmlformats.org/drawingml/2006/main"/>
-          <a:ln xmlns:a="http://schemas.openxmlformats.org/drawingml/2006/main" w="0">
+          <a:noFill/>
+          <a:ln w="0">
             <a:noFill/>
             <a:prstDash val="solid"/>
           </a:ln>
         </p:spPr>
         <p:txBody>
-          <a:bodyPr xmlns:a="http://schemas.openxmlformats.org/drawingml/2006/main" wrap="square" lIns="0" tIns="0" rIns="0" bIns="0" anchor="ctr">
+          <a:bodyPr wrap="square" lIns="0" tIns="0" rIns="0" bIns="0" anchor="ctr">
             <a:noAutofit/>
           </a:bodyPr>
-          <a:lstStyle xmlns:a="http://schemas.openxmlformats.org/drawingml/2006/main">
+          <a:lstStyle>
             <a:defPPr algn="l">
               <a:defRPr sz="1725" b="1" i="0">
                 <a:solidFill>
@@ -4088,7 +3817,7 @@
               </a:defRPr>
             </a:lvl9pPr>
           </a:lstStyle>
-          <a:p xmlns:a="http://schemas.openxmlformats.org/drawingml/2006/main">
+          <a:p>
             <a:pPr algn="l">
               <a:lnSpc>
                 <a:spcPct val="102000"/>
@@ -4108,9 +3837,8 @@
                 <a:solidFill>
                   <a:srgbClr val="206E65"/>
                 </a:solidFill>
-                <a:latin typeface="Nimbus Sans"/>
-                <a:ea typeface="Nimbus Sans"/>
-                <a:cs typeface="Nimbus Sans"/>
+                <a:latin typeface="Times New Roman" panose="02020603050405020304" pitchFamily="18" charset="0"/>
+                <a:cs typeface="Times New Roman" panose="02020603050405020304" pitchFamily="18" charset="0"/>
               </a:rPr>
               <a:t>FORMATIVE STUDY   →   DESIGN LOGIC</a:t>
             </a:r>
@@ -4120,36 +3848,36 @@
       <p:sp>
         <p:nvSpPr>
           <p:cNvPr id="6" name="banner message">
-            <a:extLst xmlns:a="http://schemas.openxmlformats.org/drawingml/2006/main">
+            <a:extLst>
               <a:ext uri="{FF2B5EF4-FFF2-40B4-BE49-F238E27FC236}">
                 <a16:creationId xmlns:a16="http://schemas.microsoft.com/office/drawing/2014/main" id="{4E55DF5F-88A0-4824-B589-FD5ACBF6DB9D}"/>
               </a:ext>
             </a:extLst>
           </p:cNvPr>
           <p:cNvSpPr>
-            <a:spLocks xmlns:a="http://schemas.openxmlformats.org/drawingml/2006/main" noGrp="1"/>
+            <a:spLocks noGrp="1"/>
           </p:cNvSpPr>
           <p:nvPr/>
         </p:nvSpPr>
         <p:spPr>
-          <a:xfrm xmlns:a="http://schemas.openxmlformats.org/drawingml/2006/main">
+          <a:xfrm>
             <a:off x="6505575" y="1914525"/>
             <a:ext cx="11430000" cy="504825"/>
           </a:xfrm>
-          <a:prstGeom xmlns:a="http://schemas.openxmlformats.org/drawingml/2006/main" prst="rect">
+          <a:prstGeom prst="rect">
             <a:avLst/>
           </a:prstGeom>
-          <a:noFill xmlns:a="http://schemas.openxmlformats.org/drawingml/2006/main"/>
-          <a:ln xmlns:a="http://schemas.openxmlformats.org/drawingml/2006/main" w="0">
+          <a:noFill/>
+          <a:ln w="0">
             <a:noFill/>
             <a:prstDash val="solid"/>
           </a:ln>
         </p:spPr>
         <p:txBody>
-          <a:bodyPr xmlns:a="http://schemas.openxmlformats.org/drawingml/2006/main" wrap="square" lIns="0" tIns="0" rIns="0" bIns="0" anchor="ctr">
+          <a:bodyPr wrap="square" lIns="0" tIns="0" rIns="0" bIns="0" anchor="ctr">
             <a:noAutofit/>
           </a:bodyPr>
-          <a:lstStyle xmlns:a="http://schemas.openxmlformats.org/drawingml/2006/main">
+          <a:lstStyle>
             <a:defPPr algn="l">
               <a:defRPr sz="2550" b="1" i="0">
                 <a:solidFill>
@@ -4251,7 +3979,7 @@
               </a:defRPr>
             </a:lvl9pPr>
           </a:lstStyle>
-          <a:p xmlns:a="http://schemas.openxmlformats.org/drawingml/2006/main">
+          <a:p>
             <a:pPr algn="l">
               <a:lnSpc>
                 <a:spcPct val="102000"/>
@@ -4271,9 +3999,8 @@
                 <a:solidFill>
                   <a:srgbClr val="27333B"/>
                 </a:solidFill>
-                <a:latin typeface="Nimbus Sans"/>
-                <a:ea typeface="Nimbus Sans"/>
-                <a:cs typeface="Nimbus Sans"/>
+                <a:latin typeface="Times New Roman" panose="02020603050405020304" pitchFamily="18" charset="0"/>
+                <a:cs typeface="Times New Roman" panose="02020603050405020304" pitchFamily="18" charset="0"/>
               </a:rPr>
               <a:t>We designed because students asked for it.</a:t>
             </a:r>
@@ -4283,102 +4010,122 @@
       <p:sp>
         <p:nvSpPr>
           <p:cNvPr id="7" name="unify card">
-            <a:extLst xmlns:a="http://schemas.openxmlformats.org/drawingml/2006/main">
+            <a:extLst>
               <a:ext uri="{FF2B5EF4-FFF2-40B4-BE49-F238E27FC236}">
                 <a16:creationId xmlns:a16="http://schemas.microsoft.com/office/drawing/2014/main" id="{41D368BC-DF89-4AFE-8AC4-BE8829943AE2}"/>
               </a:ext>
             </a:extLst>
           </p:cNvPr>
           <p:cNvSpPr>
-            <a:spLocks xmlns:a="http://schemas.openxmlformats.org/drawingml/2006/main" noGrp="1"/>
+            <a:spLocks noGrp="1"/>
           </p:cNvSpPr>
           <p:nvPr/>
         </p:nvSpPr>
         <p:spPr>
-          <a:xfrm xmlns:a="http://schemas.openxmlformats.org/drawingml/2006/main">
+          <a:xfrm>
             <a:off x="152400" y="2819400"/>
             <a:ext cx="5829300" cy="6591300"/>
           </a:xfrm>
-          <a:prstGeom xmlns:a="http://schemas.openxmlformats.org/drawingml/2006/main" prst="roundRect">
+          <a:prstGeom prst="roundRect">
             <a:avLst>
               <a:gd name="adj" fmla="val 3758"/>
             </a:avLst>
           </a:prstGeom>
-          <a:solidFill xmlns:a="http://schemas.openxmlformats.org/drawingml/2006/main">
+          <a:solidFill>
             <a:srgbClr val="FFFFFF"/>
           </a:solidFill>
-          <a:ln xmlns:a="http://schemas.openxmlformats.org/drawingml/2006/main" w="12383">
+          <a:ln w="12383">
             <a:solidFill>
               <a:srgbClr val="E5DCD5"/>
             </a:solidFill>
             <a:prstDash val="solid"/>
           </a:ln>
         </p:spPr>
+        <p:txBody>
+          <a:bodyPr/>
+          <a:lstStyle/>
+          <a:p>
+            <a:endParaRPr lang="en-US">
+              <a:latin typeface="Times New Roman" panose="02020603050405020304" pitchFamily="18" charset="0"/>
+              <a:cs typeface="Times New Roman" panose="02020603050405020304" pitchFamily="18" charset="0"/>
+            </a:endParaRPr>
+          </a:p>
+        </p:txBody>
       </p:sp>
       <p:sp>
         <p:nvSpPr>
           <p:cNvPr id="8" name="unify number circle">
-            <a:extLst xmlns:a="http://schemas.openxmlformats.org/drawingml/2006/main">
+            <a:extLst>
               <a:ext uri="{FF2B5EF4-FFF2-40B4-BE49-F238E27FC236}">
                 <a16:creationId xmlns:a16="http://schemas.microsoft.com/office/drawing/2014/main" id="{451E5351-7C86-4901-9D9D-6FFA94801498}"/>
               </a:ext>
             </a:extLst>
           </p:cNvPr>
           <p:cNvSpPr>
-            <a:spLocks xmlns:a="http://schemas.openxmlformats.org/drawingml/2006/main" noGrp="1"/>
+            <a:spLocks noGrp="1"/>
           </p:cNvSpPr>
           <p:nvPr/>
         </p:nvSpPr>
         <p:spPr>
-          <a:xfrm xmlns:a="http://schemas.openxmlformats.org/drawingml/2006/main">
+          <a:xfrm>
             <a:off x="495300" y="3114675"/>
             <a:ext cx="762000" cy="762000"/>
           </a:xfrm>
-          <a:prstGeom xmlns:a="http://schemas.openxmlformats.org/drawingml/2006/main" prst="ellipse">
+          <a:prstGeom prst="ellipse">
             <a:avLst/>
           </a:prstGeom>
-          <a:solidFill xmlns:a="http://schemas.openxmlformats.org/drawingml/2006/main">
+          <a:solidFill>
             <a:srgbClr val="F6E9EB"/>
           </a:solidFill>
-          <a:ln xmlns:a="http://schemas.openxmlformats.org/drawingml/2006/main" w="0">
+          <a:ln w="0">
             <a:noFill/>
             <a:prstDash val="solid"/>
           </a:ln>
         </p:spPr>
+        <p:txBody>
+          <a:bodyPr/>
+          <a:lstStyle/>
+          <a:p>
+            <a:endParaRPr lang="en-US">
+              <a:latin typeface="Times New Roman" panose="02020603050405020304" pitchFamily="18" charset="0"/>
+              <a:cs typeface="Times New Roman" panose="02020603050405020304" pitchFamily="18" charset="0"/>
+            </a:endParaRPr>
+          </a:p>
+        </p:txBody>
       </p:sp>
       <p:sp>
         <p:nvSpPr>
           <p:cNvPr id="9" name="unify number">
-            <a:extLst xmlns:a="http://schemas.openxmlformats.org/drawingml/2006/main">
+            <a:extLst>
               <a:ext uri="{FF2B5EF4-FFF2-40B4-BE49-F238E27FC236}">
                 <a16:creationId xmlns:a16="http://schemas.microsoft.com/office/drawing/2014/main" id="{23C58918-C0C0-47E1-99D4-2B0E2087FAC8}"/>
               </a:ext>
             </a:extLst>
           </p:cNvPr>
           <p:cNvSpPr>
-            <a:spLocks xmlns:a="http://schemas.openxmlformats.org/drawingml/2006/main" noGrp="1"/>
+            <a:spLocks noGrp="1"/>
           </p:cNvSpPr>
           <p:nvPr/>
         </p:nvSpPr>
         <p:spPr>
-          <a:xfrm xmlns:a="http://schemas.openxmlformats.org/drawingml/2006/main">
+          <a:xfrm>
             <a:off x="695325" y="3181350"/>
             <a:ext cx="352425" cy="609600"/>
           </a:xfrm>
-          <a:prstGeom xmlns:a="http://schemas.openxmlformats.org/drawingml/2006/main" prst="rect">
+          <a:prstGeom prst="rect">
             <a:avLst/>
           </a:prstGeom>
-          <a:noFill xmlns:a="http://schemas.openxmlformats.org/drawingml/2006/main"/>
-          <a:ln xmlns:a="http://schemas.openxmlformats.org/drawingml/2006/main" w="0">
+          <a:noFill/>
+          <a:ln w="0">
             <a:noFill/>
             <a:prstDash val="solid"/>
           </a:ln>
         </p:spPr>
         <p:txBody>
-          <a:bodyPr xmlns:a="http://schemas.openxmlformats.org/drawingml/2006/main" wrap="square" lIns="0" tIns="0" rIns="0" bIns="0" anchor="ctr">
+          <a:bodyPr wrap="square" lIns="0" tIns="0" rIns="0" bIns="0" anchor="ctr">
             <a:noAutofit/>
           </a:bodyPr>
-          <a:lstStyle xmlns:a="http://schemas.openxmlformats.org/drawingml/2006/main">
+          <a:lstStyle>
             <a:defPPr algn="ctr">
               <a:defRPr sz="2700" b="1" i="0">
                 <a:solidFill>
@@ -4480,7 +4227,7 @@
               </a:defRPr>
             </a:lvl9pPr>
           </a:lstStyle>
-          <a:p xmlns:a="http://schemas.openxmlformats.org/drawingml/2006/main">
+          <a:p>
             <a:pPr algn="ctr">
               <a:lnSpc>
                 <a:spcPct val="102000"/>
@@ -4500,9 +4247,8 @@
                 <a:solidFill>
                   <a:srgbClr val="643545"/>
                 </a:solidFill>
-                <a:latin typeface="Nimbus Sans"/>
-                <a:ea typeface="Nimbus Sans"/>
-                <a:cs typeface="Nimbus Sans"/>
+                <a:latin typeface="Times New Roman" panose="02020603050405020304" pitchFamily="18" charset="0"/>
+                <a:cs typeface="Times New Roman" panose="02020603050405020304" pitchFamily="18" charset="0"/>
               </a:rPr>
               <a:t>1</a:t>
             </a:r>
@@ -4512,36 +4258,36 @@
       <p:sp>
         <p:nvSpPr>
           <p:cNvPr id="10" name="unify title">
-            <a:extLst xmlns:a="http://schemas.openxmlformats.org/drawingml/2006/main">
+            <a:extLst>
               <a:ext uri="{FF2B5EF4-FFF2-40B4-BE49-F238E27FC236}">
                 <a16:creationId xmlns:a16="http://schemas.microsoft.com/office/drawing/2014/main" id="{9E58D4C3-7C53-4127-8F94-D17A3F9388BA}"/>
               </a:ext>
             </a:extLst>
           </p:cNvPr>
           <p:cNvSpPr>
-            <a:spLocks xmlns:a="http://schemas.openxmlformats.org/drawingml/2006/main" noGrp="1"/>
+            <a:spLocks noGrp="1"/>
           </p:cNvSpPr>
           <p:nvPr/>
         </p:nvSpPr>
         <p:spPr>
-          <a:xfrm xmlns:a="http://schemas.openxmlformats.org/drawingml/2006/main">
+          <a:xfrm>
             <a:off x="1524000" y="3267075"/>
             <a:ext cx="4305300" cy="628650"/>
           </a:xfrm>
-          <a:prstGeom xmlns:a="http://schemas.openxmlformats.org/drawingml/2006/main" prst="rect">
+          <a:prstGeom prst="rect">
             <a:avLst/>
           </a:prstGeom>
-          <a:noFill xmlns:a="http://schemas.openxmlformats.org/drawingml/2006/main"/>
-          <a:ln xmlns:a="http://schemas.openxmlformats.org/drawingml/2006/main" w="0">
+          <a:noFill/>
+          <a:ln w="0">
             <a:noFill/>
             <a:prstDash val="solid"/>
           </a:ln>
         </p:spPr>
         <p:txBody>
-          <a:bodyPr xmlns:a="http://schemas.openxmlformats.org/drawingml/2006/main" wrap="square" lIns="0" tIns="0" rIns="0" bIns="0" anchor="ctr">
+          <a:bodyPr wrap="square" lIns="0" tIns="0" rIns="0" bIns="0" anchor="ctr">
             <a:noAutofit/>
           </a:bodyPr>
-          <a:lstStyle xmlns:a="http://schemas.openxmlformats.org/drawingml/2006/main">
+          <a:lstStyle>
             <a:defPPr algn="l">
               <a:defRPr sz="2700" b="1" i="0">
                 <a:solidFill>
@@ -4643,7 +4389,7 @@
               </a:defRPr>
             </a:lvl9pPr>
           </a:lstStyle>
-          <a:p xmlns:a="http://schemas.openxmlformats.org/drawingml/2006/main">
+          <a:p>
             <a:pPr algn="l">
               <a:lnSpc>
                 <a:spcPct val="102000"/>
@@ -4663,9 +4409,8 @@
                 <a:solidFill>
                   <a:srgbClr val="643545"/>
                 </a:solidFill>
-                <a:latin typeface="Nimbus Sans"/>
-                <a:ea typeface="Nimbus Sans"/>
-                <a:cs typeface="Nimbus Sans"/>
+                <a:latin typeface="Times New Roman" panose="02020603050405020304" pitchFamily="18" charset="0"/>
+                <a:cs typeface="Times New Roman" panose="02020603050405020304" pitchFamily="18" charset="0"/>
               </a:rPr>
               <a:t>UNIFY INFO</a:t>
             </a:r>
@@ -4675,36 +4420,36 @@
       <p:sp>
         <p:nvSpPr>
           <p:cNvPr id="11" name="unify problem">
-            <a:extLst xmlns:a="http://schemas.openxmlformats.org/drawingml/2006/main">
+            <a:extLst>
               <a:ext uri="{FF2B5EF4-FFF2-40B4-BE49-F238E27FC236}">
                 <a16:creationId xmlns:a16="http://schemas.microsoft.com/office/drawing/2014/main" id="{DCE855D7-9E83-4CBD-9852-AB5449BFDCA8}"/>
               </a:ext>
             </a:extLst>
           </p:cNvPr>
           <p:cNvSpPr>
-            <a:spLocks xmlns:a="http://schemas.openxmlformats.org/drawingml/2006/main" noGrp="1"/>
+            <a:spLocks noGrp="1"/>
           </p:cNvSpPr>
           <p:nvPr/>
         </p:nvSpPr>
         <p:spPr>
-          <a:xfrm xmlns:a="http://schemas.openxmlformats.org/drawingml/2006/main">
+          <a:xfrm>
             <a:off x="638175" y="4276725"/>
             <a:ext cx="4953000" cy="876300"/>
           </a:xfrm>
-          <a:prstGeom xmlns:a="http://schemas.openxmlformats.org/drawingml/2006/main" prst="rect">
+          <a:prstGeom prst="rect">
             <a:avLst/>
           </a:prstGeom>
-          <a:noFill xmlns:a="http://schemas.openxmlformats.org/drawingml/2006/main"/>
-          <a:ln xmlns:a="http://schemas.openxmlformats.org/drawingml/2006/main" w="0">
+          <a:noFill/>
+          <a:ln w="0">
             <a:noFill/>
             <a:prstDash val="solid"/>
           </a:ln>
         </p:spPr>
         <p:txBody>
-          <a:bodyPr xmlns:a="http://schemas.openxmlformats.org/drawingml/2006/main" wrap="square" lIns="0" tIns="0" rIns="0" bIns="0" anchor="ctr">
+          <a:bodyPr wrap="square" lIns="0" tIns="0" rIns="0" bIns="0" anchor="ctr">
             <a:noAutofit/>
           </a:bodyPr>
-          <a:lstStyle xmlns:a="http://schemas.openxmlformats.org/drawingml/2006/main">
+          <a:lstStyle>
             <a:defPPr algn="l">
               <a:defRPr sz="2033" b="0" i="0">
                 <a:solidFill>
@@ -4806,7 +4551,7 @@
               </a:defRPr>
             </a:lvl9pPr>
           </a:lstStyle>
-          <a:p xmlns:a="http://schemas.openxmlformats.org/drawingml/2006/main">
+          <a:p>
             <a:pPr algn="l">
               <a:lnSpc>
                 <a:spcPct val="106000"/>
@@ -4822,13 +4567,12 @@
               </a:defRPr>
             </a:pPr>
             <a:r>
-              <a:rPr sz="2033" b="0" i="0">
-                <a:solidFill>
-                  <a:srgbClr val="27333B"/>
-                </a:solidFill>
-                <a:latin typeface="Nimbus Sans"/>
-                <a:ea typeface="Nimbus Sans"/>
-                <a:cs typeface="Nimbus Sans"/>
+              <a:rPr sz="2033" b="0" i="0" dirty="0">
+                <a:solidFill>
+                  <a:srgbClr val="27333B"/>
+                </a:solidFill>
+                <a:latin typeface="Times New Roman" panose="02020603050405020304" pitchFamily="18" charset="0"/>
+                <a:cs typeface="Times New Roman" panose="02020603050405020304" pitchFamily="18" charset="0"/>
               </a:rPr>
               <a:t>Campus information is scattered across different websites, apps, and offices.</a:t>
             </a:r>
@@ -4838,36 +4582,36 @@
       <p:sp>
         <p:nvSpPr>
           <p:cNvPr id="12" name="unify response">
-            <a:extLst xmlns:a="http://schemas.openxmlformats.org/drawingml/2006/main">
+            <a:extLst>
               <a:ext uri="{FF2B5EF4-FFF2-40B4-BE49-F238E27FC236}">
                 <a16:creationId xmlns:a16="http://schemas.microsoft.com/office/drawing/2014/main" id="{798915D4-1CB6-42FD-9692-6548361C3EB2}"/>
               </a:ext>
             </a:extLst>
           </p:cNvPr>
           <p:cNvSpPr>
-            <a:spLocks xmlns:a="http://schemas.openxmlformats.org/drawingml/2006/main" noGrp="1"/>
+            <a:spLocks noGrp="1"/>
           </p:cNvSpPr>
           <p:nvPr/>
         </p:nvSpPr>
         <p:spPr>
-          <a:xfrm xmlns:a="http://schemas.openxmlformats.org/drawingml/2006/main">
+          <a:xfrm>
             <a:off x="638175" y="5372100"/>
             <a:ext cx="5067300" cy="552450"/>
           </a:xfrm>
-          <a:prstGeom xmlns:a="http://schemas.openxmlformats.org/drawingml/2006/main" prst="rect">
+          <a:prstGeom prst="rect">
             <a:avLst/>
           </a:prstGeom>
-          <a:noFill xmlns:a="http://schemas.openxmlformats.org/drawingml/2006/main"/>
-          <a:ln xmlns:a="http://schemas.openxmlformats.org/drawingml/2006/main" w="0">
+          <a:noFill/>
+          <a:ln w="0">
             <a:noFill/>
             <a:prstDash val="solid"/>
           </a:ln>
         </p:spPr>
         <p:txBody>
-          <a:bodyPr xmlns:a="http://schemas.openxmlformats.org/drawingml/2006/main" wrap="square" lIns="0" tIns="0" rIns="0" bIns="0" anchor="ctr">
+          <a:bodyPr wrap="square" lIns="0" tIns="0" rIns="0" bIns="0" anchor="ctr">
             <a:noAutofit/>
           </a:bodyPr>
-          <a:lstStyle xmlns:a="http://schemas.openxmlformats.org/drawingml/2006/main">
+          <a:lstStyle>
             <a:defPPr algn="l">
               <a:defRPr sz="1665" b="1" i="0">
                 <a:solidFill>
@@ -4969,7 +4713,7 @@
               </a:defRPr>
             </a:lvl9pPr>
           </a:lstStyle>
-          <a:p xmlns:a="http://schemas.openxmlformats.org/drawingml/2006/main">
+          <a:p>
             <a:pPr algn="l">
               <a:lnSpc>
                 <a:spcPct val="102000"/>
@@ -4989,9 +4733,8 @@
                 <a:solidFill>
                   <a:srgbClr val="206E65"/>
                 </a:solidFill>
-                <a:latin typeface="Nimbus Sans"/>
-                <a:ea typeface="Nimbus Sans"/>
-                <a:cs typeface="Nimbus Sans"/>
+                <a:latin typeface="Times New Roman" panose="02020603050405020304" pitchFamily="18" charset="0"/>
+                <a:cs typeface="Times New Roman" panose="02020603050405020304" pitchFamily="18" charset="0"/>
               </a:rPr>
               <a:t>→ One place to find connected campus information</a:t>
             </a:r>
@@ -5001,36 +4744,36 @@
       <p:sp>
         <p:nvSpPr>
           <p:cNvPr id="13" name="unify student label">
-            <a:extLst xmlns:a="http://schemas.openxmlformats.org/drawingml/2006/main">
+            <a:extLst>
               <a:ext uri="{FF2B5EF4-FFF2-40B4-BE49-F238E27FC236}">
                 <a16:creationId xmlns:a16="http://schemas.microsoft.com/office/drawing/2014/main" id="{7049F21F-A513-4EA0-B144-3837F8674EF1}"/>
               </a:ext>
             </a:extLst>
           </p:cNvPr>
           <p:cNvSpPr>
-            <a:spLocks xmlns:a="http://schemas.openxmlformats.org/drawingml/2006/main" noGrp="1"/>
+            <a:spLocks noGrp="1"/>
           </p:cNvSpPr>
           <p:nvPr/>
         </p:nvSpPr>
         <p:spPr>
-          <a:xfrm xmlns:a="http://schemas.openxmlformats.org/drawingml/2006/main">
+          <a:xfrm>
             <a:off x="638175" y="6048375"/>
             <a:ext cx="4953000" cy="295275"/>
           </a:xfrm>
-          <a:prstGeom xmlns:a="http://schemas.openxmlformats.org/drawingml/2006/main" prst="rect">
+          <a:prstGeom prst="rect">
             <a:avLst/>
           </a:prstGeom>
-          <a:noFill xmlns:a="http://schemas.openxmlformats.org/drawingml/2006/main"/>
-          <a:ln xmlns:a="http://schemas.openxmlformats.org/drawingml/2006/main" w="0">
+          <a:noFill/>
+          <a:ln w="0">
             <a:noFill/>
             <a:prstDash val="solid"/>
           </a:ln>
         </p:spPr>
         <p:txBody>
-          <a:bodyPr xmlns:a="http://schemas.openxmlformats.org/drawingml/2006/main" wrap="square" lIns="0" tIns="0" rIns="0" bIns="0" anchor="ctr">
+          <a:bodyPr wrap="square" lIns="0" tIns="0" rIns="0" bIns="0" anchor="ctr">
             <a:noAutofit/>
           </a:bodyPr>
-          <a:lstStyle xmlns:a="http://schemas.openxmlformats.org/drawingml/2006/main">
+          <a:lstStyle>
             <a:defPPr algn="l">
               <a:defRPr sz="1350" b="1" i="0">
                 <a:solidFill>
@@ -5132,7 +4875,7 @@
               </a:defRPr>
             </a:lvl9pPr>
           </a:lstStyle>
-          <a:p xmlns:a="http://schemas.openxmlformats.org/drawingml/2006/main">
+          <a:p>
             <a:pPr algn="l">
               <a:lnSpc>
                 <a:spcPct val="102000"/>
@@ -5152,9 +4895,8 @@
                 <a:solidFill>
                   <a:srgbClr val="643545"/>
                 </a:solidFill>
-                <a:latin typeface="Nimbus Sans"/>
-                <a:ea typeface="Nimbus Sans"/>
-                <a:cs typeface="Nimbus Sans"/>
+                <a:latin typeface="Times New Roman" panose="02020603050405020304" pitchFamily="18" charset="0"/>
+                <a:cs typeface="Times New Roman" panose="02020603050405020304" pitchFamily="18" charset="0"/>
               </a:rPr>
               <a:t>STUDENTS SAY</a:t>
             </a:r>
@@ -5164,69 +4906,79 @@
       <p:sp>
         <p:nvSpPr>
           <p:cNvPr id="14" name="unify quote background 1">
-            <a:extLst xmlns:a="http://schemas.openxmlformats.org/drawingml/2006/main">
+            <a:extLst>
               <a:ext uri="{FF2B5EF4-FFF2-40B4-BE49-F238E27FC236}">
                 <a16:creationId xmlns:a16="http://schemas.microsoft.com/office/drawing/2014/main" id="{C6F5832B-0DFD-4B98-AC56-7EA088FFCC81}"/>
               </a:ext>
             </a:extLst>
           </p:cNvPr>
           <p:cNvSpPr>
-            <a:spLocks xmlns:a="http://schemas.openxmlformats.org/drawingml/2006/main" noGrp="1"/>
+            <a:spLocks noGrp="1"/>
           </p:cNvSpPr>
           <p:nvPr/>
         </p:nvSpPr>
         <p:spPr>
-          <a:xfrm xmlns:a="http://schemas.openxmlformats.org/drawingml/2006/main">
+          <a:xfrm>
             <a:off x="638175" y="6419850"/>
             <a:ext cx="4876800" cy="838200"/>
           </a:xfrm>
-          <a:prstGeom xmlns:a="http://schemas.openxmlformats.org/drawingml/2006/main" prst="roundRect">
+          <a:prstGeom prst="roundRect">
             <a:avLst>
               <a:gd name="adj" fmla="val 17045"/>
             </a:avLst>
           </a:prstGeom>
-          <a:solidFill xmlns:a="http://schemas.openxmlformats.org/drawingml/2006/main">
+          <a:solidFill>
             <a:srgbClr val="F1EBE5"/>
           </a:solidFill>
-          <a:ln xmlns:a="http://schemas.openxmlformats.org/drawingml/2006/main" w="0">
+          <a:ln w="0">
             <a:noFill/>
             <a:prstDash val="solid"/>
           </a:ln>
         </p:spPr>
+        <p:txBody>
+          <a:bodyPr/>
+          <a:lstStyle/>
+          <a:p>
+            <a:endParaRPr lang="en-US">
+              <a:latin typeface="Times New Roman" panose="02020603050405020304" pitchFamily="18" charset="0"/>
+              <a:cs typeface="Times New Roman" panose="02020603050405020304" pitchFamily="18" charset="0"/>
+            </a:endParaRPr>
+          </a:p>
+        </p:txBody>
       </p:sp>
       <p:sp>
         <p:nvSpPr>
           <p:cNvPr id="15" name="unify quote 1">
-            <a:extLst xmlns:a="http://schemas.openxmlformats.org/drawingml/2006/main">
+            <a:extLst>
               <a:ext uri="{FF2B5EF4-FFF2-40B4-BE49-F238E27FC236}">
                 <a16:creationId xmlns:a16="http://schemas.microsoft.com/office/drawing/2014/main" id="{B6D06001-6551-4307-860D-BD4180FE3C6D}"/>
               </a:ext>
             </a:extLst>
           </p:cNvPr>
           <p:cNvSpPr>
-            <a:spLocks xmlns:a="http://schemas.openxmlformats.org/drawingml/2006/main" noGrp="1"/>
+            <a:spLocks noGrp="1"/>
           </p:cNvSpPr>
           <p:nvPr/>
         </p:nvSpPr>
         <p:spPr>
-          <a:xfrm xmlns:a="http://schemas.openxmlformats.org/drawingml/2006/main">
+          <a:xfrm>
             <a:off x="800100" y="6486525"/>
             <a:ext cx="4543425" cy="628650"/>
           </a:xfrm>
-          <a:prstGeom xmlns:a="http://schemas.openxmlformats.org/drawingml/2006/main" prst="rect">
+          <a:prstGeom prst="rect">
             <a:avLst/>
           </a:prstGeom>
-          <a:noFill xmlns:a="http://schemas.openxmlformats.org/drawingml/2006/main"/>
-          <a:ln xmlns:a="http://schemas.openxmlformats.org/drawingml/2006/main" w="0">
+          <a:noFill/>
+          <a:ln w="0">
             <a:noFill/>
             <a:prstDash val="solid"/>
           </a:ln>
         </p:spPr>
         <p:txBody>
-          <a:bodyPr xmlns:a="http://schemas.openxmlformats.org/drawingml/2006/main" wrap="square" lIns="0" tIns="0" rIns="0" bIns="0" anchor="ctr">
+          <a:bodyPr wrap="square" lIns="0" tIns="0" rIns="0" bIns="0" anchor="ctr">
             <a:noAutofit/>
           </a:bodyPr>
-          <a:lstStyle xmlns:a="http://schemas.openxmlformats.org/drawingml/2006/main">
+          <a:lstStyle>
             <a:defPPr algn="l">
               <a:defRPr sz="1538" b="0" i="1">
                 <a:solidFill>
@@ -5328,7 +5080,7 @@
               </a:defRPr>
             </a:lvl9pPr>
           </a:lstStyle>
-          <a:p xmlns:a="http://schemas.openxmlformats.org/drawingml/2006/main">
+          <a:p>
             <a:pPr algn="l">
               <a:lnSpc>
                 <a:spcPct val="101000"/>
@@ -5348,9 +5100,8 @@
                 <a:solidFill>
                   <a:srgbClr val="27333B"/>
                 </a:solidFill>
-                <a:latin typeface="Nimbus Sans"/>
-                <a:ea typeface="Nimbus Sans"/>
-                <a:cs typeface="Nimbus Sans"/>
+                <a:latin typeface="Times New Roman" panose="02020603050405020304" pitchFamily="18" charset="0"/>
+                <a:cs typeface="Times New Roman" panose="02020603050405020304" pitchFamily="18" charset="0"/>
               </a:rPr>
               <a:t>“Shuttles, emergency contacts, housing, and portals all live in different places.”</a:t>
             </a:r>
@@ -5360,36 +5111,36 @@
       <p:sp>
         <p:nvSpPr>
           <p:cNvPr id="16" name="unify segment 1">
-            <a:extLst xmlns:a="http://schemas.openxmlformats.org/drawingml/2006/main">
+            <a:extLst>
               <a:ext uri="{FF2B5EF4-FFF2-40B4-BE49-F238E27FC236}">
                 <a16:creationId xmlns:a16="http://schemas.microsoft.com/office/drawing/2014/main" id="{9C3FE338-8234-4B6C-8944-CCC63AB676B1}"/>
               </a:ext>
             </a:extLst>
           </p:cNvPr>
           <p:cNvSpPr>
-            <a:spLocks xmlns:a="http://schemas.openxmlformats.org/drawingml/2006/main" noGrp="1"/>
+            <a:spLocks noGrp="1"/>
           </p:cNvSpPr>
           <p:nvPr/>
         </p:nvSpPr>
         <p:spPr>
-          <a:xfrm xmlns:a="http://schemas.openxmlformats.org/drawingml/2006/main">
+          <a:xfrm>
             <a:off x="4095750" y="7058025"/>
             <a:ext cx="1238250" cy="161925"/>
           </a:xfrm>
-          <a:prstGeom xmlns:a="http://schemas.openxmlformats.org/drawingml/2006/main" prst="rect">
+          <a:prstGeom prst="rect">
             <a:avLst/>
           </a:prstGeom>
-          <a:noFill xmlns:a="http://schemas.openxmlformats.org/drawingml/2006/main"/>
-          <a:ln xmlns:a="http://schemas.openxmlformats.org/drawingml/2006/main" w="0">
+          <a:noFill/>
+          <a:ln w="0">
             <a:noFill/>
             <a:prstDash val="solid"/>
           </a:ln>
         </p:spPr>
         <p:txBody>
-          <a:bodyPr xmlns:a="http://schemas.openxmlformats.org/drawingml/2006/main" wrap="square" lIns="0" tIns="0" rIns="0" bIns="0" anchor="ctr">
+          <a:bodyPr wrap="square" lIns="0" tIns="0" rIns="0" bIns="0" anchor="ctr">
             <a:noAutofit/>
           </a:bodyPr>
-          <a:lstStyle xmlns:a="http://schemas.openxmlformats.org/drawingml/2006/main">
+          <a:lstStyle>
             <a:defPPr algn="r">
               <a:defRPr sz="1035" b="1" i="0">
                 <a:solidFill>
@@ -5491,7 +5242,7 @@
               </a:defRPr>
             </a:lvl9pPr>
           </a:lstStyle>
-          <a:p xmlns:a="http://schemas.openxmlformats.org/drawingml/2006/main">
+          <a:p>
             <a:pPr algn="r">
               <a:lnSpc>
                 <a:spcPct val="102000"/>
@@ -5511,9 +5262,8 @@
                 <a:solidFill>
                   <a:srgbClr val="62717A"/>
                 </a:solidFill>
-                <a:latin typeface="Nimbus Sans"/>
-                <a:ea typeface="Nimbus Sans"/>
-                <a:cs typeface="Nimbus Sans"/>
+                <a:latin typeface="Times New Roman" panose="02020603050405020304" pitchFamily="18" charset="0"/>
+                <a:cs typeface="Times New Roman" panose="02020603050405020304" pitchFamily="18" charset="0"/>
               </a:rPr>
               <a:t>P08_M015</a:t>
             </a:r>
@@ -5523,69 +5273,79 @@
       <p:sp>
         <p:nvSpPr>
           <p:cNvPr id="17" name="unify quote background 2">
-            <a:extLst xmlns:a="http://schemas.openxmlformats.org/drawingml/2006/main">
+            <a:extLst>
               <a:ext uri="{FF2B5EF4-FFF2-40B4-BE49-F238E27FC236}">
                 <a16:creationId xmlns:a16="http://schemas.microsoft.com/office/drawing/2014/main" id="{39794ACC-09FD-4FB2-982E-FB2C8A297E61}"/>
               </a:ext>
             </a:extLst>
           </p:cNvPr>
           <p:cNvSpPr>
-            <a:spLocks xmlns:a="http://schemas.openxmlformats.org/drawingml/2006/main" noGrp="1"/>
+            <a:spLocks noGrp="1"/>
           </p:cNvSpPr>
           <p:nvPr/>
         </p:nvSpPr>
         <p:spPr>
-          <a:xfrm xmlns:a="http://schemas.openxmlformats.org/drawingml/2006/main">
+          <a:xfrm>
             <a:off x="638175" y="7362825"/>
             <a:ext cx="4876800" cy="838200"/>
           </a:xfrm>
-          <a:prstGeom xmlns:a="http://schemas.openxmlformats.org/drawingml/2006/main" prst="roundRect">
+          <a:prstGeom prst="roundRect">
             <a:avLst>
               <a:gd name="adj" fmla="val 17045"/>
             </a:avLst>
           </a:prstGeom>
-          <a:solidFill xmlns:a="http://schemas.openxmlformats.org/drawingml/2006/main">
+          <a:solidFill>
             <a:srgbClr val="FCF0EC"/>
           </a:solidFill>
-          <a:ln xmlns:a="http://schemas.openxmlformats.org/drawingml/2006/main" w="0">
+          <a:ln w="0">
             <a:noFill/>
             <a:prstDash val="solid"/>
           </a:ln>
         </p:spPr>
+        <p:txBody>
+          <a:bodyPr/>
+          <a:lstStyle/>
+          <a:p>
+            <a:endParaRPr lang="en-US">
+              <a:latin typeface="Times New Roman" panose="02020603050405020304" pitchFamily="18" charset="0"/>
+              <a:cs typeface="Times New Roman" panose="02020603050405020304" pitchFamily="18" charset="0"/>
+            </a:endParaRPr>
+          </a:p>
+        </p:txBody>
       </p:sp>
       <p:sp>
         <p:nvSpPr>
           <p:cNvPr id="18" name="unify quote 2">
-            <a:extLst xmlns:a="http://schemas.openxmlformats.org/drawingml/2006/main">
+            <a:extLst>
               <a:ext uri="{FF2B5EF4-FFF2-40B4-BE49-F238E27FC236}">
                 <a16:creationId xmlns:a16="http://schemas.microsoft.com/office/drawing/2014/main" id="{1777801B-CD9E-400E-9493-82470684617E}"/>
               </a:ext>
             </a:extLst>
           </p:cNvPr>
           <p:cNvSpPr>
-            <a:spLocks xmlns:a="http://schemas.openxmlformats.org/drawingml/2006/main" noGrp="1"/>
+            <a:spLocks noGrp="1"/>
           </p:cNvSpPr>
           <p:nvPr/>
         </p:nvSpPr>
         <p:spPr>
-          <a:xfrm xmlns:a="http://schemas.openxmlformats.org/drawingml/2006/main">
+          <a:xfrm>
             <a:off x="800100" y="7429500"/>
             <a:ext cx="4543425" cy="628650"/>
           </a:xfrm>
-          <a:prstGeom xmlns:a="http://schemas.openxmlformats.org/drawingml/2006/main" prst="rect">
+          <a:prstGeom prst="rect">
             <a:avLst/>
           </a:prstGeom>
-          <a:noFill xmlns:a="http://schemas.openxmlformats.org/drawingml/2006/main"/>
-          <a:ln xmlns:a="http://schemas.openxmlformats.org/drawingml/2006/main" w="0">
+          <a:noFill/>
+          <a:ln w="0">
             <a:noFill/>
             <a:prstDash val="solid"/>
           </a:ln>
         </p:spPr>
         <p:txBody>
-          <a:bodyPr xmlns:a="http://schemas.openxmlformats.org/drawingml/2006/main" wrap="square" lIns="0" tIns="0" rIns="0" bIns="0" anchor="ctr">
+          <a:bodyPr wrap="square" lIns="0" tIns="0" rIns="0" bIns="0" anchor="ctr">
             <a:noAutofit/>
           </a:bodyPr>
-          <a:lstStyle xmlns:a="http://schemas.openxmlformats.org/drawingml/2006/main">
+          <a:lstStyle>
             <a:defPPr algn="l">
               <a:defRPr sz="1538" b="0" i="1">
                 <a:solidFill>
@@ -5687,7 +5447,7 @@
               </a:defRPr>
             </a:lvl9pPr>
           </a:lstStyle>
-          <a:p xmlns:a="http://schemas.openxmlformats.org/drawingml/2006/main">
+          <a:p>
             <a:pPr algn="l">
               <a:lnSpc>
                 <a:spcPct val="101000"/>
@@ -5707,9 +5467,8 @@
                 <a:solidFill>
                   <a:srgbClr val="27333B"/>
                 </a:solidFill>
-                <a:latin typeface="Nimbus Sans"/>
-                <a:ea typeface="Nimbus Sans"/>
-                <a:cs typeface="Nimbus Sans"/>
+                <a:latin typeface="Times New Roman" panose="02020603050405020304" pitchFamily="18" charset="0"/>
+                <a:cs typeface="Times New Roman" panose="02020603050405020304" pitchFamily="18" charset="0"/>
               </a:rPr>
               <a:t>“For research talks and faculty projects, I search emails and department pages. I want one place to ask.”</a:t>
             </a:r>
@@ -5719,36 +5478,36 @@
       <p:sp>
         <p:nvSpPr>
           <p:cNvPr id="19" name="unify segment 2">
-            <a:extLst xmlns:a="http://schemas.openxmlformats.org/drawingml/2006/main">
+            <a:extLst>
               <a:ext uri="{FF2B5EF4-FFF2-40B4-BE49-F238E27FC236}">
                 <a16:creationId xmlns:a16="http://schemas.microsoft.com/office/drawing/2014/main" id="{813CAC60-2668-4376-A865-86593FFD188F}"/>
               </a:ext>
             </a:extLst>
           </p:cNvPr>
           <p:cNvSpPr>
-            <a:spLocks xmlns:a="http://schemas.openxmlformats.org/drawingml/2006/main" noGrp="1"/>
+            <a:spLocks noGrp="1"/>
           </p:cNvSpPr>
           <p:nvPr/>
         </p:nvSpPr>
         <p:spPr>
-          <a:xfrm xmlns:a="http://schemas.openxmlformats.org/drawingml/2006/main">
+          <a:xfrm>
             <a:off x="4095750" y="8001000"/>
             <a:ext cx="1238250" cy="161925"/>
           </a:xfrm>
-          <a:prstGeom xmlns:a="http://schemas.openxmlformats.org/drawingml/2006/main" prst="rect">
+          <a:prstGeom prst="rect">
             <a:avLst/>
           </a:prstGeom>
-          <a:noFill xmlns:a="http://schemas.openxmlformats.org/drawingml/2006/main"/>
-          <a:ln xmlns:a="http://schemas.openxmlformats.org/drawingml/2006/main" w="0">
+          <a:noFill/>
+          <a:ln w="0">
             <a:noFill/>
             <a:prstDash val="solid"/>
           </a:ln>
         </p:spPr>
         <p:txBody>
-          <a:bodyPr xmlns:a="http://schemas.openxmlformats.org/drawingml/2006/main" wrap="square" lIns="0" tIns="0" rIns="0" bIns="0" anchor="ctr">
+          <a:bodyPr wrap="square" lIns="0" tIns="0" rIns="0" bIns="0" anchor="ctr">
             <a:noAutofit/>
           </a:bodyPr>
-          <a:lstStyle xmlns:a="http://schemas.openxmlformats.org/drawingml/2006/main">
+          <a:lstStyle>
             <a:defPPr algn="r">
               <a:defRPr sz="1035" b="1" i="0">
                 <a:solidFill>
@@ -5850,7 +5609,7 @@
               </a:defRPr>
             </a:lvl9pPr>
           </a:lstStyle>
-          <a:p xmlns:a="http://schemas.openxmlformats.org/drawingml/2006/main">
+          <a:p>
             <a:pPr algn="r">
               <a:lnSpc>
                 <a:spcPct val="102000"/>
@@ -5870,9 +5629,8 @@
                 <a:solidFill>
                   <a:srgbClr val="62717A"/>
                 </a:solidFill>
-                <a:latin typeface="Nimbus Sans"/>
-                <a:ea typeface="Nimbus Sans"/>
-                <a:cs typeface="Nimbus Sans"/>
+                <a:latin typeface="Times New Roman" panose="02020603050405020304" pitchFamily="18" charset="0"/>
+                <a:cs typeface="Times New Roman" panose="02020603050405020304" pitchFamily="18" charset="0"/>
               </a:rPr>
               <a:t>P05_M022</a:t>
             </a:r>
@@ -5882,69 +5640,79 @@
       <p:sp>
         <p:nvSpPr>
           <p:cNvPr id="20" name="unify quote background 3">
-            <a:extLst xmlns:a="http://schemas.openxmlformats.org/drawingml/2006/main">
+            <a:extLst>
               <a:ext uri="{FF2B5EF4-FFF2-40B4-BE49-F238E27FC236}">
                 <a16:creationId xmlns:a16="http://schemas.microsoft.com/office/drawing/2014/main" id="{99B3E23B-5471-44CF-9188-5E04DC5E6FF9}"/>
               </a:ext>
             </a:extLst>
           </p:cNvPr>
           <p:cNvSpPr>
-            <a:spLocks xmlns:a="http://schemas.openxmlformats.org/drawingml/2006/main" noGrp="1"/>
+            <a:spLocks noGrp="1"/>
           </p:cNvSpPr>
           <p:nvPr/>
         </p:nvSpPr>
         <p:spPr>
-          <a:xfrm xmlns:a="http://schemas.openxmlformats.org/drawingml/2006/main">
+          <a:xfrm>
             <a:off x="638175" y="8305800"/>
             <a:ext cx="4876800" cy="838200"/>
           </a:xfrm>
-          <a:prstGeom xmlns:a="http://schemas.openxmlformats.org/drawingml/2006/main" prst="roundRect">
+          <a:prstGeom prst="roundRect">
             <a:avLst>
               <a:gd name="adj" fmla="val 17045"/>
             </a:avLst>
           </a:prstGeom>
-          <a:solidFill xmlns:a="http://schemas.openxmlformats.org/drawingml/2006/main">
+          <a:solidFill>
             <a:srgbClr val="F1EBE5"/>
           </a:solidFill>
-          <a:ln xmlns:a="http://schemas.openxmlformats.org/drawingml/2006/main" w="0">
+          <a:ln w="0">
             <a:noFill/>
             <a:prstDash val="solid"/>
           </a:ln>
         </p:spPr>
+        <p:txBody>
+          <a:bodyPr/>
+          <a:lstStyle/>
+          <a:p>
+            <a:endParaRPr lang="en-US">
+              <a:latin typeface="Times New Roman" panose="02020603050405020304" pitchFamily="18" charset="0"/>
+              <a:cs typeface="Times New Roman" panose="02020603050405020304" pitchFamily="18" charset="0"/>
+            </a:endParaRPr>
+          </a:p>
+        </p:txBody>
       </p:sp>
       <p:sp>
         <p:nvSpPr>
           <p:cNvPr id="21" name="unify quote 3">
-            <a:extLst xmlns:a="http://schemas.openxmlformats.org/drawingml/2006/main">
+            <a:extLst>
               <a:ext uri="{FF2B5EF4-FFF2-40B4-BE49-F238E27FC236}">
                 <a16:creationId xmlns:a16="http://schemas.microsoft.com/office/drawing/2014/main" id="{FC6C5BCC-2CC0-4ECA-A4FD-87875A879EF0}"/>
               </a:ext>
             </a:extLst>
           </p:cNvPr>
           <p:cNvSpPr>
-            <a:spLocks xmlns:a="http://schemas.openxmlformats.org/drawingml/2006/main" noGrp="1"/>
+            <a:spLocks noGrp="1"/>
           </p:cNvSpPr>
           <p:nvPr/>
         </p:nvSpPr>
         <p:spPr>
-          <a:xfrm xmlns:a="http://schemas.openxmlformats.org/drawingml/2006/main">
+          <a:xfrm>
             <a:off x="800100" y="8372475"/>
             <a:ext cx="4543425" cy="628650"/>
           </a:xfrm>
-          <a:prstGeom xmlns:a="http://schemas.openxmlformats.org/drawingml/2006/main" prst="rect">
+          <a:prstGeom prst="rect">
             <a:avLst/>
           </a:prstGeom>
-          <a:noFill xmlns:a="http://schemas.openxmlformats.org/drawingml/2006/main"/>
-          <a:ln xmlns:a="http://schemas.openxmlformats.org/drawingml/2006/main" w="0">
+          <a:noFill/>
+          <a:ln w="0">
             <a:noFill/>
             <a:prstDash val="solid"/>
           </a:ln>
         </p:spPr>
         <p:txBody>
-          <a:bodyPr xmlns:a="http://schemas.openxmlformats.org/drawingml/2006/main" wrap="square" lIns="0" tIns="0" rIns="0" bIns="0" anchor="ctr">
+          <a:bodyPr wrap="square" lIns="0" tIns="0" rIns="0" bIns="0" anchor="ctr">
             <a:noAutofit/>
           </a:bodyPr>
-          <a:lstStyle xmlns:a="http://schemas.openxmlformats.org/drawingml/2006/main">
+          <a:lstStyle>
             <a:defPPr algn="l">
               <a:defRPr sz="1538" b="0" i="1">
                 <a:solidFill>
@@ -6046,7 +5814,7 @@
               </a:defRPr>
             </a:lvl9pPr>
           </a:lstStyle>
-          <a:p xmlns:a="http://schemas.openxmlformats.org/drawingml/2006/main">
+          <a:p>
             <a:pPr algn="l">
               <a:lnSpc>
                 <a:spcPct val="101000"/>
@@ -6066,9 +5834,8 @@
                 <a:solidFill>
                   <a:srgbClr val="27333B"/>
                 </a:solidFill>
-                <a:latin typeface="Nimbus Sans"/>
-                <a:ea typeface="Nimbus Sans"/>
-                <a:cs typeface="Nimbus Sans"/>
+                <a:latin typeface="Times New Roman" panose="02020603050405020304" pitchFamily="18" charset="0"/>
+                <a:cs typeface="Times New Roman" panose="02020603050405020304" pitchFamily="18" charset="0"/>
               </a:rPr>
               <a:t>“I need PassioGo and RIPTA separately, even when I am planning one trip.”</a:t>
             </a:r>
@@ -6078,36 +5845,36 @@
       <p:sp>
         <p:nvSpPr>
           <p:cNvPr id="22" name="unify segment 3">
-            <a:extLst xmlns:a="http://schemas.openxmlformats.org/drawingml/2006/main">
+            <a:extLst>
               <a:ext uri="{FF2B5EF4-FFF2-40B4-BE49-F238E27FC236}">
                 <a16:creationId xmlns:a16="http://schemas.microsoft.com/office/drawing/2014/main" id="{4A8D9401-921B-4245-98FC-BE9E20EA4A69}"/>
               </a:ext>
             </a:extLst>
           </p:cNvPr>
           <p:cNvSpPr>
-            <a:spLocks xmlns:a="http://schemas.openxmlformats.org/drawingml/2006/main" noGrp="1"/>
+            <a:spLocks noGrp="1"/>
           </p:cNvSpPr>
           <p:nvPr/>
         </p:nvSpPr>
         <p:spPr>
-          <a:xfrm xmlns:a="http://schemas.openxmlformats.org/drawingml/2006/main">
+          <a:xfrm>
             <a:off x="4095750" y="8943975"/>
             <a:ext cx="1238250" cy="161925"/>
           </a:xfrm>
-          <a:prstGeom xmlns:a="http://schemas.openxmlformats.org/drawingml/2006/main" prst="rect">
+          <a:prstGeom prst="rect">
             <a:avLst/>
           </a:prstGeom>
-          <a:noFill xmlns:a="http://schemas.openxmlformats.org/drawingml/2006/main"/>
-          <a:ln xmlns:a="http://schemas.openxmlformats.org/drawingml/2006/main" w="0">
+          <a:noFill/>
+          <a:ln w="0">
             <a:noFill/>
             <a:prstDash val="solid"/>
           </a:ln>
         </p:spPr>
         <p:txBody>
-          <a:bodyPr xmlns:a="http://schemas.openxmlformats.org/drawingml/2006/main" wrap="square" lIns="0" tIns="0" rIns="0" bIns="0" anchor="ctr">
+          <a:bodyPr wrap="square" lIns="0" tIns="0" rIns="0" bIns="0" anchor="ctr">
             <a:noAutofit/>
           </a:bodyPr>
-          <a:lstStyle xmlns:a="http://schemas.openxmlformats.org/drawingml/2006/main">
+          <a:lstStyle>
             <a:defPPr algn="r">
               <a:defRPr sz="1035" b="1" i="0">
                 <a:solidFill>
@@ -6209,7 +5976,7 @@
               </a:defRPr>
             </a:lvl9pPr>
           </a:lstStyle>
-          <a:p xmlns:a="http://schemas.openxmlformats.org/drawingml/2006/main">
+          <a:p>
             <a:pPr algn="r">
               <a:lnSpc>
                 <a:spcPct val="102000"/>
@@ -6229,9 +5996,8 @@
                 <a:solidFill>
                   <a:srgbClr val="62717A"/>
                 </a:solidFill>
-                <a:latin typeface="Nimbus Sans"/>
-                <a:ea typeface="Nimbus Sans"/>
-                <a:cs typeface="Nimbus Sans"/>
+                <a:latin typeface="Times New Roman" panose="02020603050405020304" pitchFamily="18" charset="0"/>
+                <a:cs typeface="Times New Roman" panose="02020603050405020304" pitchFamily="18" charset="0"/>
               </a:rPr>
               <a:t>P06_M005</a:t>
             </a:r>
@@ -6241,102 +6007,122 @@
       <p:sp>
         <p:nvSpPr>
           <p:cNvPr id="23" name="task card">
-            <a:extLst xmlns:a="http://schemas.openxmlformats.org/drawingml/2006/main">
+            <a:extLst>
               <a:ext uri="{FF2B5EF4-FFF2-40B4-BE49-F238E27FC236}">
                 <a16:creationId xmlns:a16="http://schemas.microsoft.com/office/drawing/2014/main" id="{00FAE3A5-716A-4EE0-B78D-5CACD9385B36}"/>
               </a:ext>
             </a:extLst>
           </p:cNvPr>
           <p:cNvSpPr>
-            <a:spLocks xmlns:a="http://schemas.openxmlformats.org/drawingml/2006/main" noGrp="1"/>
+            <a:spLocks noGrp="1"/>
           </p:cNvSpPr>
           <p:nvPr/>
         </p:nvSpPr>
         <p:spPr>
-          <a:xfrm xmlns:a="http://schemas.openxmlformats.org/drawingml/2006/main">
+          <a:xfrm>
             <a:off x="6505575" y="2819400"/>
             <a:ext cx="5829300" cy="6591300"/>
           </a:xfrm>
-          <a:prstGeom xmlns:a="http://schemas.openxmlformats.org/drawingml/2006/main" prst="roundRect">
+          <a:prstGeom prst="roundRect">
             <a:avLst>
               <a:gd name="adj" fmla="val 3758"/>
             </a:avLst>
           </a:prstGeom>
-          <a:solidFill xmlns:a="http://schemas.openxmlformats.org/drawingml/2006/main">
+          <a:solidFill>
             <a:srgbClr val="FFFFFF"/>
           </a:solidFill>
-          <a:ln xmlns:a="http://schemas.openxmlformats.org/drawingml/2006/main" w="12383">
+          <a:ln w="12383">
             <a:solidFill>
               <a:srgbClr val="E5DCD5"/>
             </a:solidFill>
             <a:prstDash val="solid"/>
           </a:ln>
         </p:spPr>
+        <p:txBody>
+          <a:bodyPr/>
+          <a:lstStyle/>
+          <a:p>
+            <a:endParaRPr lang="en-US">
+              <a:latin typeface="Times New Roman" panose="02020603050405020304" pitchFamily="18" charset="0"/>
+              <a:cs typeface="Times New Roman" panose="02020603050405020304" pitchFamily="18" charset="0"/>
+            </a:endParaRPr>
+          </a:p>
+        </p:txBody>
       </p:sp>
       <p:sp>
         <p:nvSpPr>
           <p:cNvPr id="24" name="task number circle">
-            <a:extLst xmlns:a="http://schemas.openxmlformats.org/drawingml/2006/main">
+            <a:extLst>
               <a:ext uri="{FF2B5EF4-FFF2-40B4-BE49-F238E27FC236}">
                 <a16:creationId xmlns:a16="http://schemas.microsoft.com/office/drawing/2014/main" id="{902B5A2E-615E-407E-9225-8D351D4C1E12}"/>
               </a:ext>
             </a:extLst>
           </p:cNvPr>
           <p:cNvSpPr>
-            <a:spLocks xmlns:a="http://schemas.openxmlformats.org/drawingml/2006/main" noGrp="1"/>
+            <a:spLocks noGrp="1"/>
           </p:cNvSpPr>
           <p:nvPr/>
         </p:nvSpPr>
         <p:spPr>
-          <a:xfrm xmlns:a="http://schemas.openxmlformats.org/drawingml/2006/main">
+          <a:xfrm>
             <a:off x="6848475" y="3114675"/>
             <a:ext cx="762000" cy="762000"/>
           </a:xfrm>
-          <a:prstGeom xmlns:a="http://schemas.openxmlformats.org/drawingml/2006/main" prst="ellipse">
+          <a:prstGeom prst="ellipse">
             <a:avLst/>
           </a:prstGeom>
-          <a:solidFill xmlns:a="http://schemas.openxmlformats.org/drawingml/2006/main">
+          <a:solidFill>
             <a:srgbClr val="F6E9EB"/>
           </a:solidFill>
-          <a:ln xmlns:a="http://schemas.openxmlformats.org/drawingml/2006/main" w="0">
+          <a:ln w="0">
             <a:noFill/>
             <a:prstDash val="solid"/>
           </a:ln>
         </p:spPr>
+        <p:txBody>
+          <a:bodyPr/>
+          <a:lstStyle/>
+          <a:p>
+            <a:endParaRPr lang="en-US">
+              <a:latin typeface="Times New Roman" panose="02020603050405020304" pitchFamily="18" charset="0"/>
+              <a:cs typeface="Times New Roman" panose="02020603050405020304" pitchFamily="18" charset="0"/>
+            </a:endParaRPr>
+          </a:p>
+        </p:txBody>
       </p:sp>
       <p:sp>
         <p:nvSpPr>
           <p:cNvPr id="25" name="task number">
-            <a:extLst xmlns:a="http://schemas.openxmlformats.org/drawingml/2006/main">
+            <a:extLst>
               <a:ext uri="{FF2B5EF4-FFF2-40B4-BE49-F238E27FC236}">
                 <a16:creationId xmlns:a16="http://schemas.microsoft.com/office/drawing/2014/main" id="{1C1EF6C2-2D21-4FF5-BF85-E5DAA6F7842C}"/>
               </a:ext>
             </a:extLst>
           </p:cNvPr>
           <p:cNvSpPr>
-            <a:spLocks xmlns:a="http://schemas.openxmlformats.org/drawingml/2006/main" noGrp="1"/>
+            <a:spLocks noGrp="1"/>
           </p:cNvSpPr>
           <p:nvPr/>
         </p:nvSpPr>
         <p:spPr>
-          <a:xfrm xmlns:a="http://schemas.openxmlformats.org/drawingml/2006/main">
+          <a:xfrm>
             <a:off x="7048500" y="3181350"/>
             <a:ext cx="352425" cy="609600"/>
           </a:xfrm>
-          <a:prstGeom xmlns:a="http://schemas.openxmlformats.org/drawingml/2006/main" prst="rect">
+          <a:prstGeom prst="rect">
             <a:avLst/>
           </a:prstGeom>
-          <a:noFill xmlns:a="http://schemas.openxmlformats.org/drawingml/2006/main"/>
-          <a:ln xmlns:a="http://schemas.openxmlformats.org/drawingml/2006/main" w="0">
+          <a:noFill/>
+          <a:ln w="0">
             <a:noFill/>
             <a:prstDash val="solid"/>
           </a:ln>
         </p:spPr>
         <p:txBody>
-          <a:bodyPr xmlns:a="http://schemas.openxmlformats.org/drawingml/2006/main" wrap="square" lIns="0" tIns="0" rIns="0" bIns="0" anchor="ctr">
+          <a:bodyPr wrap="square" lIns="0" tIns="0" rIns="0" bIns="0" anchor="ctr">
             <a:noAutofit/>
           </a:bodyPr>
-          <a:lstStyle xmlns:a="http://schemas.openxmlformats.org/drawingml/2006/main">
+          <a:lstStyle>
             <a:defPPr algn="ctr">
               <a:defRPr sz="2700" b="1" i="0">
                 <a:solidFill>
@@ -6438,7 +6224,7 @@
               </a:defRPr>
             </a:lvl9pPr>
           </a:lstStyle>
-          <a:p xmlns:a="http://schemas.openxmlformats.org/drawingml/2006/main">
+          <a:p>
             <a:pPr algn="ctr">
               <a:lnSpc>
                 <a:spcPct val="102000"/>
@@ -6458,9 +6244,8 @@
                 <a:solidFill>
                   <a:srgbClr val="643545"/>
                 </a:solidFill>
-                <a:latin typeface="Nimbus Sans"/>
-                <a:ea typeface="Nimbus Sans"/>
-                <a:cs typeface="Nimbus Sans"/>
+                <a:latin typeface="Times New Roman" panose="02020603050405020304" pitchFamily="18" charset="0"/>
+                <a:cs typeface="Times New Roman" panose="02020603050405020304" pitchFamily="18" charset="0"/>
               </a:rPr>
               <a:t>2</a:t>
             </a:r>
@@ -6470,36 +6255,36 @@
       <p:sp>
         <p:nvSpPr>
           <p:cNvPr id="26" name="task title">
-            <a:extLst xmlns:a="http://schemas.openxmlformats.org/drawingml/2006/main">
+            <a:extLst>
               <a:ext uri="{FF2B5EF4-FFF2-40B4-BE49-F238E27FC236}">
                 <a16:creationId xmlns:a16="http://schemas.microsoft.com/office/drawing/2014/main" id="{1CF73630-B3AA-4611-A5E0-7A00C6F5E87A}"/>
               </a:ext>
             </a:extLst>
           </p:cNvPr>
           <p:cNvSpPr>
-            <a:spLocks xmlns:a="http://schemas.openxmlformats.org/drawingml/2006/main" noGrp="1"/>
+            <a:spLocks noGrp="1"/>
           </p:cNvSpPr>
           <p:nvPr/>
         </p:nvSpPr>
         <p:spPr>
-          <a:xfrm xmlns:a="http://schemas.openxmlformats.org/drawingml/2006/main">
+          <a:xfrm>
             <a:off x="7877175" y="3267075"/>
             <a:ext cx="4305300" cy="628650"/>
           </a:xfrm>
-          <a:prstGeom xmlns:a="http://schemas.openxmlformats.org/drawingml/2006/main" prst="rect">
+          <a:prstGeom prst="rect">
             <a:avLst/>
           </a:prstGeom>
-          <a:noFill xmlns:a="http://schemas.openxmlformats.org/drawingml/2006/main"/>
-          <a:ln xmlns:a="http://schemas.openxmlformats.org/drawingml/2006/main" w="0">
+          <a:noFill/>
+          <a:ln w="0">
             <a:noFill/>
             <a:prstDash val="solid"/>
           </a:ln>
         </p:spPr>
         <p:txBody>
-          <a:bodyPr xmlns:a="http://schemas.openxmlformats.org/drawingml/2006/main" wrap="square" lIns="0" tIns="0" rIns="0" bIns="0" anchor="ctr">
+          <a:bodyPr wrap="square" lIns="0" tIns="0" rIns="0" bIns="0" anchor="ctr">
             <a:noAutofit/>
           </a:bodyPr>
-          <a:lstStyle xmlns:a="http://schemas.openxmlformats.org/drawingml/2006/main">
+          <a:lstStyle>
             <a:defPPr algn="l">
               <a:defRPr sz="2700" b="1" i="0">
                 <a:solidFill>
@@ -6601,7 +6386,7 @@
               </a:defRPr>
             </a:lvl9pPr>
           </a:lstStyle>
-          <a:p xmlns:a="http://schemas.openxmlformats.org/drawingml/2006/main">
+          <a:p>
             <a:pPr algn="l">
               <a:lnSpc>
                 <a:spcPct val="102000"/>
@@ -6621,9 +6406,8 @@
                 <a:solidFill>
                   <a:srgbClr val="643545"/>
                 </a:solidFill>
-                <a:latin typeface="Nimbus Sans"/>
-                <a:ea typeface="Nimbus Sans"/>
-                <a:cs typeface="Nimbus Sans"/>
+                <a:latin typeface="Times New Roman" panose="02020603050405020304" pitchFamily="18" charset="0"/>
+                <a:cs typeface="Times New Roman" panose="02020603050405020304" pitchFamily="18" charset="0"/>
               </a:rPr>
               <a:t>COMPLETE TASKS</a:t>
             </a:r>
@@ -6633,36 +6417,36 @@
       <p:sp>
         <p:nvSpPr>
           <p:cNvPr id="27" name="task problem">
-            <a:extLst xmlns:a="http://schemas.openxmlformats.org/drawingml/2006/main">
+            <a:extLst>
               <a:ext uri="{FF2B5EF4-FFF2-40B4-BE49-F238E27FC236}">
                 <a16:creationId xmlns:a16="http://schemas.microsoft.com/office/drawing/2014/main" id="{69CBDD91-2D62-40AA-BB9F-DD8054832E2B}"/>
               </a:ext>
             </a:extLst>
           </p:cNvPr>
           <p:cNvSpPr>
-            <a:spLocks xmlns:a="http://schemas.openxmlformats.org/drawingml/2006/main" noGrp="1"/>
+            <a:spLocks noGrp="1"/>
           </p:cNvSpPr>
           <p:nvPr/>
         </p:nvSpPr>
         <p:spPr>
-          <a:xfrm xmlns:a="http://schemas.openxmlformats.org/drawingml/2006/main">
+          <a:xfrm>
             <a:off x="6991350" y="4276725"/>
             <a:ext cx="4953000" cy="876300"/>
           </a:xfrm>
-          <a:prstGeom xmlns:a="http://schemas.openxmlformats.org/drawingml/2006/main" prst="rect">
+          <a:prstGeom prst="rect">
             <a:avLst/>
           </a:prstGeom>
-          <a:noFill xmlns:a="http://schemas.openxmlformats.org/drawingml/2006/main"/>
-          <a:ln xmlns:a="http://schemas.openxmlformats.org/drawingml/2006/main" w="0">
+          <a:noFill/>
+          <a:ln w="0">
             <a:noFill/>
             <a:prstDash val="solid"/>
           </a:ln>
         </p:spPr>
         <p:txBody>
-          <a:bodyPr xmlns:a="http://schemas.openxmlformats.org/drawingml/2006/main" wrap="square" lIns="0" tIns="0" rIns="0" bIns="0" anchor="ctr">
+          <a:bodyPr wrap="square" lIns="0" tIns="0" rIns="0" bIns="0" anchor="ctr">
             <a:noAutofit/>
           </a:bodyPr>
-          <a:lstStyle xmlns:a="http://schemas.openxmlformats.org/drawingml/2006/main">
+          <a:lstStyle>
             <a:defPPr algn="l">
               <a:defRPr sz="2033" b="0" i="0">
                 <a:solidFill>
@@ -6764,7 +6548,7 @@
               </a:defRPr>
             </a:lvl9pPr>
           </a:lstStyle>
-          <a:p xmlns:a="http://schemas.openxmlformats.org/drawingml/2006/main">
+          <a:p>
             <a:pPr algn="l">
               <a:lnSpc>
                 <a:spcPct val="106000"/>
@@ -6784,9 +6568,8 @@
                 <a:solidFill>
                   <a:srgbClr val="27333B"/>
                 </a:solidFill>
-                <a:latin typeface="Nimbus Sans"/>
-                <a:ea typeface="Nimbus Sans"/>
-                <a:cs typeface="Nimbus Sans"/>
+                <a:latin typeface="Times New Roman" panose="02020603050405020304" pitchFamily="18" charset="0"/>
+                <a:cs typeface="Times New Roman" panose="02020603050405020304" pitchFamily="18" charset="0"/>
               </a:rPr>
               <a:t>Students need help coordinating steps and people to reach a finished outcome.</a:t>
             </a:r>
@@ -6796,36 +6579,36 @@
       <p:sp>
         <p:nvSpPr>
           <p:cNvPr id="28" name="task response">
-            <a:extLst xmlns:a="http://schemas.openxmlformats.org/drawingml/2006/main">
+            <a:extLst>
               <a:ext uri="{FF2B5EF4-FFF2-40B4-BE49-F238E27FC236}">
                 <a16:creationId xmlns:a16="http://schemas.microsoft.com/office/drawing/2014/main" id="{FAD529C5-352F-439C-9547-20F6AAAFD35D}"/>
               </a:ext>
             </a:extLst>
           </p:cNvPr>
           <p:cNvSpPr>
-            <a:spLocks xmlns:a="http://schemas.openxmlformats.org/drawingml/2006/main" noGrp="1"/>
+            <a:spLocks noGrp="1"/>
           </p:cNvSpPr>
           <p:nvPr/>
         </p:nvSpPr>
         <p:spPr>
-          <a:xfrm xmlns:a="http://schemas.openxmlformats.org/drawingml/2006/main">
+          <a:xfrm>
             <a:off x="6991350" y="5372100"/>
             <a:ext cx="5067300" cy="552450"/>
           </a:xfrm>
-          <a:prstGeom xmlns:a="http://schemas.openxmlformats.org/drawingml/2006/main" prst="rect">
+          <a:prstGeom prst="rect">
             <a:avLst/>
           </a:prstGeom>
-          <a:noFill xmlns:a="http://schemas.openxmlformats.org/drawingml/2006/main"/>
-          <a:ln xmlns:a="http://schemas.openxmlformats.org/drawingml/2006/main" w="0">
+          <a:noFill/>
+          <a:ln w="0">
             <a:noFill/>
             <a:prstDash val="solid"/>
           </a:ln>
         </p:spPr>
         <p:txBody>
-          <a:bodyPr xmlns:a="http://schemas.openxmlformats.org/drawingml/2006/main" wrap="square" lIns="0" tIns="0" rIns="0" bIns="0" anchor="ctr">
+          <a:bodyPr wrap="square" lIns="0" tIns="0" rIns="0" bIns="0" anchor="ctr">
             <a:noAutofit/>
           </a:bodyPr>
-          <a:lstStyle xmlns:a="http://schemas.openxmlformats.org/drawingml/2006/main">
+          <a:lstStyle>
             <a:defPPr algn="l">
               <a:defRPr sz="1665" b="1" i="0">
                 <a:solidFill>
@@ -6927,7 +6710,7 @@
               </a:defRPr>
             </a:lvl9pPr>
           </a:lstStyle>
-          <a:p xmlns:a="http://schemas.openxmlformats.org/drawingml/2006/main">
+          <a:p>
             <a:pPr algn="l">
               <a:lnSpc>
                 <a:spcPct val="102000"/>
@@ -6947,9 +6730,8 @@
                 <a:solidFill>
                   <a:srgbClr val="206E65"/>
                 </a:solidFill>
-                <a:latin typeface="Nimbus Sans"/>
-                <a:ea typeface="Nimbus Sans"/>
-                <a:cs typeface="Nimbus Sans"/>
+                <a:latin typeface="Times New Roman" panose="02020603050405020304" pitchFamily="18" charset="0"/>
+                <a:cs typeface="Times New Roman" panose="02020603050405020304" pitchFamily="18" charset="0"/>
               </a:rPr>
               <a:t>→ Coordinated planning and follow-through</a:t>
             </a:r>
@@ -6959,36 +6741,36 @@
       <p:sp>
         <p:nvSpPr>
           <p:cNvPr id="29" name="task student label">
-            <a:extLst xmlns:a="http://schemas.openxmlformats.org/drawingml/2006/main">
+            <a:extLst>
               <a:ext uri="{FF2B5EF4-FFF2-40B4-BE49-F238E27FC236}">
                 <a16:creationId xmlns:a16="http://schemas.microsoft.com/office/drawing/2014/main" id="{9B23599F-653F-4FCA-9DCB-05CF4E83ADFC}"/>
               </a:ext>
             </a:extLst>
           </p:cNvPr>
           <p:cNvSpPr>
-            <a:spLocks xmlns:a="http://schemas.openxmlformats.org/drawingml/2006/main" noGrp="1"/>
+            <a:spLocks noGrp="1"/>
           </p:cNvSpPr>
           <p:nvPr/>
         </p:nvSpPr>
         <p:spPr>
-          <a:xfrm xmlns:a="http://schemas.openxmlformats.org/drawingml/2006/main">
+          <a:xfrm>
             <a:off x="6991350" y="6048375"/>
             <a:ext cx="4953000" cy="295275"/>
           </a:xfrm>
-          <a:prstGeom xmlns:a="http://schemas.openxmlformats.org/drawingml/2006/main" prst="rect">
+          <a:prstGeom prst="rect">
             <a:avLst/>
           </a:prstGeom>
-          <a:noFill xmlns:a="http://schemas.openxmlformats.org/drawingml/2006/main"/>
-          <a:ln xmlns:a="http://schemas.openxmlformats.org/drawingml/2006/main" w="0">
+          <a:noFill/>
+          <a:ln w="0">
             <a:noFill/>
             <a:prstDash val="solid"/>
           </a:ln>
         </p:spPr>
         <p:txBody>
-          <a:bodyPr xmlns:a="http://schemas.openxmlformats.org/drawingml/2006/main" wrap="square" lIns="0" tIns="0" rIns="0" bIns="0" anchor="ctr">
+          <a:bodyPr wrap="square" lIns="0" tIns="0" rIns="0" bIns="0" anchor="ctr">
             <a:noAutofit/>
           </a:bodyPr>
-          <a:lstStyle xmlns:a="http://schemas.openxmlformats.org/drawingml/2006/main">
+          <a:lstStyle>
             <a:defPPr algn="l">
               <a:defRPr sz="1350" b="1" i="0">
                 <a:solidFill>
@@ -7090,7 +6872,7 @@
               </a:defRPr>
             </a:lvl9pPr>
           </a:lstStyle>
-          <a:p xmlns:a="http://schemas.openxmlformats.org/drawingml/2006/main">
+          <a:p>
             <a:pPr algn="l">
               <a:lnSpc>
                 <a:spcPct val="102000"/>
@@ -7110,9 +6892,8 @@
                 <a:solidFill>
                   <a:srgbClr val="643545"/>
                 </a:solidFill>
-                <a:latin typeface="Nimbus Sans"/>
-                <a:ea typeface="Nimbus Sans"/>
-                <a:cs typeface="Nimbus Sans"/>
+                <a:latin typeface="Times New Roman" panose="02020603050405020304" pitchFamily="18" charset="0"/>
+                <a:cs typeface="Times New Roman" panose="02020603050405020304" pitchFamily="18" charset="0"/>
               </a:rPr>
               <a:t>STUDENTS SAY</a:t>
             </a:r>
@@ -7122,69 +6903,79 @@
       <p:sp>
         <p:nvSpPr>
           <p:cNvPr id="30" name="task quote background 1">
-            <a:extLst xmlns:a="http://schemas.openxmlformats.org/drawingml/2006/main">
+            <a:extLst>
               <a:ext uri="{FF2B5EF4-FFF2-40B4-BE49-F238E27FC236}">
                 <a16:creationId xmlns:a16="http://schemas.microsoft.com/office/drawing/2014/main" id="{6C548D10-A51B-427C-A4E5-F7B744DF6B6B}"/>
               </a:ext>
             </a:extLst>
           </p:cNvPr>
           <p:cNvSpPr>
-            <a:spLocks xmlns:a="http://schemas.openxmlformats.org/drawingml/2006/main" noGrp="1"/>
+            <a:spLocks noGrp="1"/>
           </p:cNvSpPr>
           <p:nvPr/>
         </p:nvSpPr>
         <p:spPr>
-          <a:xfrm xmlns:a="http://schemas.openxmlformats.org/drawingml/2006/main">
+          <a:xfrm>
             <a:off x="6991350" y="6419850"/>
             <a:ext cx="4876800" cy="838200"/>
           </a:xfrm>
-          <a:prstGeom xmlns:a="http://schemas.openxmlformats.org/drawingml/2006/main" prst="roundRect">
+          <a:prstGeom prst="roundRect">
             <a:avLst>
               <a:gd name="adj" fmla="val 17045"/>
             </a:avLst>
           </a:prstGeom>
-          <a:solidFill xmlns:a="http://schemas.openxmlformats.org/drawingml/2006/main">
+          <a:solidFill>
             <a:srgbClr val="F1EBE5"/>
           </a:solidFill>
-          <a:ln xmlns:a="http://schemas.openxmlformats.org/drawingml/2006/main" w="0">
+          <a:ln w="0">
             <a:noFill/>
             <a:prstDash val="solid"/>
           </a:ln>
         </p:spPr>
+        <p:txBody>
+          <a:bodyPr/>
+          <a:lstStyle/>
+          <a:p>
+            <a:endParaRPr lang="en-US">
+              <a:latin typeface="Times New Roman" panose="02020603050405020304" pitchFamily="18" charset="0"/>
+              <a:cs typeface="Times New Roman" panose="02020603050405020304" pitchFamily="18" charset="0"/>
+            </a:endParaRPr>
+          </a:p>
+        </p:txBody>
       </p:sp>
       <p:sp>
         <p:nvSpPr>
           <p:cNvPr id="31" name="task quote 1">
-            <a:extLst xmlns:a="http://schemas.openxmlformats.org/drawingml/2006/main">
+            <a:extLst>
               <a:ext uri="{FF2B5EF4-FFF2-40B4-BE49-F238E27FC236}">
                 <a16:creationId xmlns:a16="http://schemas.microsoft.com/office/drawing/2014/main" id="{CBFABEA0-CCAF-44F4-AFD1-99987FBE9FCF}"/>
               </a:ext>
             </a:extLst>
           </p:cNvPr>
           <p:cNvSpPr>
-            <a:spLocks xmlns:a="http://schemas.openxmlformats.org/drawingml/2006/main" noGrp="1"/>
+            <a:spLocks noGrp="1"/>
           </p:cNvSpPr>
           <p:nvPr/>
         </p:nvSpPr>
         <p:spPr>
-          <a:xfrm xmlns:a="http://schemas.openxmlformats.org/drawingml/2006/main">
+          <a:xfrm>
             <a:off x="7153275" y="6486525"/>
             <a:ext cx="4543425" cy="628650"/>
           </a:xfrm>
-          <a:prstGeom xmlns:a="http://schemas.openxmlformats.org/drawingml/2006/main" prst="rect">
+          <a:prstGeom prst="rect">
             <a:avLst/>
           </a:prstGeom>
-          <a:noFill xmlns:a="http://schemas.openxmlformats.org/drawingml/2006/main"/>
-          <a:ln xmlns:a="http://schemas.openxmlformats.org/drawingml/2006/main" w="0">
+          <a:noFill/>
+          <a:ln w="0">
             <a:noFill/>
             <a:prstDash val="solid"/>
           </a:ln>
         </p:spPr>
         <p:txBody>
-          <a:bodyPr xmlns:a="http://schemas.openxmlformats.org/drawingml/2006/main" wrap="square" lIns="0" tIns="0" rIns="0" bIns="0" anchor="ctr">
+          <a:bodyPr wrap="square" lIns="0" tIns="0" rIns="0" bIns="0" anchor="ctr">
             <a:noAutofit/>
           </a:bodyPr>
-          <a:lstStyle xmlns:a="http://schemas.openxmlformats.org/drawingml/2006/main">
+          <a:lstStyle>
             <a:defPPr algn="l">
               <a:defRPr sz="1538" b="0" i="1">
                 <a:solidFill>
@@ -7286,7 +7077,7 @@
               </a:defRPr>
             </a:lvl9pPr>
           </a:lstStyle>
-          <a:p xmlns:a="http://schemas.openxmlformats.org/drawingml/2006/main">
+          <a:p>
             <a:pPr algn="l">
               <a:lnSpc>
                 <a:spcPct val="101000"/>
@@ -7306,9 +7097,8 @@
                 <a:solidFill>
                   <a:srgbClr val="27333B"/>
                 </a:solidFill>
-                <a:latin typeface="Nimbus Sans"/>
-                <a:ea typeface="Nimbus Sans"/>
-                <a:cs typeface="Nimbus Sans"/>
+                <a:latin typeface="Times New Roman" panose="02020603050405020304" pitchFamily="18" charset="0"/>
+                <a:cs typeface="Times New Roman" panose="02020603050405020304" pitchFamily="18" charset="0"/>
               </a:rPr>
               <a:t>“To arrange a TA meeting, I collect everyone’s availability, then try a separate site to book a room.”</a:t>
             </a:r>
@@ -7318,36 +7108,36 @@
       <p:sp>
         <p:nvSpPr>
           <p:cNvPr id="32" name="task segment 1">
-            <a:extLst xmlns:a="http://schemas.openxmlformats.org/drawingml/2006/main">
+            <a:extLst>
               <a:ext uri="{FF2B5EF4-FFF2-40B4-BE49-F238E27FC236}">
                 <a16:creationId xmlns:a16="http://schemas.microsoft.com/office/drawing/2014/main" id="{DF8CD43B-77FB-493C-980B-06823F5DDD47}"/>
               </a:ext>
             </a:extLst>
           </p:cNvPr>
           <p:cNvSpPr>
-            <a:spLocks xmlns:a="http://schemas.openxmlformats.org/drawingml/2006/main" noGrp="1"/>
+            <a:spLocks noGrp="1"/>
           </p:cNvSpPr>
           <p:nvPr/>
         </p:nvSpPr>
         <p:spPr>
-          <a:xfrm xmlns:a="http://schemas.openxmlformats.org/drawingml/2006/main">
+          <a:xfrm>
             <a:off x="10448925" y="7058025"/>
             <a:ext cx="1238250" cy="161925"/>
           </a:xfrm>
-          <a:prstGeom xmlns:a="http://schemas.openxmlformats.org/drawingml/2006/main" prst="rect">
+          <a:prstGeom prst="rect">
             <a:avLst/>
           </a:prstGeom>
-          <a:noFill xmlns:a="http://schemas.openxmlformats.org/drawingml/2006/main"/>
-          <a:ln xmlns:a="http://schemas.openxmlformats.org/drawingml/2006/main" w="0">
+          <a:noFill/>
+          <a:ln w="0">
             <a:noFill/>
             <a:prstDash val="solid"/>
           </a:ln>
         </p:spPr>
         <p:txBody>
-          <a:bodyPr xmlns:a="http://schemas.openxmlformats.org/drawingml/2006/main" wrap="square" lIns="0" tIns="0" rIns="0" bIns="0" anchor="ctr">
+          <a:bodyPr wrap="square" lIns="0" tIns="0" rIns="0" bIns="0" anchor="ctr">
             <a:noAutofit/>
           </a:bodyPr>
-          <a:lstStyle xmlns:a="http://schemas.openxmlformats.org/drawingml/2006/main">
+          <a:lstStyle>
             <a:defPPr algn="r">
               <a:defRPr sz="1035" b="1" i="0">
                 <a:solidFill>
@@ -7449,7 +7239,7 @@
               </a:defRPr>
             </a:lvl9pPr>
           </a:lstStyle>
-          <a:p xmlns:a="http://schemas.openxmlformats.org/drawingml/2006/main">
+          <a:p>
             <a:pPr algn="r">
               <a:lnSpc>
                 <a:spcPct val="102000"/>
@@ -7469,9 +7259,8 @@
                 <a:solidFill>
                   <a:srgbClr val="62717A"/>
                 </a:solidFill>
-                <a:latin typeface="Nimbus Sans"/>
-                <a:ea typeface="Nimbus Sans"/>
-                <a:cs typeface="Nimbus Sans"/>
+                <a:latin typeface="Times New Roman" panose="02020603050405020304" pitchFamily="18" charset="0"/>
+                <a:cs typeface="Times New Roman" panose="02020603050405020304" pitchFamily="18" charset="0"/>
               </a:rPr>
               <a:t>P07_M018</a:t>
             </a:r>
@@ -7481,69 +7270,79 @@
       <p:sp>
         <p:nvSpPr>
           <p:cNvPr id="33" name="task quote background 2">
-            <a:extLst xmlns:a="http://schemas.openxmlformats.org/drawingml/2006/main">
+            <a:extLst>
               <a:ext uri="{FF2B5EF4-FFF2-40B4-BE49-F238E27FC236}">
                 <a16:creationId xmlns:a16="http://schemas.microsoft.com/office/drawing/2014/main" id="{391D4DC3-BA86-4DFE-921A-BB62C27AC2C8}"/>
               </a:ext>
             </a:extLst>
           </p:cNvPr>
           <p:cNvSpPr>
-            <a:spLocks xmlns:a="http://schemas.openxmlformats.org/drawingml/2006/main" noGrp="1"/>
+            <a:spLocks noGrp="1"/>
           </p:cNvSpPr>
           <p:nvPr/>
         </p:nvSpPr>
         <p:spPr>
-          <a:xfrm xmlns:a="http://schemas.openxmlformats.org/drawingml/2006/main">
+          <a:xfrm>
             <a:off x="6991350" y="7362825"/>
             <a:ext cx="4876800" cy="838200"/>
           </a:xfrm>
-          <a:prstGeom xmlns:a="http://schemas.openxmlformats.org/drawingml/2006/main" prst="roundRect">
+          <a:prstGeom prst="roundRect">
             <a:avLst>
               <a:gd name="adj" fmla="val 17045"/>
             </a:avLst>
           </a:prstGeom>
-          <a:solidFill xmlns:a="http://schemas.openxmlformats.org/drawingml/2006/main">
+          <a:solidFill>
             <a:srgbClr val="FCF0EC"/>
           </a:solidFill>
-          <a:ln xmlns:a="http://schemas.openxmlformats.org/drawingml/2006/main" w="0">
+          <a:ln w="0">
             <a:noFill/>
             <a:prstDash val="solid"/>
           </a:ln>
         </p:spPr>
+        <p:txBody>
+          <a:bodyPr/>
+          <a:lstStyle/>
+          <a:p>
+            <a:endParaRPr lang="en-US">
+              <a:latin typeface="Times New Roman" panose="02020603050405020304" pitchFamily="18" charset="0"/>
+              <a:cs typeface="Times New Roman" panose="02020603050405020304" pitchFamily="18" charset="0"/>
+            </a:endParaRPr>
+          </a:p>
+        </p:txBody>
       </p:sp>
       <p:sp>
         <p:nvSpPr>
           <p:cNvPr id="34" name="task quote 2">
-            <a:extLst xmlns:a="http://schemas.openxmlformats.org/drawingml/2006/main">
+            <a:extLst>
               <a:ext uri="{FF2B5EF4-FFF2-40B4-BE49-F238E27FC236}">
                 <a16:creationId xmlns:a16="http://schemas.microsoft.com/office/drawing/2014/main" id="{92AD3508-2051-4595-AE60-E762AE2C3E0E}"/>
               </a:ext>
             </a:extLst>
           </p:cNvPr>
           <p:cNvSpPr>
-            <a:spLocks xmlns:a="http://schemas.openxmlformats.org/drawingml/2006/main" noGrp="1"/>
+            <a:spLocks noGrp="1"/>
           </p:cNvSpPr>
           <p:nvPr/>
         </p:nvSpPr>
         <p:spPr>
-          <a:xfrm xmlns:a="http://schemas.openxmlformats.org/drawingml/2006/main">
+          <a:xfrm>
             <a:off x="7153275" y="7429500"/>
             <a:ext cx="4543425" cy="628650"/>
           </a:xfrm>
-          <a:prstGeom xmlns:a="http://schemas.openxmlformats.org/drawingml/2006/main" prst="rect">
+          <a:prstGeom prst="rect">
             <a:avLst/>
           </a:prstGeom>
-          <a:noFill xmlns:a="http://schemas.openxmlformats.org/drawingml/2006/main"/>
-          <a:ln xmlns:a="http://schemas.openxmlformats.org/drawingml/2006/main" w="0">
+          <a:noFill/>
+          <a:ln w="0">
             <a:noFill/>
             <a:prstDash val="solid"/>
           </a:ln>
         </p:spPr>
         <p:txBody>
-          <a:bodyPr xmlns:a="http://schemas.openxmlformats.org/drawingml/2006/main" wrap="square" lIns="0" tIns="0" rIns="0" bIns="0" anchor="ctr">
+          <a:bodyPr wrap="square" lIns="0" tIns="0" rIns="0" bIns="0" anchor="ctr">
             <a:noAutofit/>
           </a:bodyPr>
-          <a:lstStyle xmlns:a="http://schemas.openxmlformats.org/drawingml/2006/main">
+          <a:lstStyle>
             <a:defPPr algn="l">
               <a:defRPr sz="1538" b="0" i="1">
                 <a:solidFill>
@@ -7645,7 +7444,7 @@
               </a:defRPr>
             </a:lvl9pPr>
           </a:lstStyle>
-          <a:p xmlns:a="http://schemas.openxmlformats.org/drawingml/2006/main">
+          <a:p>
             <a:pPr algn="l">
               <a:lnSpc>
                 <a:spcPct val="101000"/>
@@ -7665,9 +7464,8 @@
                 <a:solidFill>
                   <a:srgbClr val="27333B"/>
                 </a:solidFill>
-                <a:latin typeface="Nimbus Sans"/>
-                <a:ea typeface="Nimbus Sans"/>
-                <a:cs typeface="Nimbus Sans"/>
+                <a:latin typeface="Times New Roman" panose="02020603050405020304" pitchFamily="18" charset="0"/>
+                <a:cs typeface="Times New Roman" panose="02020603050405020304" pitchFamily="18" charset="0"/>
               </a:rPr>
               <a:t>“After finding an event, I still check the deadline, compare my calendar, and add it myself.”</a:t>
             </a:r>
@@ -7677,36 +7475,36 @@
       <p:sp>
         <p:nvSpPr>
           <p:cNvPr id="35" name="task segment 2">
-            <a:extLst xmlns:a="http://schemas.openxmlformats.org/drawingml/2006/main">
+            <a:extLst>
               <a:ext uri="{FF2B5EF4-FFF2-40B4-BE49-F238E27FC236}">
                 <a16:creationId xmlns:a16="http://schemas.microsoft.com/office/drawing/2014/main" id="{91E88FCE-F702-4E26-9931-7AA3F8D54369}"/>
               </a:ext>
             </a:extLst>
           </p:cNvPr>
           <p:cNvSpPr>
-            <a:spLocks xmlns:a="http://schemas.openxmlformats.org/drawingml/2006/main" noGrp="1"/>
+            <a:spLocks noGrp="1"/>
           </p:cNvSpPr>
           <p:nvPr/>
         </p:nvSpPr>
         <p:spPr>
-          <a:xfrm xmlns:a="http://schemas.openxmlformats.org/drawingml/2006/main">
+          <a:xfrm>
             <a:off x="10448925" y="8001000"/>
             <a:ext cx="1238250" cy="161925"/>
           </a:xfrm>
-          <a:prstGeom xmlns:a="http://schemas.openxmlformats.org/drawingml/2006/main" prst="rect">
+          <a:prstGeom prst="rect">
             <a:avLst/>
           </a:prstGeom>
-          <a:noFill xmlns:a="http://schemas.openxmlformats.org/drawingml/2006/main"/>
-          <a:ln xmlns:a="http://schemas.openxmlformats.org/drawingml/2006/main" w="0">
+          <a:noFill/>
+          <a:ln w="0">
             <a:noFill/>
             <a:prstDash val="solid"/>
           </a:ln>
         </p:spPr>
         <p:txBody>
-          <a:bodyPr xmlns:a="http://schemas.openxmlformats.org/drawingml/2006/main" wrap="square" lIns="0" tIns="0" rIns="0" bIns="0" anchor="ctr">
+          <a:bodyPr wrap="square" lIns="0" tIns="0" rIns="0" bIns="0" anchor="ctr">
             <a:noAutofit/>
           </a:bodyPr>
-          <a:lstStyle xmlns:a="http://schemas.openxmlformats.org/drawingml/2006/main">
+          <a:lstStyle>
             <a:defPPr algn="r">
               <a:defRPr sz="1035" b="1" i="0">
                 <a:solidFill>
@@ -7808,7 +7606,7 @@
               </a:defRPr>
             </a:lvl9pPr>
           </a:lstStyle>
-          <a:p xmlns:a="http://schemas.openxmlformats.org/drawingml/2006/main">
+          <a:p>
             <a:pPr algn="r">
               <a:lnSpc>
                 <a:spcPct val="102000"/>
@@ -7828,9 +7626,8 @@
                 <a:solidFill>
                   <a:srgbClr val="62717A"/>
                 </a:solidFill>
-                <a:latin typeface="Nimbus Sans"/>
-                <a:ea typeface="Nimbus Sans"/>
-                <a:cs typeface="Nimbus Sans"/>
+                <a:latin typeface="Times New Roman" panose="02020603050405020304" pitchFamily="18" charset="0"/>
+                <a:cs typeface="Times New Roman" panose="02020603050405020304" pitchFamily="18" charset="0"/>
               </a:rPr>
               <a:t>P05_M013</a:t>
             </a:r>
@@ -7840,69 +7637,79 @@
       <p:sp>
         <p:nvSpPr>
           <p:cNvPr id="36" name="task quote background 3">
-            <a:extLst xmlns:a="http://schemas.openxmlformats.org/drawingml/2006/main">
+            <a:extLst>
               <a:ext uri="{FF2B5EF4-FFF2-40B4-BE49-F238E27FC236}">
                 <a16:creationId xmlns:a16="http://schemas.microsoft.com/office/drawing/2014/main" id="{B966C69E-AB11-4854-8667-DF4D5C441455}"/>
               </a:ext>
             </a:extLst>
           </p:cNvPr>
           <p:cNvSpPr>
-            <a:spLocks xmlns:a="http://schemas.openxmlformats.org/drawingml/2006/main" noGrp="1"/>
+            <a:spLocks noGrp="1"/>
           </p:cNvSpPr>
           <p:nvPr/>
         </p:nvSpPr>
         <p:spPr>
-          <a:xfrm xmlns:a="http://schemas.openxmlformats.org/drawingml/2006/main">
+          <a:xfrm>
             <a:off x="6991350" y="8305800"/>
             <a:ext cx="4876800" cy="838200"/>
           </a:xfrm>
-          <a:prstGeom xmlns:a="http://schemas.openxmlformats.org/drawingml/2006/main" prst="roundRect">
+          <a:prstGeom prst="roundRect">
             <a:avLst>
               <a:gd name="adj" fmla="val 17045"/>
             </a:avLst>
           </a:prstGeom>
-          <a:solidFill xmlns:a="http://schemas.openxmlformats.org/drawingml/2006/main">
+          <a:solidFill>
             <a:srgbClr val="F1EBE5"/>
           </a:solidFill>
-          <a:ln xmlns:a="http://schemas.openxmlformats.org/drawingml/2006/main" w="0">
+          <a:ln w="0">
             <a:noFill/>
             <a:prstDash val="solid"/>
           </a:ln>
         </p:spPr>
+        <p:txBody>
+          <a:bodyPr/>
+          <a:lstStyle/>
+          <a:p>
+            <a:endParaRPr lang="en-US">
+              <a:latin typeface="Times New Roman" panose="02020603050405020304" pitchFamily="18" charset="0"/>
+              <a:cs typeface="Times New Roman" panose="02020603050405020304" pitchFamily="18" charset="0"/>
+            </a:endParaRPr>
+          </a:p>
+        </p:txBody>
       </p:sp>
       <p:sp>
         <p:nvSpPr>
           <p:cNvPr id="37" name="task quote 3">
-            <a:extLst xmlns:a="http://schemas.openxmlformats.org/drawingml/2006/main">
+            <a:extLst>
               <a:ext uri="{FF2B5EF4-FFF2-40B4-BE49-F238E27FC236}">
                 <a16:creationId xmlns:a16="http://schemas.microsoft.com/office/drawing/2014/main" id="{55F9831C-C8B1-4B87-A2AC-AC929B28F767}"/>
               </a:ext>
             </a:extLst>
           </p:cNvPr>
           <p:cNvSpPr>
-            <a:spLocks xmlns:a="http://schemas.openxmlformats.org/drawingml/2006/main" noGrp="1"/>
+            <a:spLocks noGrp="1"/>
           </p:cNvSpPr>
           <p:nvPr/>
         </p:nvSpPr>
         <p:spPr>
-          <a:xfrm xmlns:a="http://schemas.openxmlformats.org/drawingml/2006/main">
+          <a:xfrm>
             <a:off x="7153275" y="8372475"/>
             <a:ext cx="4543425" cy="628650"/>
           </a:xfrm>
-          <a:prstGeom xmlns:a="http://schemas.openxmlformats.org/drawingml/2006/main" prst="rect">
+          <a:prstGeom prst="rect">
             <a:avLst/>
           </a:prstGeom>
-          <a:noFill xmlns:a="http://schemas.openxmlformats.org/drawingml/2006/main"/>
-          <a:ln xmlns:a="http://schemas.openxmlformats.org/drawingml/2006/main" w="0">
+          <a:noFill/>
+          <a:ln w="0">
             <a:noFill/>
             <a:prstDash val="solid"/>
           </a:ln>
         </p:spPr>
         <p:txBody>
-          <a:bodyPr xmlns:a="http://schemas.openxmlformats.org/drawingml/2006/main" wrap="square" lIns="0" tIns="0" rIns="0" bIns="0" anchor="ctr">
+          <a:bodyPr wrap="square" lIns="0" tIns="0" rIns="0" bIns="0" anchor="ctr">
             <a:noAutofit/>
           </a:bodyPr>
-          <a:lstStyle xmlns:a="http://schemas.openxmlformats.org/drawingml/2006/main">
+          <a:lstStyle>
             <a:defPPr algn="l">
               <a:defRPr sz="1538" b="0" i="1">
                 <a:solidFill>
@@ -8004,7 +7811,7 @@
               </a:defRPr>
             </a:lvl9pPr>
           </a:lstStyle>
-          <a:p xmlns:a="http://schemas.openxmlformats.org/drawingml/2006/main">
+          <a:p>
             <a:pPr algn="l">
               <a:lnSpc>
                 <a:spcPct val="101000"/>
@@ -8024,9 +7831,8 @@
                 <a:solidFill>
                   <a:srgbClr val="27333B"/>
                 </a:solidFill>
-                <a:latin typeface="Nimbus Sans"/>
-                <a:ea typeface="Nimbus Sans"/>
-                <a:cs typeface="Nimbus Sans"/>
+                <a:latin typeface="Times New Roman" panose="02020603050405020304" pitchFamily="18" charset="0"/>
+                <a:cs typeface="Times New Roman" panose="02020603050405020304" pitchFamily="18" charset="0"/>
               </a:rPr>
               <a:t>“Organizing a student event involves registration, spaces, and campus approval rules.”</a:t>
             </a:r>
@@ -8036,36 +7842,36 @@
       <p:sp>
         <p:nvSpPr>
           <p:cNvPr id="38" name="task segment 3">
-            <a:extLst xmlns:a="http://schemas.openxmlformats.org/drawingml/2006/main">
+            <a:extLst>
               <a:ext uri="{FF2B5EF4-FFF2-40B4-BE49-F238E27FC236}">
                 <a16:creationId xmlns:a16="http://schemas.microsoft.com/office/drawing/2014/main" id="{1240AAF2-A7CF-4BE1-B712-2998E93C7980}"/>
               </a:ext>
             </a:extLst>
           </p:cNvPr>
           <p:cNvSpPr>
-            <a:spLocks xmlns:a="http://schemas.openxmlformats.org/drawingml/2006/main" noGrp="1"/>
+            <a:spLocks noGrp="1"/>
           </p:cNvSpPr>
           <p:nvPr/>
         </p:nvSpPr>
         <p:spPr>
-          <a:xfrm xmlns:a="http://schemas.openxmlformats.org/drawingml/2006/main">
+          <a:xfrm>
             <a:off x="10448925" y="8943975"/>
             <a:ext cx="1238250" cy="161925"/>
           </a:xfrm>
-          <a:prstGeom xmlns:a="http://schemas.openxmlformats.org/drawingml/2006/main" prst="rect">
+          <a:prstGeom prst="rect">
             <a:avLst/>
           </a:prstGeom>
-          <a:noFill xmlns:a="http://schemas.openxmlformats.org/drawingml/2006/main"/>
-          <a:ln xmlns:a="http://schemas.openxmlformats.org/drawingml/2006/main" w="0">
+          <a:noFill/>
+          <a:ln w="0">
             <a:noFill/>
             <a:prstDash val="solid"/>
           </a:ln>
         </p:spPr>
         <p:txBody>
-          <a:bodyPr xmlns:a="http://schemas.openxmlformats.org/drawingml/2006/main" wrap="square" lIns="0" tIns="0" rIns="0" bIns="0" anchor="ctr">
+          <a:bodyPr wrap="square" lIns="0" tIns="0" rIns="0" bIns="0" anchor="ctr">
             <a:noAutofit/>
           </a:bodyPr>
-          <a:lstStyle xmlns:a="http://schemas.openxmlformats.org/drawingml/2006/main">
+          <a:lstStyle>
             <a:defPPr algn="r">
               <a:defRPr sz="1035" b="1" i="0">
                 <a:solidFill>
@@ -8167,7 +7973,7 @@
               </a:defRPr>
             </a:lvl9pPr>
           </a:lstStyle>
-          <a:p xmlns:a="http://schemas.openxmlformats.org/drawingml/2006/main">
+          <a:p>
             <a:pPr algn="r">
               <a:lnSpc>
                 <a:spcPct val="102000"/>
@@ -8187,9 +7993,8 @@
                 <a:solidFill>
                   <a:srgbClr val="62717A"/>
                 </a:solidFill>
-                <a:latin typeface="Nimbus Sans"/>
-                <a:ea typeface="Nimbus Sans"/>
-                <a:cs typeface="Nimbus Sans"/>
+                <a:latin typeface="Times New Roman" panose="02020603050405020304" pitchFamily="18" charset="0"/>
+                <a:cs typeface="Times New Roman" panose="02020603050405020304" pitchFamily="18" charset="0"/>
               </a:rPr>
               <a:t>P02_M015</a:t>
             </a:r>
@@ -8199,102 +8004,122 @@
       <p:sp>
         <p:nvSpPr>
           <p:cNvPr id="39" name="time card">
-            <a:extLst xmlns:a="http://schemas.openxmlformats.org/drawingml/2006/main">
+            <a:extLst>
               <a:ext uri="{FF2B5EF4-FFF2-40B4-BE49-F238E27FC236}">
                 <a16:creationId xmlns:a16="http://schemas.microsoft.com/office/drawing/2014/main" id="{5BB61CB8-7EC2-4A83-B1C3-78E48E688538}"/>
               </a:ext>
             </a:extLst>
           </p:cNvPr>
           <p:cNvSpPr>
-            <a:spLocks xmlns:a="http://schemas.openxmlformats.org/drawingml/2006/main" noGrp="1"/>
+            <a:spLocks noGrp="1"/>
           </p:cNvSpPr>
           <p:nvPr/>
         </p:nvSpPr>
         <p:spPr>
-          <a:xfrm xmlns:a="http://schemas.openxmlformats.org/drawingml/2006/main">
+          <a:xfrm>
             <a:off x="12858750" y="2819400"/>
             <a:ext cx="5829300" cy="6591300"/>
           </a:xfrm>
-          <a:prstGeom xmlns:a="http://schemas.openxmlformats.org/drawingml/2006/main" prst="roundRect">
+          <a:prstGeom prst="roundRect">
             <a:avLst>
               <a:gd name="adj" fmla="val 3758"/>
             </a:avLst>
           </a:prstGeom>
-          <a:solidFill xmlns:a="http://schemas.openxmlformats.org/drawingml/2006/main">
+          <a:solidFill>
             <a:srgbClr val="FFFFFF"/>
           </a:solidFill>
-          <a:ln xmlns:a="http://schemas.openxmlformats.org/drawingml/2006/main" w="12383">
+          <a:ln w="12383">
             <a:solidFill>
               <a:srgbClr val="E5DCD5"/>
             </a:solidFill>
             <a:prstDash val="solid"/>
           </a:ln>
         </p:spPr>
+        <p:txBody>
+          <a:bodyPr/>
+          <a:lstStyle/>
+          <a:p>
+            <a:endParaRPr lang="en-US">
+              <a:latin typeface="Times New Roman" panose="02020603050405020304" pitchFamily="18" charset="0"/>
+              <a:cs typeface="Times New Roman" panose="02020603050405020304" pitchFamily="18" charset="0"/>
+            </a:endParaRPr>
+          </a:p>
+        </p:txBody>
       </p:sp>
       <p:sp>
         <p:nvSpPr>
           <p:cNvPr id="40" name="time number circle">
-            <a:extLst xmlns:a="http://schemas.openxmlformats.org/drawingml/2006/main">
+            <a:extLst>
               <a:ext uri="{FF2B5EF4-FFF2-40B4-BE49-F238E27FC236}">
                 <a16:creationId xmlns:a16="http://schemas.microsoft.com/office/drawing/2014/main" id="{586596DC-9F9E-4B32-8F73-9133D520CE46}"/>
               </a:ext>
             </a:extLst>
           </p:cNvPr>
           <p:cNvSpPr>
-            <a:spLocks xmlns:a="http://schemas.openxmlformats.org/drawingml/2006/main" noGrp="1"/>
+            <a:spLocks noGrp="1"/>
           </p:cNvSpPr>
           <p:nvPr/>
         </p:nvSpPr>
         <p:spPr>
-          <a:xfrm xmlns:a="http://schemas.openxmlformats.org/drawingml/2006/main">
+          <a:xfrm>
             <a:off x="13201650" y="3114675"/>
             <a:ext cx="762000" cy="762000"/>
           </a:xfrm>
-          <a:prstGeom xmlns:a="http://schemas.openxmlformats.org/drawingml/2006/main" prst="ellipse">
+          <a:prstGeom prst="ellipse">
             <a:avLst/>
           </a:prstGeom>
-          <a:solidFill xmlns:a="http://schemas.openxmlformats.org/drawingml/2006/main">
+          <a:solidFill>
             <a:srgbClr val="F6E9EB"/>
           </a:solidFill>
-          <a:ln xmlns:a="http://schemas.openxmlformats.org/drawingml/2006/main" w="0">
+          <a:ln w="0">
             <a:noFill/>
             <a:prstDash val="solid"/>
           </a:ln>
         </p:spPr>
+        <p:txBody>
+          <a:bodyPr/>
+          <a:lstStyle/>
+          <a:p>
+            <a:endParaRPr lang="en-US">
+              <a:latin typeface="Times New Roman" panose="02020603050405020304" pitchFamily="18" charset="0"/>
+              <a:cs typeface="Times New Roman" panose="02020603050405020304" pitchFamily="18" charset="0"/>
+            </a:endParaRPr>
+          </a:p>
+        </p:txBody>
       </p:sp>
       <p:sp>
         <p:nvSpPr>
           <p:cNvPr id="41" name="time number">
-            <a:extLst xmlns:a="http://schemas.openxmlformats.org/drawingml/2006/main">
+            <a:extLst>
               <a:ext uri="{FF2B5EF4-FFF2-40B4-BE49-F238E27FC236}">
                 <a16:creationId xmlns:a16="http://schemas.microsoft.com/office/drawing/2014/main" id="{C95A0BD0-1521-40D9-B842-040D26A1340B}"/>
               </a:ext>
             </a:extLst>
           </p:cNvPr>
           <p:cNvSpPr>
-            <a:spLocks xmlns:a="http://schemas.openxmlformats.org/drawingml/2006/main" noGrp="1"/>
+            <a:spLocks noGrp="1"/>
           </p:cNvSpPr>
           <p:nvPr/>
         </p:nvSpPr>
         <p:spPr>
-          <a:xfrm xmlns:a="http://schemas.openxmlformats.org/drawingml/2006/main">
+          <a:xfrm>
             <a:off x="13401675" y="3181350"/>
             <a:ext cx="352425" cy="609600"/>
           </a:xfrm>
-          <a:prstGeom xmlns:a="http://schemas.openxmlformats.org/drawingml/2006/main" prst="rect">
+          <a:prstGeom prst="rect">
             <a:avLst/>
           </a:prstGeom>
-          <a:noFill xmlns:a="http://schemas.openxmlformats.org/drawingml/2006/main"/>
-          <a:ln xmlns:a="http://schemas.openxmlformats.org/drawingml/2006/main" w="0">
+          <a:noFill/>
+          <a:ln w="0">
             <a:noFill/>
             <a:prstDash val="solid"/>
           </a:ln>
         </p:spPr>
         <p:txBody>
-          <a:bodyPr xmlns:a="http://schemas.openxmlformats.org/drawingml/2006/main" wrap="square" lIns="0" tIns="0" rIns="0" bIns="0" anchor="ctr">
+          <a:bodyPr wrap="square" lIns="0" tIns="0" rIns="0" bIns="0" anchor="ctr">
             <a:noAutofit/>
           </a:bodyPr>
-          <a:lstStyle xmlns:a="http://schemas.openxmlformats.org/drawingml/2006/main">
+          <a:lstStyle>
             <a:defPPr algn="ctr">
               <a:defRPr sz="2700" b="1" i="0">
                 <a:solidFill>
@@ -8396,7 +8221,7 @@
               </a:defRPr>
             </a:lvl9pPr>
           </a:lstStyle>
-          <a:p xmlns:a="http://schemas.openxmlformats.org/drawingml/2006/main">
+          <a:p>
             <a:pPr algn="ctr">
               <a:lnSpc>
                 <a:spcPct val="102000"/>
@@ -8416,9 +8241,8 @@
                 <a:solidFill>
                   <a:srgbClr val="643545"/>
                 </a:solidFill>
-                <a:latin typeface="Nimbus Sans"/>
-                <a:ea typeface="Nimbus Sans"/>
-                <a:cs typeface="Nimbus Sans"/>
+                <a:latin typeface="Times New Roman" panose="02020603050405020304" pitchFamily="18" charset="0"/>
+                <a:cs typeface="Times New Roman" panose="02020603050405020304" pitchFamily="18" charset="0"/>
               </a:rPr>
               <a:t>3</a:t>
             </a:r>
@@ -8428,36 +8252,36 @@
       <p:sp>
         <p:nvSpPr>
           <p:cNvPr id="42" name="time title">
-            <a:extLst xmlns:a="http://schemas.openxmlformats.org/drawingml/2006/main">
+            <a:extLst>
               <a:ext uri="{FF2B5EF4-FFF2-40B4-BE49-F238E27FC236}">
                 <a16:creationId xmlns:a16="http://schemas.microsoft.com/office/drawing/2014/main" id="{421464A8-BEB0-473E-A46C-28F4AD237189}"/>
               </a:ext>
             </a:extLst>
           </p:cNvPr>
           <p:cNvSpPr>
-            <a:spLocks xmlns:a="http://schemas.openxmlformats.org/drawingml/2006/main" noGrp="1"/>
+            <a:spLocks noGrp="1"/>
           </p:cNvSpPr>
           <p:nvPr/>
         </p:nvSpPr>
         <p:spPr>
-          <a:xfrm xmlns:a="http://schemas.openxmlformats.org/drawingml/2006/main">
+          <a:xfrm>
             <a:off x="14230350" y="3267075"/>
             <a:ext cx="4305300" cy="628650"/>
           </a:xfrm>
-          <a:prstGeom xmlns:a="http://schemas.openxmlformats.org/drawingml/2006/main" prst="rect">
+          <a:prstGeom prst="rect">
             <a:avLst/>
           </a:prstGeom>
-          <a:noFill xmlns:a="http://schemas.openxmlformats.org/drawingml/2006/main"/>
-          <a:ln xmlns:a="http://schemas.openxmlformats.org/drawingml/2006/main" w="0">
+          <a:noFill/>
+          <a:ln w="0">
             <a:noFill/>
             <a:prstDash val="solid"/>
           </a:ln>
         </p:spPr>
         <p:txBody>
-          <a:bodyPr xmlns:a="http://schemas.openxmlformats.org/drawingml/2006/main" wrap="square" lIns="0" tIns="0" rIns="0" bIns="0" anchor="ctr">
+          <a:bodyPr wrap="square" lIns="0" tIns="0" rIns="0" bIns="0" anchor="ctr">
             <a:noAutofit/>
           </a:bodyPr>
-          <a:lstStyle xmlns:a="http://schemas.openxmlformats.org/drawingml/2006/main">
+          <a:lstStyle>
             <a:defPPr algn="l">
               <a:defRPr sz="2700" b="1" i="0">
                 <a:solidFill>
@@ -8559,7 +8383,7 @@
               </a:defRPr>
             </a:lvl9pPr>
           </a:lstStyle>
-          <a:p xmlns:a="http://schemas.openxmlformats.org/drawingml/2006/main">
+          <a:p>
             <a:pPr algn="l">
               <a:lnSpc>
                 <a:spcPct val="102000"/>
@@ -8579,9 +8403,8 @@
                 <a:solidFill>
                   <a:srgbClr val="643545"/>
                 </a:solidFill>
-                <a:latin typeface="Nimbus Sans"/>
-                <a:ea typeface="Nimbus Sans"/>
-                <a:cs typeface="Nimbus Sans"/>
+                <a:latin typeface="Times New Roman" panose="02020603050405020304" pitchFamily="18" charset="0"/>
+                <a:cs typeface="Times New Roman" panose="02020603050405020304" pitchFamily="18" charset="0"/>
               </a:rPr>
               <a:t>SAVE TIME</a:t>
             </a:r>
@@ -8591,36 +8414,36 @@
       <p:sp>
         <p:nvSpPr>
           <p:cNvPr id="43" name="time problem">
-            <a:extLst xmlns:a="http://schemas.openxmlformats.org/drawingml/2006/main">
+            <a:extLst>
               <a:ext uri="{FF2B5EF4-FFF2-40B4-BE49-F238E27FC236}">
                 <a16:creationId xmlns:a16="http://schemas.microsoft.com/office/drawing/2014/main" id="{E3DD91E5-E408-490E-98BC-D749461452FB}"/>
               </a:ext>
             </a:extLst>
           </p:cNvPr>
           <p:cNvSpPr>
-            <a:spLocks xmlns:a="http://schemas.openxmlformats.org/drawingml/2006/main" noGrp="1"/>
+            <a:spLocks noGrp="1"/>
           </p:cNvSpPr>
           <p:nvPr/>
         </p:nvSpPr>
         <p:spPr>
-          <a:xfrm xmlns:a="http://schemas.openxmlformats.org/drawingml/2006/main">
+          <a:xfrm>
             <a:off x="13344525" y="4276725"/>
             <a:ext cx="4953000" cy="876300"/>
           </a:xfrm>
-          <a:prstGeom xmlns:a="http://schemas.openxmlformats.org/drawingml/2006/main" prst="rect">
+          <a:prstGeom prst="rect">
             <a:avLst/>
           </a:prstGeom>
-          <a:noFill xmlns:a="http://schemas.openxmlformats.org/drawingml/2006/main"/>
-          <a:ln xmlns:a="http://schemas.openxmlformats.org/drawingml/2006/main" w="0">
+          <a:noFill/>
+          <a:ln w="0">
             <a:noFill/>
             <a:prstDash val="solid"/>
           </a:ln>
         </p:spPr>
         <p:txBody>
-          <a:bodyPr xmlns:a="http://schemas.openxmlformats.org/drawingml/2006/main" wrap="square" lIns="0" tIns="0" rIns="0" bIns="0" anchor="ctr">
+          <a:bodyPr wrap="square" lIns="0" tIns="0" rIns="0" bIns="0" anchor="ctr">
             <a:noAutofit/>
           </a:bodyPr>
-          <a:lstStyle xmlns:a="http://schemas.openxmlformats.org/drawingml/2006/main">
+          <a:lstStyle>
             <a:defPPr algn="l">
               <a:defRPr sz="2033" b="0" i="0">
                 <a:solidFill>
@@ -8722,7 +8545,7 @@
               </a:defRPr>
             </a:lvl9pPr>
           </a:lstStyle>
-          <a:p xmlns:a="http://schemas.openxmlformats.org/drawingml/2006/main">
+          <a:p>
             <a:pPr algn="l">
               <a:lnSpc>
                 <a:spcPct val="106000"/>
@@ -8742,9 +8565,8 @@
                 <a:solidFill>
                   <a:srgbClr val="27333B"/>
                 </a:solidFill>
-                <a:latin typeface="Nimbus Sans"/>
-                <a:ea typeface="Nimbus Sans"/>
-                <a:cs typeface="Nimbus Sans"/>
+                <a:latin typeface="Times New Roman" panose="02020603050405020304" pitchFamily="18" charset="0"/>
+                <a:cs typeface="Times New Roman" panose="02020603050405020304" pitchFamily="18" charset="0"/>
               </a:rPr>
               <a:t>Repeated checking and trial and error turn simple tasks into extra work.</a:t>
             </a:r>
@@ -8754,36 +8576,36 @@
       <p:sp>
         <p:nvSpPr>
           <p:cNvPr id="44" name="time response">
-            <a:extLst xmlns:a="http://schemas.openxmlformats.org/drawingml/2006/main">
+            <a:extLst>
               <a:ext uri="{FF2B5EF4-FFF2-40B4-BE49-F238E27FC236}">
                 <a16:creationId xmlns:a16="http://schemas.microsoft.com/office/drawing/2014/main" id="{1A1D9D2F-F990-4051-9729-1A59BE63BD51}"/>
               </a:ext>
             </a:extLst>
           </p:cNvPr>
           <p:cNvSpPr>
-            <a:spLocks xmlns:a="http://schemas.openxmlformats.org/drawingml/2006/main" noGrp="1"/>
+            <a:spLocks noGrp="1"/>
           </p:cNvSpPr>
           <p:nvPr/>
         </p:nvSpPr>
         <p:spPr>
-          <a:xfrm xmlns:a="http://schemas.openxmlformats.org/drawingml/2006/main">
+          <a:xfrm>
             <a:off x="13344525" y="5372100"/>
             <a:ext cx="5067300" cy="552450"/>
           </a:xfrm>
-          <a:prstGeom xmlns:a="http://schemas.openxmlformats.org/drawingml/2006/main" prst="rect">
+          <a:prstGeom prst="rect">
             <a:avLst/>
           </a:prstGeom>
-          <a:noFill xmlns:a="http://schemas.openxmlformats.org/drawingml/2006/main"/>
-          <a:ln xmlns:a="http://schemas.openxmlformats.org/drawingml/2006/main" w="0">
+          <a:noFill/>
+          <a:ln w="0">
             <a:noFill/>
             <a:prstDash val="solid"/>
           </a:ln>
         </p:spPr>
         <p:txBody>
-          <a:bodyPr xmlns:a="http://schemas.openxmlformats.org/drawingml/2006/main" wrap="square" lIns="0" tIns="0" rIns="0" bIns="0" anchor="ctr">
+          <a:bodyPr wrap="square" lIns="0" tIns="0" rIns="0" bIns="0" anchor="ctr">
             <a:noAutofit/>
           </a:bodyPr>
-          <a:lstStyle xmlns:a="http://schemas.openxmlformats.org/drawingml/2006/main">
+          <a:lstStyle>
             <a:defPPr algn="l">
               <a:defRPr sz="1665" b="1" i="0">
                 <a:solidFill>
@@ -8885,7 +8707,7 @@
               </a:defRPr>
             </a:lvl9pPr>
           </a:lstStyle>
-          <a:p xmlns:a="http://schemas.openxmlformats.org/drawingml/2006/main">
+          <a:p>
             <a:pPr algn="l">
               <a:lnSpc>
                 <a:spcPct val="102000"/>
@@ -8905,9 +8727,8 @@
                 <a:solidFill>
                   <a:srgbClr val="206E65"/>
                 </a:solidFill>
-                <a:latin typeface="Nimbus Sans"/>
-                <a:ea typeface="Nimbus Sans"/>
-                <a:cs typeface="Nimbus Sans"/>
+                <a:latin typeface="Times New Roman" panose="02020603050405020304" pitchFamily="18" charset="0"/>
+                <a:cs typeface="Times New Roman" panose="02020603050405020304" pitchFamily="18" charset="0"/>
               </a:rPr>
               <a:t>→ Fewer repetitive steps and avoidable checks</a:t>
             </a:r>
@@ -8917,36 +8738,36 @@
       <p:sp>
         <p:nvSpPr>
           <p:cNvPr id="45" name="time student label">
-            <a:extLst xmlns:a="http://schemas.openxmlformats.org/drawingml/2006/main">
+            <a:extLst>
               <a:ext uri="{FF2B5EF4-FFF2-40B4-BE49-F238E27FC236}">
                 <a16:creationId xmlns:a16="http://schemas.microsoft.com/office/drawing/2014/main" id="{BC21DAFB-B1D5-43B3-A599-41E0F1939B44}"/>
               </a:ext>
             </a:extLst>
           </p:cNvPr>
           <p:cNvSpPr>
-            <a:spLocks xmlns:a="http://schemas.openxmlformats.org/drawingml/2006/main" noGrp="1"/>
+            <a:spLocks noGrp="1"/>
           </p:cNvSpPr>
           <p:nvPr/>
         </p:nvSpPr>
         <p:spPr>
-          <a:xfrm xmlns:a="http://schemas.openxmlformats.org/drawingml/2006/main">
+          <a:xfrm>
             <a:off x="13344525" y="6048375"/>
             <a:ext cx="4953000" cy="295275"/>
           </a:xfrm>
-          <a:prstGeom xmlns:a="http://schemas.openxmlformats.org/drawingml/2006/main" prst="rect">
+          <a:prstGeom prst="rect">
             <a:avLst/>
           </a:prstGeom>
-          <a:noFill xmlns:a="http://schemas.openxmlformats.org/drawingml/2006/main"/>
-          <a:ln xmlns:a="http://schemas.openxmlformats.org/drawingml/2006/main" w="0">
+          <a:noFill/>
+          <a:ln w="0">
             <a:noFill/>
             <a:prstDash val="solid"/>
           </a:ln>
         </p:spPr>
         <p:txBody>
-          <a:bodyPr xmlns:a="http://schemas.openxmlformats.org/drawingml/2006/main" wrap="square" lIns="0" tIns="0" rIns="0" bIns="0" anchor="ctr">
+          <a:bodyPr wrap="square" lIns="0" tIns="0" rIns="0" bIns="0" anchor="ctr">
             <a:noAutofit/>
           </a:bodyPr>
-          <a:lstStyle xmlns:a="http://schemas.openxmlformats.org/drawingml/2006/main">
+          <a:lstStyle>
             <a:defPPr algn="l">
               <a:defRPr sz="1350" b="1" i="0">
                 <a:solidFill>
@@ -9048,7 +8869,7 @@
               </a:defRPr>
             </a:lvl9pPr>
           </a:lstStyle>
-          <a:p xmlns:a="http://schemas.openxmlformats.org/drawingml/2006/main">
+          <a:p>
             <a:pPr algn="l">
               <a:lnSpc>
                 <a:spcPct val="102000"/>
@@ -9068,9 +8889,8 @@
                 <a:solidFill>
                   <a:srgbClr val="643545"/>
                 </a:solidFill>
-                <a:latin typeface="Nimbus Sans"/>
-                <a:ea typeface="Nimbus Sans"/>
-                <a:cs typeface="Nimbus Sans"/>
+                <a:latin typeface="Times New Roman" panose="02020603050405020304" pitchFamily="18" charset="0"/>
+                <a:cs typeface="Times New Roman" panose="02020603050405020304" pitchFamily="18" charset="0"/>
               </a:rPr>
               <a:t>STUDENTS SAY</a:t>
             </a:r>
@@ -9080,69 +8900,79 @@
       <p:sp>
         <p:nvSpPr>
           <p:cNvPr id="46" name="time quote background 1">
-            <a:extLst xmlns:a="http://schemas.openxmlformats.org/drawingml/2006/main">
+            <a:extLst>
               <a:ext uri="{FF2B5EF4-FFF2-40B4-BE49-F238E27FC236}">
                 <a16:creationId xmlns:a16="http://schemas.microsoft.com/office/drawing/2014/main" id="{3868A705-6C47-4D5B-9DD7-42D93A246D05}"/>
               </a:ext>
             </a:extLst>
           </p:cNvPr>
           <p:cNvSpPr>
-            <a:spLocks xmlns:a="http://schemas.openxmlformats.org/drawingml/2006/main" noGrp="1"/>
+            <a:spLocks noGrp="1"/>
           </p:cNvSpPr>
           <p:nvPr/>
         </p:nvSpPr>
         <p:spPr>
-          <a:xfrm xmlns:a="http://schemas.openxmlformats.org/drawingml/2006/main">
+          <a:xfrm>
             <a:off x="13344525" y="6419850"/>
             <a:ext cx="4876800" cy="838200"/>
           </a:xfrm>
-          <a:prstGeom xmlns:a="http://schemas.openxmlformats.org/drawingml/2006/main" prst="roundRect">
+          <a:prstGeom prst="roundRect">
             <a:avLst>
               <a:gd name="adj" fmla="val 17045"/>
             </a:avLst>
           </a:prstGeom>
-          <a:solidFill xmlns:a="http://schemas.openxmlformats.org/drawingml/2006/main">
+          <a:solidFill>
             <a:srgbClr val="F1EBE5"/>
           </a:solidFill>
-          <a:ln xmlns:a="http://schemas.openxmlformats.org/drawingml/2006/main" w="0">
+          <a:ln w="0">
             <a:noFill/>
             <a:prstDash val="solid"/>
           </a:ln>
         </p:spPr>
+        <p:txBody>
+          <a:bodyPr/>
+          <a:lstStyle/>
+          <a:p>
+            <a:endParaRPr lang="en-US">
+              <a:latin typeface="Times New Roman" panose="02020603050405020304" pitchFamily="18" charset="0"/>
+              <a:cs typeface="Times New Roman" panose="02020603050405020304" pitchFamily="18" charset="0"/>
+            </a:endParaRPr>
+          </a:p>
+        </p:txBody>
       </p:sp>
       <p:sp>
         <p:nvSpPr>
           <p:cNvPr id="47" name="time quote 1">
-            <a:extLst xmlns:a="http://schemas.openxmlformats.org/drawingml/2006/main">
+            <a:extLst>
               <a:ext uri="{FF2B5EF4-FFF2-40B4-BE49-F238E27FC236}">
                 <a16:creationId xmlns:a16="http://schemas.microsoft.com/office/drawing/2014/main" id="{F7D4BA8C-60A6-4420-91A5-D3D1C9ABE9AF}"/>
               </a:ext>
             </a:extLst>
           </p:cNvPr>
           <p:cNvSpPr>
-            <a:spLocks xmlns:a="http://schemas.openxmlformats.org/drawingml/2006/main" noGrp="1"/>
+            <a:spLocks noGrp="1"/>
           </p:cNvSpPr>
           <p:nvPr/>
         </p:nvSpPr>
         <p:spPr>
-          <a:xfrm xmlns:a="http://schemas.openxmlformats.org/drawingml/2006/main">
+          <a:xfrm>
             <a:off x="13506450" y="6486525"/>
             <a:ext cx="4543425" cy="628650"/>
           </a:xfrm>
-          <a:prstGeom xmlns:a="http://schemas.openxmlformats.org/drawingml/2006/main" prst="rect">
+          <a:prstGeom prst="rect">
             <a:avLst/>
           </a:prstGeom>
-          <a:noFill xmlns:a="http://schemas.openxmlformats.org/drawingml/2006/main"/>
-          <a:ln xmlns:a="http://schemas.openxmlformats.org/drawingml/2006/main" w="0">
+          <a:noFill/>
+          <a:ln w="0">
             <a:noFill/>
             <a:prstDash val="solid"/>
           </a:ln>
         </p:spPr>
         <p:txBody>
-          <a:bodyPr xmlns:a="http://schemas.openxmlformats.org/drawingml/2006/main" wrap="square" lIns="0" tIns="0" rIns="0" bIns="0" anchor="ctr">
+          <a:bodyPr wrap="square" lIns="0" tIns="0" rIns="0" bIns="0" anchor="ctr">
             <a:noAutofit/>
           </a:bodyPr>
-          <a:lstStyle xmlns:a="http://schemas.openxmlformats.org/drawingml/2006/main">
+          <a:lstStyle>
             <a:defPPr algn="l">
               <a:defRPr sz="1538" b="0" i="1">
                 <a:solidFill>
@@ -9244,7 +9074,7 @@
               </a:defRPr>
             </a:lvl9pPr>
           </a:lstStyle>
-          <a:p xmlns:a="http://schemas.openxmlformats.org/drawingml/2006/main">
+          <a:p>
             <a:pPr algn="l">
               <a:lnSpc>
                 <a:spcPct val="101000"/>
@@ -9264,9 +9094,8 @@
                 <a:solidFill>
                   <a:srgbClr val="27333B"/>
                 </a:solidFill>
-                <a:latin typeface="Nimbus Sans"/>
-                <a:ea typeface="Nimbus Sans"/>
-                <a:cs typeface="Nimbus Sans"/>
+                <a:latin typeface="Times New Roman" panose="02020603050405020304" pitchFamily="18" charset="0"/>
+                <a:cs typeface="Times New Roman" panose="02020603050405020304" pitchFamily="18" charset="0"/>
               </a:rPr>
               <a:t>“To book a Lindemann room, I test each possible hour in Google Calendar one by one.”</a:t>
             </a:r>
@@ -9276,36 +9105,36 @@
       <p:sp>
         <p:nvSpPr>
           <p:cNvPr id="48" name="time segment 1">
-            <a:extLst xmlns:a="http://schemas.openxmlformats.org/drawingml/2006/main">
+            <a:extLst>
               <a:ext uri="{FF2B5EF4-FFF2-40B4-BE49-F238E27FC236}">
                 <a16:creationId xmlns:a16="http://schemas.microsoft.com/office/drawing/2014/main" id="{460234C9-E55A-4DA3-90D8-9FD7FBB08D0A}"/>
               </a:ext>
             </a:extLst>
           </p:cNvPr>
           <p:cNvSpPr>
-            <a:spLocks xmlns:a="http://schemas.openxmlformats.org/drawingml/2006/main" noGrp="1"/>
+            <a:spLocks noGrp="1"/>
           </p:cNvSpPr>
           <p:nvPr/>
         </p:nvSpPr>
         <p:spPr>
-          <a:xfrm xmlns:a="http://schemas.openxmlformats.org/drawingml/2006/main">
+          <a:xfrm>
             <a:off x="16802100" y="7058025"/>
             <a:ext cx="1238250" cy="161925"/>
           </a:xfrm>
-          <a:prstGeom xmlns:a="http://schemas.openxmlformats.org/drawingml/2006/main" prst="rect">
+          <a:prstGeom prst="rect">
             <a:avLst/>
           </a:prstGeom>
-          <a:noFill xmlns:a="http://schemas.openxmlformats.org/drawingml/2006/main"/>
-          <a:ln xmlns:a="http://schemas.openxmlformats.org/drawingml/2006/main" w="0">
+          <a:noFill/>
+          <a:ln w="0">
             <a:noFill/>
             <a:prstDash val="solid"/>
           </a:ln>
         </p:spPr>
         <p:txBody>
-          <a:bodyPr xmlns:a="http://schemas.openxmlformats.org/drawingml/2006/main" wrap="square" lIns="0" tIns="0" rIns="0" bIns="0" anchor="ctr">
+          <a:bodyPr wrap="square" lIns="0" tIns="0" rIns="0" bIns="0" anchor="ctr">
             <a:noAutofit/>
           </a:bodyPr>
-          <a:lstStyle xmlns:a="http://schemas.openxmlformats.org/drawingml/2006/main">
+          <a:lstStyle>
             <a:defPPr algn="r">
               <a:defRPr sz="1035" b="1" i="0">
                 <a:solidFill>
@@ -9407,7 +9236,7 @@
               </a:defRPr>
             </a:lvl9pPr>
           </a:lstStyle>
-          <a:p xmlns:a="http://schemas.openxmlformats.org/drawingml/2006/main">
+          <a:p>
             <a:pPr algn="r">
               <a:lnSpc>
                 <a:spcPct val="102000"/>
@@ -9427,9 +9256,8 @@
                 <a:solidFill>
                   <a:srgbClr val="62717A"/>
                 </a:solidFill>
-                <a:latin typeface="Nimbus Sans"/>
-                <a:ea typeface="Nimbus Sans"/>
-                <a:cs typeface="Nimbus Sans"/>
+                <a:latin typeface="Times New Roman" panose="02020603050405020304" pitchFamily="18" charset="0"/>
+                <a:cs typeface="Times New Roman" panose="02020603050405020304" pitchFamily="18" charset="0"/>
               </a:rPr>
               <a:t>P04_M020</a:t>
             </a:r>
@@ -9439,69 +9267,79 @@
       <p:sp>
         <p:nvSpPr>
           <p:cNvPr id="49" name="time quote background 2">
-            <a:extLst xmlns:a="http://schemas.openxmlformats.org/drawingml/2006/main">
+            <a:extLst>
               <a:ext uri="{FF2B5EF4-FFF2-40B4-BE49-F238E27FC236}">
                 <a16:creationId xmlns:a16="http://schemas.microsoft.com/office/drawing/2014/main" id="{7BD14C0C-51BF-4C3B-BD06-71965A80DC23}"/>
               </a:ext>
             </a:extLst>
           </p:cNvPr>
           <p:cNvSpPr>
-            <a:spLocks xmlns:a="http://schemas.openxmlformats.org/drawingml/2006/main" noGrp="1"/>
+            <a:spLocks noGrp="1"/>
           </p:cNvSpPr>
           <p:nvPr/>
         </p:nvSpPr>
         <p:spPr>
-          <a:xfrm xmlns:a="http://schemas.openxmlformats.org/drawingml/2006/main">
+          <a:xfrm>
             <a:off x="13344525" y="7362825"/>
             <a:ext cx="4876800" cy="838200"/>
           </a:xfrm>
-          <a:prstGeom xmlns:a="http://schemas.openxmlformats.org/drawingml/2006/main" prst="roundRect">
+          <a:prstGeom prst="roundRect">
             <a:avLst>
               <a:gd name="adj" fmla="val 17045"/>
             </a:avLst>
           </a:prstGeom>
-          <a:solidFill xmlns:a="http://schemas.openxmlformats.org/drawingml/2006/main">
+          <a:solidFill>
             <a:srgbClr val="FCF0EC"/>
           </a:solidFill>
-          <a:ln xmlns:a="http://schemas.openxmlformats.org/drawingml/2006/main" w="0">
+          <a:ln w="0">
             <a:noFill/>
             <a:prstDash val="solid"/>
           </a:ln>
         </p:spPr>
+        <p:txBody>
+          <a:bodyPr/>
+          <a:lstStyle/>
+          <a:p>
+            <a:endParaRPr lang="en-US">
+              <a:latin typeface="Times New Roman" panose="02020603050405020304" pitchFamily="18" charset="0"/>
+              <a:cs typeface="Times New Roman" panose="02020603050405020304" pitchFamily="18" charset="0"/>
+            </a:endParaRPr>
+          </a:p>
+        </p:txBody>
       </p:sp>
       <p:sp>
         <p:nvSpPr>
           <p:cNvPr id="50" name="time quote 2">
-            <a:extLst xmlns:a="http://schemas.openxmlformats.org/drawingml/2006/main">
+            <a:extLst>
               <a:ext uri="{FF2B5EF4-FFF2-40B4-BE49-F238E27FC236}">
                 <a16:creationId xmlns:a16="http://schemas.microsoft.com/office/drawing/2014/main" id="{A198AC6F-9304-4BDA-9DCB-13782FA9574F}"/>
               </a:ext>
             </a:extLst>
           </p:cNvPr>
           <p:cNvSpPr>
-            <a:spLocks xmlns:a="http://schemas.openxmlformats.org/drawingml/2006/main" noGrp="1"/>
+            <a:spLocks noGrp="1"/>
           </p:cNvSpPr>
           <p:nvPr/>
         </p:nvSpPr>
         <p:spPr>
-          <a:xfrm xmlns:a="http://schemas.openxmlformats.org/drawingml/2006/main">
+          <a:xfrm>
             <a:off x="13506450" y="7429500"/>
             <a:ext cx="4543425" cy="628650"/>
           </a:xfrm>
-          <a:prstGeom xmlns:a="http://schemas.openxmlformats.org/drawingml/2006/main" prst="rect">
+          <a:prstGeom prst="rect">
             <a:avLst/>
           </a:prstGeom>
-          <a:noFill xmlns:a="http://schemas.openxmlformats.org/drawingml/2006/main"/>
-          <a:ln xmlns:a="http://schemas.openxmlformats.org/drawingml/2006/main" w="0">
+          <a:noFill/>
+          <a:ln w="0">
             <a:noFill/>
             <a:prstDash val="solid"/>
           </a:ln>
         </p:spPr>
         <p:txBody>
-          <a:bodyPr xmlns:a="http://schemas.openxmlformats.org/drawingml/2006/main" wrap="square" lIns="0" tIns="0" rIns="0" bIns="0" anchor="ctr">
+          <a:bodyPr wrap="square" lIns="0" tIns="0" rIns="0" bIns="0" anchor="ctr">
             <a:noAutofit/>
           </a:bodyPr>
-          <a:lstStyle xmlns:a="http://schemas.openxmlformats.org/drawingml/2006/main">
+          <a:lstStyle>
             <a:defPPr algn="l">
               <a:defRPr sz="1538" b="0" i="1">
                 <a:solidFill>
@@ -9603,7 +9441,7 @@
               </a:defRPr>
             </a:lvl9pPr>
           </a:lstStyle>
-          <a:p xmlns:a="http://schemas.openxmlformats.org/drawingml/2006/main">
+          <a:p>
             <a:pPr algn="l">
               <a:lnSpc>
                 <a:spcPct val="101000"/>
@@ -9623,9 +9461,8 @@
                 <a:solidFill>
                   <a:srgbClr val="27333B"/>
                 </a:solidFill>
-                <a:latin typeface="Nimbus Sans"/>
-                <a:ea typeface="Nimbus Sans"/>
-                <a:cs typeface="Nimbus Sans"/>
+                <a:latin typeface="Times New Roman" panose="02020603050405020304" pitchFamily="18" charset="0"/>
+                <a:cs typeface="Times New Roman" panose="02020603050405020304" pitchFamily="18" charset="0"/>
               </a:rPr>
               <a:t>“Checking ingredients for every dish gets tedious. I want suitable meals highlighted automatically.”</a:t>
             </a:r>
@@ -9635,36 +9472,36 @@
       <p:sp>
         <p:nvSpPr>
           <p:cNvPr id="51" name="time segment 2">
-            <a:extLst xmlns:a="http://schemas.openxmlformats.org/drawingml/2006/main">
+            <a:extLst>
               <a:ext uri="{FF2B5EF4-FFF2-40B4-BE49-F238E27FC236}">
                 <a16:creationId xmlns:a16="http://schemas.microsoft.com/office/drawing/2014/main" id="{286E235D-21CD-4D8B-B71C-C1D4DA83C4C5}"/>
               </a:ext>
             </a:extLst>
           </p:cNvPr>
           <p:cNvSpPr>
-            <a:spLocks xmlns:a="http://schemas.openxmlformats.org/drawingml/2006/main" noGrp="1"/>
+            <a:spLocks noGrp="1"/>
           </p:cNvSpPr>
           <p:nvPr/>
         </p:nvSpPr>
         <p:spPr>
-          <a:xfrm xmlns:a="http://schemas.openxmlformats.org/drawingml/2006/main">
+          <a:xfrm>
             <a:off x="16802100" y="8001000"/>
             <a:ext cx="1238250" cy="161925"/>
           </a:xfrm>
-          <a:prstGeom xmlns:a="http://schemas.openxmlformats.org/drawingml/2006/main" prst="rect">
+          <a:prstGeom prst="rect">
             <a:avLst/>
           </a:prstGeom>
-          <a:noFill xmlns:a="http://schemas.openxmlformats.org/drawingml/2006/main"/>
-          <a:ln xmlns:a="http://schemas.openxmlformats.org/drawingml/2006/main" w="0">
+          <a:noFill/>
+          <a:ln w="0">
             <a:noFill/>
             <a:prstDash val="solid"/>
           </a:ln>
         </p:spPr>
         <p:txBody>
-          <a:bodyPr xmlns:a="http://schemas.openxmlformats.org/drawingml/2006/main" wrap="square" lIns="0" tIns="0" rIns="0" bIns="0" anchor="ctr">
+          <a:bodyPr wrap="square" lIns="0" tIns="0" rIns="0" bIns="0" anchor="ctr">
             <a:noAutofit/>
           </a:bodyPr>
-          <a:lstStyle xmlns:a="http://schemas.openxmlformats.org/drawingml/2006/main">
+          <a:lstStyle>
             <a:defPPr algn="r">
               <a:defRPr sz="1035" b="1" i="0">
                 <a:solidFill>
@@ -9766,7 +9603,7 @@
               </a:defRPr>
             </a:lvl9pPr>
           </a:lstStyle>
-          <a:p xmlns:a="http://schemas.openxmlformats.org/drawingml/2006/main">
+          <a:p>
             <a:pPr algn="r">
               <a:lnSpc>
                 <a:spcPct val="102000"/>
@@ -9786,9 +9623,8 @@
                 <a:solidFill>
                   <a:srgbClr val="62717A"/>
                 </a:solidFill>
-                <a:latin typeface="Nimbus Sans"/>
-                <a:ea typeface="Nimbus Sans"/>
-                <a:cs typeface="Nimbus Sans"/>
+                <a:latin typeface="Times New Roman" panose="02020603050405020304" pitchFamily="18" charset="0"/>
+                <a:cs typeface="Times New Roman" panose="02020603050405020304" pitchFamily="18" charset="0"/>
               </a:rPr>
               <a:t>P06_M022</a:t>
             </a:r>
@@ -9798,69 +9634,79 @@
       <p:sp>
         <p:nvSpPr>
           <p:cNvPr id="52" name="time quote background 3">
-            <a:extLst xmlns:a="http://schemas.openxmlformats.org/drawingml/2006/main">
+            <a:extLst>
               <a:ext uri="{FF2B5EF4-FFF2-40B4-BE49-F238E27FC236}">
                 <a16:creationId xmlns:a16="http://schemas.microsoft.com/office/drawing/2014/main" id="{41876358-9F4E-458C-B677-A7ECFFBE2A2F}"/>
               </a:ext>
             </a:extLst>
           </p:cNvPr>
           <p:cNvSpPr>
-            <a:spLocks xmlns:a="http://schemas.openxmlformats.org/drawingml/2006/main" noGrp="1"/>
+            <a:spLocks noGrp="1"/>
           </p:cNvSpPr>
           <p:nvPr/>
         </p:nvSpPr>
         <p:spPr>
-          <a:xfrm xmlns:a="http://schemas.openxmlformats.org/drawingml/2006/main">
+          <a:xfrm>
             <a:off x="13344525" y="8305800"/>
             <a:ext cx="4876800" cy="838200"/>
           </a:xfrm>
-          <a:prstGeom xmlns:a="http://schemas.openxmlformats.org/drawingml/2006/main" prst="roundRect">
+          <a:prstGeom prst="roundRect">
             <a:avLst>
               <a:gd name="adj" fmla="val 17045"/>
             </a:avLst>
           </a:prstGeom>
-          <a:solidFill xmlns:a="http://schemas.openxmlformats.org/drawingml/2006/main">
+          <a:solidFill>
             <a:srgbClr val="F1EBE5"/>
           </a:solidFill>
-          <a:ln xmlns:a="http://schemas.openxmlformats.org/drawingml/2006/main" w="0">
+          <a:ln w="0">
             <a:noFill/>
             <a:prstDash val="solid"/>
           </a:ln>
         </p:spPr>
+        <p:txBody>
+          <a:bodyPr/>
+          <a:lstStyle/>
+          <a:p>
+            <a:endParaRPr lang="en-US">
+              <a:latin typeface="Times New Roman" panose="02020603050405020304" pitchFamily="18" charset="0"/>
+              <a:cs typeface="Times New Roman" panose="02020603050405020304" pitchFamily="18" charset="0"/>
+            </a:endParaRPr>
+          </a:p>
+        </p:txBody>
       </p:sp>
       <p:sp>
         <p:nvSpPr>
           <p:cNvPr id="53" name="time quote 3">
-            <a:extLst xmlns:a="http://schemas.openxmlformats.org/drawingml/2006/main">
+            <a:extLst>
               <a:ext uri="{FF2B5EF4-FFF2-40B4-BE49-F238E27FC236}">
                 <a16:creationId xmlns:a16="http://schemas.microsoft.com/office/drawing/2014/main" id="{8FAF1810-9836-48A7-B4A9-1F644E8BF61F}"/>
               </a:ext>
             </a:extLst>
           </p:cNvPr>
           <p:cNvSpPr>
-            <a:spLocks xmlns:a="http://schemas.openxmlformats.org/drawingml/2006/main" noGrp="1"/>
+            <a:spLocks noGrp="1"/>
           </p:cNvSpPr>
           <p:nvPr/>
         </p:nvSpPr>
         <p:spPr>
-          <a:xfrm xmlns:a="http://schemas.openxmlformats.org/drawingml/2006/main">
+          <a:xfrm>
             <a:off x="13506450" y="8372475"/>
             <a:ext cx="4543425" cy="628650"/>
           </a:xfrm>
-          <a:prstGeom xmlns:a="http://schemas.openxmlformats.org/drawingml/2006/main" prst="rect">
+          <a:prstGeom prst="rect">
             <a:avLst/>
           </a:prstGeom>
-          <a:noFill xmlns:a="http://schemas.openxmlformats.org/drawingml/2006/main"/>
-          <a:ln xmlns:a="http://schemas.openxmlformats.org/drawingml/2006/main" w="0">
+          <a:noFill/>
+          <a:ln w="0">
             <a:noFill/>
             <a:prstDash val="solid"/>
           </a:ln>
         </p:spPr>
         <p:txBody>
-          <a:bodyPr xmlns:a="http://schemas.openxmlformats.org/drawingml/2006/main" wrap="square" lIns="0" tIns="0" rIns="0" bIns="0" anchor="ctr">
+          <a:bodyPr wrap="square" lIns="0" tIns="0" rIns="0" bIns="0" anchor="ctr">
             <a:noAutofit/>
           </a:bodyPr>
-          <a:lstStyle xmlns:a="http://schemas.openxmlformats.org/drawingml/2006/main">
+          <a:lstStyle>
             <a:defPPr algn="l">
               <a:defRPr sz="1538" b="0" i="1">
                 <a:solidFill>
@@ -9962,7 +9808,7 @@
               </a:defRPr>
             </a:lvl9pPr>
           </a:lstStyle>
-          <a:p xmlns:a="http://schemas.openxmlformats.org/drawingml/2006/main">
+          <a:p>
             <a:pPr algn="l">
               <a:lnSpc>
                 <a:spcPct val="101000"/>
@@ -9982,9 +9828,8 @@
                 <a:solidFill>
                   <a:srgbClr val="27333B"/>
                 </a:solidFill>
-                <a:latin typeface="Nimbus Sans"/>
-                <a:ea typeface="Nimbus Sans"/>
-                <a:cs typeface="Nimbus Sans"/>
+                <a:latin typeface="Times New Roman" panose="02020603050405020304" pitchFamily="18" charset="0"/>
+                <a:cs typeface="Times New Roman" panose="02020603050405020304" pitchFamily="18" charset="0"/>
               </a:rPr>
               <a:t>“I keep watching full classes for a seat to open. The window can be brief.”</a:t>
             </a:r>
@@ -9994,36 +9839,36 @@
       <p:sp>
         <p:nvSpPr>
           <p:cNvPr id="54" name="time segment 3">
-            <a:extLst xmlns:a="http://schemas.openxmlformats.org/drawingml/2006/main">
+            <a:extLst>
               <a:ext uri="{FF2B5EF4-FFF2-40B4-BE49-F238E27FC236}">
                 <a16:creationId xmlns:a16="http://schemas.microsoft.com/office/drawing/2014/main" id="{C00432E1-EB15-4CCE-B097-92C00E8C0D39}"/>
               </a:ext>
             </a:extLst>
           </p:cNvPr>
           <p:cNvSpPr>
-            <a:spLocks xmlns:a="http://schemas.openxmlformats.org/drawingml/2006/main" noGrp="1"/>
+            <a:spLocks noGrp="1"/>
           </p:cNvSpPr>
           <p:nvPr/>
         </p:nvSpPr>
         <p:spPr>
-          <a:xfrm xmlns:a="http://schemas.openxmlformats.org/drawingml/2006/main">
+          <a:xfrm>
             <a:off x="16802100" y="8943975"/>
             <a:ext cx="1238250" cy="161925"/>
           </a:xfrm>
-          <a:prstGeom xmlns:a="http://schemas.openxmlformats.org/drawingml/2006/main" prst="rect">
+          <a:prstGeom prst="rect">
             <a:avLst/>
           </a:prstGeom>
-          <a:noFill xmlns:a="http://schemas.openxmlformats.org/drawingml/2006/main"/>
-          <a:ln xmlns:a="http://schemas.openxmlformats.org/drawingml/2006/main" w="0">
+          <a:noFill/>
+          <a:ln w="0">
             <a:noFill/>
             <a:prstDash val="solid"/>
           </a:ln>
         </p:spPr>
         <p:txBody>
-          <a:bodyPr xmlns:a="http://schemas.openxmlformats.org/drawingml/2006/main" wrap="square" lIns="0" tIns="0" rIns="0" bIns="0" anchor="ctr">
+          <a:bodyPr wrap="square" lIns="0" tIns="0" rIns="0" bIns="0" anchor="ctr">
             <a:noAutofit/>
           </a:bodyPr>
-          <a:lstStyle xmlns:a="http://schemas.openxmlformats.org/drawingml/2006/main">
+          <a:lstStyle>
             <a:defPPr algn="r">
               <a:defRPr sz="1035" b="1" i="0">
                 <a:solidFill>
@@ -10125,7 +9970,7 @@
               </a:defRPr>
             </a:lvl9pPr>
           </a:lstStyle>
-          <a:p xmlns:a="http://schemas.openxmlformats.org/drawingml/2006/main">
+          <a:p>
             <a:pPr algn="r">
               <a:lnSpc>
                 <a:spcPct val="102000"/>
@@ -10145,9 +9990,8 @@
                 <a:solidFill>
                   <a:srgbClr val="62717A"/>
                 </a:solidFill>
-                <a:latin typeface="Nimbus Sans"/>
-                <a:ea typeface="Nimbus Sans"/>
-                <a:cs typeface="Nimbus Sans"/>
+                <a:latin typeface="Times New Roman" panose="02020603050405020304" pitchFamily="18" charset="0"/>
+                <a:cs typeface="Times New Roman" panose="02020603050405020304" pitchFamily="18" charset="0"/>
               </a:rPr>
               <a:t>P02_M002</a:t>
             </a:r>
@@ -10157,69 +10001,79 @@
       <p:sp>
         <p:nvSpPr>
           <p:cNvPr id="55" name="responsible use footer">
-            <a:extLst xmlns:a="http://schemas.openxmlformats.org/drawingml/2006/main">
+            <a:extLst>
               <a:ext uri="{FF2B5EF4-FFF2-40B4-BE49-F238E27FC236}">
                 <a16:creationId xmlns:a16="http://schemas.microsoft.com/office/drawing/2014/main" id="{E3414E1F-F366-4553-BAE9-314BB963DA6B}"/>
               </a:ext>
             </a:extLst>
           </p:cNvPr>
           <p:cNvSpPr>
-            <a:spLocks xmlns:a="http://schemas.openxmlformats.org/drawingml/2006/main" noGrp="1"/>
+            <a:spLocks noGrp="1"/>
           </p:cNvSpPr>
           <p:nvPr/>
         </p:nvSpPr>
         <p:spPr>
-          <a:xfrm xmlns:a="http://schemas.openxmlformats.org/drawingml/2006/main">
+          <a:xfrm>
             <a:off x="152400" y="9582150"/>
             <a:ext cx="18526125" cy="2152650"/>
           </a:xfrm>
-          <a:prstGeom xmlns:a="http://schemas.openxmlformats.org/drawingml/2006/main" prst="roundRect">
+          <a:prstGeom prst="roundRect">
             <a:avLst>
               <a:gd name="adj" fmla="val 6195"/>
             </a:avLst>
           </a:prstGeom>
-          <a:solidFill xmlns:a="http://schemas.openxmlformats.org/drawingml/2006/main">
+          <a:solidFill>
             <a:srgbClr val="643545"/>
           </a:solidFill>
-          <a:ln xmlns:a="http://schemas.openxmlformats.org/drawingml/2006/main" w="0">
+          <a:ln w="0">
             <a:noFill/>
             <a:prstDash val="solid"/>
           </a:ln>
         </p:spPr>
+        <p:txBody>
+          <a:bodyPr/>
+          <a:lstStyle/>
+          <a:p>
+            <a:endParaRPr lang="en-US">
+              <a:latin typeface="Times New Roman" panose="02020603050405020304" pitchFamily="18" charset="0"/>
+              <a:cs typeface="Times New Roman" panose="02020603050405020304" pitchFamily="18" charset="0"/>
+            </a:endParaRPr>
+          </a:p>
+        </p:txBody>
       </p:sp>
       <p:sp>
         <p:nvSpPr>
           <p:cNvPr id="56" name="responsible use heading">
-            <a:extLst xmlns:a="http://schemas.openxmlformats.org/drawingml/2006/main">
+            <a:extLst>
               <a:ext uri="{FF2B5EF4-FFF2-40B4-BE49-F238E27FC236}">
                 <a16:creationId xmlns:a16="http://schemas.microsoft.com/office/drawing/2014/main" id="{AE376312-C0B3-4F35-8FEE-B286BFDA08AC}"/>
               </a:ext>
             </a:extLst>
           </p:cNvPr>
           <p:cNvSpPr>
-            <a:spLocks xmlns:a="http://schemas.openxmlformats.org/drawingml/2006/main" noGrp="1"/>
+            <a:spLocks noGrp="1"/>
           </p:cNvSpPr>
           <p:nvPr/>
         </p:nvSpPr>
         <p:spPr>
-          <a:xfrm xmlns:a="http://schemas.openxmlformats.org/drawingml/2006/main">
+          <a:xfrm>
             <a:off x="476250" y="9715500"/>
             <a:ext cx="15811500" cy="457200"/>
           </a:xfrm>
-          <a:prstGeom xmlns:a="http://schemas.openxmlformats.org/drawingml/2006/main" prst="rect">
+          <a:prstGeom prst="rect">
             <a:avLst/>
           </a:prstGeom>
-          <a:noFill xmlns:a="http://schemas.openxmlformats.org/drawingml/2006/main"/>
-          <a:ln xmlns:a="http://schemas.openxmlformats.org/drawingml/2006/main" w="0">
+          <a:noFill/>
+          <a:ln w="0">
             <a:noFill/>
             <a:prstDash val="solid"/>
           </a:ln>
         </p:spPr>
         <p:txBody>
-          <a:bodyPr xmlns:a="http://schemas.openxmlformats.org/drawingml/2006/main" wrap="square" lIns="0" tIns="0" rIns="0" bIns="0" anchor="ctr">
+          <a:bodyPr wrap="square" lIns="0" tIns="0" rIns="0" bIns="0" anchor="ctr">
             <a:noAutofit/>
           </a:bodyPr>
-          <a:lstStyle xmlns:a="http://schemas.openxmlformats.org/drawingml/2006/main">
+          <a:lstStyle>
             <a:defPPr algn="l">
               <a:defRPr sz="2400" b="1" i="0">
                 <a:solidFill>
@@ -10321,7 +10175,7 @@
               </a:defRPr>
             </a:lvl9pPr>
           </a:lstStyle>
-          <a:p xmlns:a="http://schemas.openxmlformats.org/drawingml/2006/main">
+          <a:p>
             <a:pPr algn="l">
               <a:lnSpc>
                 <a:spcPct val="102000"/>
@@ -10341,9 +10195,8 @@
                 <a:solidFill>
                   <a:srgbClr val="FFFFFF"/>
                 </a:solidFill>
-                <a:latin typeface="Nimbus Sans"/>
-                <a:ea typeface="Nimbus Sans"/>
-                <a:cs typeface="Nimbus Sans"/>
+                <a:latin typeface="Times New Roman" panose="02020603050405020304" pitchFamily="18" charset="0"/>
+                <a:cs typeface="Times New Roman" panose="02020603050405020304" pitchFamily="18" charset="0"/>
               </a:rPr>
               <a:t>RESPONSIBLE USE of AI</a:t>
             </a:r>
@@ -10353,67 +10206,77 @@
       <p:sp>
         <p:nvSpPr>
           <p:cNvPr id="57" name="responsible use divider">
-            <a:extLst xmlns:a="http://schemas.openxmlformats.org/drawingml/2006/main">
+            <a:extLst>
               <a:ext uri="{FF2B5EF4-FFF2-40B4-BE49-F238E27FC236}">
                 <a16:creationId xmlns:a16="http://schemas.microsoft.com/office/drawing/2014/main" id="{3D950A2F-CC7D-4E22-9F5A-968076622467}"/>
               </a:ext>
             </a:extLst>
           </p:cNvPr>
           <p:cNvSpPr>
-            <a:spLocks xmlns:a="http://schemas.openxmlformats.org/drawingml/2006/main" noGrp="1"/>
+            <a:spLocks noGrp="1"/>
           </p:cNvSpPr>
           <p:nvPr/>
         </p:nvSpPr>
         <p:spPr>
-          <a:xfrm xmlns:a="http://schemas.openxmlformats.org/drawingml/2006/main">
+          <a:xfrm>
             <a:off x="476250" y="10239375"/>
             <a:ext cx="17868900" cy="9525"/>
           </a:xfrm>
-          <a:prstGeom xmlns:a="http://schemas.openxmlformats.org/drawingml/2006/main" prst="rect">
+          <a:prstGeom prst="rect">
             <a:avLst/>
           </a:prstGeom>
-          <a:solidFill xmlns:a="http://schemas.openxmlformats.org/drawingml/2006/main">
+          <a:solidFill>
             <a:srgbClr val="936E7A"/>
           </a:solidFill>
-          <a:ln xmlns:a="http://schemas.openxmlformats.org/drawingml/2006/main" w="0">
+          <a:ln w="0">
             <a:noFill/>
             <a:prstDash val="solid"/>
           </a:ln>
         </p:spPr>
+        <p:txBody>
+          <a:bodyPr/>
+          <a:lstStyle/>
+          <a:p>
+            <a:endParaRPr lang="en-US">
+              <a:latin typeface="Times New Roman" panose="02020603050405020304" pitchFamily="18" charset="0"/>
+              <a:cs typeface="Times New Roman" panose="02020603050405020304" pitchFamily="18" charset="0"/>
+            </a:endParaRPr>
+          </a:p>
+        </p:txBody>
       </p:sp>
       <p:sp>
         <p:nvSpPr>
           <p:cNvPr id="58" name="source trust heading">
-            <a:extLst xmlns:a="http://schemas.openxmlformats.org/drawingml/2006/main">
+            <a:extLst>
               <a:ext uri="{FF2B5EF4-FFF2-40B4-BE49-F238E27FC236}">
                 <a16:creationId xmlns:a16="http://schemas.microsoft.com/office/drawing/2014/main" id="{FA2B7EF6-E0F6-4E19-9139-8D1CBAE2445A}"/>
               </a:ext>
             </a:extLst>
           </p:cNvPr>
           <p:cNvSpPr>
-            <a:spLocks xmlns:a="http://schemas.openxmlformats.org/drawingml/2006/main" noGrp="1"/>
+            <a:spLocks noGrp="1"/>
           </p:cNvSpPr>
           <p:nvPr/>
         </p:nvSpPr>
         <p:spPr>
-          <a:xfrm xmlns:a="http://schemas.openxmlformats.org/drawingml/2006/main">
+          <a:xfrm>
             <a:off x="476250" y="10363200"/>
             <a:ext cx="5791200" cy="314325"/>
           </a:xfrm>
-          <a:prstGeom xmlns:a="http://schemas.openxmlformats.org/drawingml/2006/main" prst="rect">
+          <a:prstGeom prst="rect">
             <a:avLst/>
           </a:prstGeom>
-          <a:noFill xmlns:a="http://schemas.openxmlformats.org/drawingml/2006/main"/>
-          <a:ln xmlns:a="http://schemas.openxmlformats.org/drawingml/2006/main" w="0">
+          <a:noFill/>
+          <a:ln w="0">
             <a:noFill/>
             <a:prstDash val="solid"/>
           </a:ln>
         </p:spPr>
         <p:txBody>
-          <a:bodyPr xmlns:a="http://schemas.openxmlformats.org/drawingml/2006/main" wrap="square" lIns="0" tIns="0" rIns="0" bIns="0" anchor="ctr">
+          <a:bodyPr wrap="square" lIns="0" tIns="0" rIns="0" bIns="0" anchor="ctr">
             <a:noAutofit/>
           </a:bodyPr>
-          <a:lstStyle xmlns:a="http://schemas.openxmlformats.org/drawingml/2006/main">
+          <a:lstStyle>
             <a:defPPr algn="l">
               <a:defRPr sz="1545" b="1" i="0">
                 <a:solidFill>
@@ -10515,7 +10378,7 @@
               </a:defRPr>
             </a:lvl9pPr>
           </a:lstStyle>
-          <a:p xmlns:a="http://schemas.openxmlformats.org/drawingml/2006/main">
+          <a:p>
             <a:pPr algn="l">
               <a:lnSpc>
                 <a:spcPct val="102000"/>
@@ -10535,9 +10398,8 @@
                 <a:solidFill>
                   <a:srgbClr val="FFFFFF"/>
                 </a:solidFill>
-                <a:latin typeface="Nimbus Sans"/>
-                <a:ea typeface="Nimbus Sans"/>
-                <a:cs typeface="Nimbus Sans"/>
+                <a:latin typeface="Times New Roman" panose="02020603050405020304" pitchFamily="18" charset="0"/>
+                <a:cs typeface="Times New Roman" panose="02020603050405020304" pitchFamily="18" charset="0"/>
               </a:rPr>
               <a:t>SOURCE-LINKED ANSWERS</a:t>
             </a:r>
@@ -10547,36 +10409,36 @@
       <p:sp>
         <p:nvSpPr>
           <p:cNvPr id="59" name="source trust quote">
-            <a:extLst xmlns:a="http://schemas.openxmlformats.org/drawingml/2006/main">
+            <a:extLst>
               <a:ext uri="{FF2B5EF4-FFF2-40B4-BE49-F238E27FC236}">
                 <a16:creationId xmlns:a16="http://schemas.microsoft.com/office/drawing/2014/main" id="{752A7D08-59BA-437E-909D-890F9E492760}"/>
               </a:ext>
             </a:extLst>
           </p:cNvPr>
           <p:cNvSpPr>
-            <a:spLocks xmlns:a="http://schemas.openxmlformats.org/drawingml/2006/main" noGrp="1"/>
+            <a:spLocks noGrp="1"/>
           </p:cNvSpPr>
           <p:nvPr/>
         </p:nvSpPr>
         <p:spPr>
-          <a:xfrm xmlns:a="http://schemas.openxmlformats.org/drawingml/2006/main">
+          <a:xfrm>
             <a:off x="476250" y="10744200"/>
             <a:ext cx="5724525" cy="590550"/>
           </a:xfrm>
-          <a:prstGeom xmlns:a="http://schemas.openxmlformats.org/drawingml/2006/main" prst="rect">
+          <a:prstGeom prst="rect">
             <a:avLst/>
           </a:prstGeom>
-          <a:noFill xmlns:a="http://schemas.openxmlformats.org/drawingml/2006/main"/>
-          <a:ln xmlns:a="http://schemas.openxmlformats.org/drawingml/2006/main" w="0">
+          <a:noFill/>
+          <a:ln w="0">
             <a:noFill/>
             <a:prstDash val="solid"/>
           </a:ln>
         </p:spPr>
         <p:txBody>
-          <a:bodyPr xmlns:a="http://schemas.openxmlformats.org/drawingml/2006/main" wrap="square" lIns="0" tIns="0" rIns="0" bIns="0" anchor="ctr">
+          <a:bodyPr wrap="square" lIns="0" tIns="0" rIns="0" bIns="0" anchor="ctr">
             <a:noAutofit/>
           </a:bodyPr>
-          <a:lstStyle xmlns:a="http://schemas.openxmlformats.org/drawingml/2006/main">
+          <a:lstStyle>
             <a:defPPr algn="l">
               <a:defRPr sz="1583" b="0" i="1">
                 <a:solidFill>
@@ -10678,7 +10540,7 @@
               </a:defRPr>
             </a:lvl9pPr>
           </a:lstStyle>
-          <a:p xmlns:a="http://schemas.openxmlformats.org/drawingml/2006/main">
+          <a:p>
             <a:pPr algn="l">
               <a:lnSpc>
                 <a:spcPct val="102000"/>
@@ -10698,9 +10560,8 @@
                 <a:solidFill>
                   <a:srgbClr val="F9F6F5"/>
                 </a:solidFill>
-                <a:latin typeface="Nimbus Sans"/>
-                <a:ea typeface="Nimbus Sans"/>
-                <a:cs typeface="Nimbus Sans"/>
+                <a:latin typeface="Times New Roman" panose="02020603050405020304" pitchFamily="18" charset="0"/>
+                <a:cs typeface="Times New Roman" panose="02020603050405020304" pitchFamily="18" charset="0"/>
               </a:rPr>
               <a:t>“I would trust an answer more if it linked to the original Brown page.”</a:t>
             </a:r>
@@ -10710,36 +10571,36 @@
       <p:sp>
         <p:nvSpPr>
           <p:cNvPr id="60" name="source trust citation">
-            <a:extLst xmlns:a="http://schemas.openxmlformats.org/drawingml/2006/main">
+            <a:extLst>
               <a:ext uri="{FF2B5EF4-FFF2-40B4-BE49-F238E27FC236}">
                 <a16:creationId xmlns:a16="http://schemas.microsoft.com/office/drawing/2014/main" id="{B721344B-D87D-4476-AC35-EE9F81436ADF}"/>
               </a:ext>
             </a:extLst>
           </p:cNvPr>
           <p:cNvSpPr>
-            <a:spLocks xmlns:a="http://schemas.openxmlformats.org/drawingml/2006/main" noGrp="1"/>
+            <a:spLocks noGrp="1"/>
           </p:cNvSpPr>
           <p:nvPr/>
         </p:nvSpPr>
         <p:spPr>
-          <a:xfrm xmlns:a="http://schemas.openxmlformats.org/drawingml/2006/main">
+          <a:xfrm>
             <a:off x="476250" y="11382375"/>
             <a:ext cx="5724525" cy="228600"/>
           </a:xfrm>
-          <a:prstGeom xmlns:a="http://schemas.openxmlformats.org/drawingml/2006/main" prst="rect">
+          <a:prstGeom prst="rect">
             <a:avLst/>
           </a:prstGeom>
-          <a:noFill xmlns:a="http://schemas.openxmlformats.org/drawingml/2006/main"/>
-          <a:ln xmlns:a="http://schemas.openxmlformats.org/drawingml/2006/main" w="0">
+          <a:noFill/>
+          <a:ln w="0">
             <a:noFill/>
             <a:prstDash val="solid"/>
           </a:ln>
         </p:spPr>
         <p:txBody>
-          <a:bodyPr xmlns:a="http://schemas.openxmlformats.org/drawingml/2006/main" wrap="square" lIns="0" tIns="0" rIns="0" bIns="0" anchor="ctr">
+          <a:bodyPr wrap="square" lIns="0" tIns="0" rIns="0" bIns="0" anchor="ctr">
             <a:noAutofit/>
           </a:bodyPr>
-          <a:lstStyle xmlns:a="http://schemas.openxmlformats.org/drawingml/2006/main">
+          <a:lstStyle>
             <a:defPPr algn="l">
               <a:defRPr sz="1148" b="1" i="0">
                 <a:solidFill>
@@ -10841,7 +10702,7 @@
               </a:defRPr>
             </a:lvl9pPr>
           </a:lstStyle>
-          <a:p xmlns:a="http://schemas.openxmlformats.org/drawingml/2006/main">
+          <a:p>
             <a:pPr algn="l">
               <a:lnSpc>
                 <a:spcPct val="102000"/>
@@ -10861,9 +10722,8 @@
                 <a:solidFill>
                   <a:srgbClr val="F0E4E7"/>
                 </a:solidFill>
-                <a:latin typeface="Nimbus Sans"/>
-                <a:ea typeface="Nimbus Sans"/>
-                <a:cs typeface="Nimbus Sans"/>
+                <a:latin typeface="Times New Roman" panose="02020603050405020304" pitchFamily="18" charset="0"/>
+                <a:cs typeface="Times New Roman" panose="02020603050405020304" pitchFamily="18" charset="0"/>
               </a:rPr>
               <a:t>P03_M035</a:t>
             </a:r>
@@ -10873,36 +10733,36 @@
       <p:sp>
         <p:nvSpPr>
           <p:cNvPr id="61" name="current trust heading">
-            <a:extLst xmlns:a="http://schemas.openxmlformats.org/drawingml/2006/main">
+            <a:extLst>
               <a:ext uri="{FF2B5EF4-FFF2-40B4-BE49-F238E27FC236}">
                 <a16:creationId xmlns:a16="http://schemas.microsoft.com/office/drawing/2014/main" id="{02BB2D8D-A341-4A48-958E-F6FB8B5D7192}"/>
               </a:ext>
             </a:extLst>
           </p:cNvPr>
           <p:cNvSpPr>
-            <a:spLocks xmlns:a="http://schemas.openxmlformats.org/drawingml/2006/main" noGrp="1"/>
+            <a:spLocks noGrp="1"/>
           </p:cNvSpPr>
           <p:nvPr/>
         </p:nvSpPr>
         <p:spPr>
-          <a:xfrm xmlns:a="http://schemas.openxmlformats.org/drawingml/2006/main">
+          <a:xfrm>
             <a:off x="6591300" y="10363200"/>
             <a:ext cx="5791200" cy="314325"/>
           </a:xfrm>
-          <a:prstGeom xmlns:a="http://schemas.openxmlformats.org/drawingml/2006/main" prst="rect">
+          <a:prstGeom prst="rect">
             <a:avLst/>
           </a:prstGeom>
-          <a:noFill xmlns:a="http://schemas.openxmlformats.org/drawingml/2006/main"/>
-          <a:ln xmlns:a="http://schemas.openxmlformats.org/drawingml/2006/main" w="0">
+          <a:noFill/>
+          <a:ln w="0">
             <a:noFill/>
             <a:prstDash val="solid"/>
           </a:ln>
         </p:spPr>
         <p:txBody>
-          <a:bodyPr xmlns:a="http://schemas.openxmlformats.org/drawingml/2006/main" wrap="square" lIns="0" tIns="0" rIns="0" bIns="0" anchor="ctr">
+          <a:bodyPr wrap="square" lIns="0" tIns="0" rIns="0" bIns="0" anchor="ctr">
             <a:noAutofit/>
           </a:bodyPr>
-          <a:lstStyle xmlns:a="http://schemas.openxmlformats.org/drawingml/2006/main">
+          <a:lstStyle>
             <a:defPPr algn="l">
               <a:defRPr sz="1545" b="1" i="0">
                 <a:solidFill>
@@ -11004,7 +10864,7 @@
               </a:defRPr>
             </a:lvl9pPr>
           </a:lstStyle>
-          <a:p xmlns:a="http://schemas.openxmlformats.org/drawingml/2006/main">
+          <a:p>
             <a:pPr algn="l">
               <a:lnSpc>
                 <a:spcPct val="102000"/>
@@ -11024,9 +10884,8 @@
                 <a:solidFill>
                   <a:srgbClr val="FFFFFF"/>
                 </a:solidFill>
-                <a:latin typeface="Nimbus Sans"/>
-                <a:ea typeface="Nimbus Sans"/>
-                <a:cs typeface="Nimbus Sans"/>
+                <a:latin typeface="Times New Roman" panose="02020603050405020304" pitchFamily="18" charset="0"/>
+                <a:cs typeface="Times New Roman" panose="02020603050405020304" pitchFamily="18" charset="0"/>
               </a:rPr>
               <a:t>CHECKABLE, CURRENT INFORMATION</a:t>
             </a:r>
@@ -11036,36 +10895,36 @@
       <p:sp>
         <p:nvSpPr>
           <p:cNvPr id="62" name="current trust quote">
-            <a:extLst xmlns:a="http://schemas.openxmlformats.org/drawingml/2006/main">
+            <a:extLst>
               <a:ext uri="{FF2B5EF4-FFF2-40B4-BE49-F238E27FC236}">
                 <a16:creationId xmlns:a16="http://schemas.microsoft.com/office/drawing/2014/main" id="{E4B9973B-481D-42A6-AF0D-E38D3913192F}"/>
               </a:ext>
             </a:extLst>
           </p:cNvPr>
           <p:cNvSpPr>
-            <a:spLocks xmlns:a="http://schemas.openxmlformats.org/drawingml/2006/main" noGrp="1"/>
+            <a:spLocks noGrp="1"/>
           </p:cNvSpPr>
           <p:nvPr/>
         </p:nvSpPr>
         <p:spPr>
-          <a:xfrm xmlns:a="http://schemas.openxmlformats.org/drawingml/2006/main">
+          <a:xfrm>
             <a:off x="6591300" y="10744200"/>
             <a:ext cx="5724525" cy="590550"/>
           </a:xfrm>
-          <a:prstGeom xmlns:a="http://schemas.openxmlformats.org/drawingml/2006/main" prst="rect">
+          <a:prstGeom prst="rect">
             <a:avLst/>
           </a:prstGeom>
-          <a:noFill xmlns:a="http://schemas.openxmlformats.org/drawingml/2006/main"/>
-          <a:ln xmlns:a="http://schemas.openxmlformats.org/drawingml/2006/main" w="0">
+          <a:noFill/>
+          <a:ln w="0">
             <a:noFill/>
             <a:prstDash val="solid"/>
           </a:ln>
         </p:spPr>
         <p:txBody>
-          <a:bodyPr xmlns:a="http://schemas.openxmlformats.org/drawingml/2006/main" wrap="square" lIns="0" tIns="0" rIns="0" bIns="0" anchor="ctr">
+          <a:bodyPr wrap="square" lIns="0" tIns="0" rIns="0" bIns="0" anchor="ctr">
             <a:noAutofit/>
           </a:bodyPr>
-          <a:lstStyle xmlns:a="http://schemas.openxmlformats.org/drawingml/2006/main">
+          <a:lstStyle>
             <a:defPPr algn="l">
               <a:defRPr sz="1583" b="0" i="1">
                 <a:solidFill>
@@ -11167,7 +11026,7 @@
               </a:defRPr>
             </a:lvl9pPr>
           </a:lstStyle>
-          <a:p xmlns:a="http://schemas.openxmlformats.org/drawingml/2006/main">
+          <a:p>
             <a:pPr algn="l">
               <a:lnSpc>
                 <a:spcPct val="102000"/>
@@ -11187,9 +11046,8 @@
                 <a:solidFill>
                   <a:srgbClr val="F9F6F5"/>
                 </a:solidFill>
-                <a:latin typeface="Nimbus Sans"/>
-                <a:ea typeface="Nimbus Sans"/>
-                <a:cs typeface="Nimbus Sans"/>
+                <a:latin typeface="Times New Roman" panose="02020603050405020304" pitchFamily="18" charset="0"/>
+                <a:cs typeface="Times New Roman" panose="02020603050405020304" pitchFamily="18" charset="0"/>
               </a:rPr>
               <a:t>“An official-looking page might describe a project that ended years ago.”</a:t>
             </a:r>
@@ -11199,36 +11057,36 @@
       <p:sp>
         <p:nvSpPr>
           <p:cNvPr id="63" name="current trust citation">
-            <a:extLst xmlns:a="http://schemas.openxmlformats.org/drawingml/2006/main">
+            <a:extLst>
               <a:ext uri="{FF2B5EF4-FFF2-40B4-BE49-F238E27FC236}">
                 <a16:creationId xmlns:a16="http://schemas.microsoft.com/office/drawing/2014/main" id="{023A2347-1E74-4B5A-B942-091DBCB63414}"/>
               </a:ext>
             </a:extLst>
           </p:cNvPr>
           <p:cNvSpPr>
-            <a:spLocks xmlns:a="http://schemas.openxmlformats.org/drawingml/2006/main" noGrp="1"/>
+            <a:spLocks noGrp="1"/>
           </p:cNvSpPr>
           <p:nvPr/>
         </p:nvSpPr>
         <p:spPr>
-          <a:xfrm xmlns:a="http://schemas.openxmlformats.org/drawingml/2006/main">
+          <a:xfrm>
             <a:off x="6591300" y="11382375"/>
             <a:ext cx="5724525" cy="228600"/>
           </a:xfrm>
-          <a:prstGeom xmlns:a="http://schemas.openxmlformats.org/drawingml/2006/main" prst="rect">
+          <a:prstGeom prst="rect">
             <a:avLst/>
           </a:prstGeom>
-          <a:noFill xmlns:a="http://schemas.openxmlformats.org/drawingml/2006/main"/>
-          <a:ln xmlns:a="http://schemas.openxmlformats.org/drawingml/2006/main" w="0">
+          <a:noFill/>
+          <a:ln w="0">
             <a:noFill/>
             <a:prstDash val="solid"/>
           </a:ln>
         </p:spPr>
         <p:txBody>
-          <a:bodyPr xmlns:a="http://schemas.openxmlformats.org/drawingml/2006/main" wrap="square" lIns="0" tIns="0" rIns="0" bIns="0" anchor="ctr">
+          <a:bodyPr wrap="square" lIns="0" tIns="0" rIns="0" bIns="0" anchor="ctr">
             <a:noAutofit/>
           </a:bodyPr>
-          <a:lstStyle xmlns:a="http://schemas.openxmlformats.org/drawingml/2006/main">
+          <a:lstStyle>
             <a:defPPr algn="l">
               <a:defRPr sz="1148" b="1" i="0">
                 <a:solidFill>
@@ -11330,7 +11188,7 @@
               </a:defRPr>
             </a:lvl9pPr>
           </a:lstStyle>
-          <a:p xmlns:a="http://schemas.openxmlformats.org/drawingml/2006/main">
+          <a:p>
             <a:pPr algn="l">
               <a:lnSpc>
                 <a:spcPct val="102000"/>
@@ -11350,9 +11208,8 @@
                 <a:solidFill>
                   <a:srgbClr val="F0E4E7"/>
                 </a:solidFill>
-                <a:latin typeface="Nimbus Sans"/>
-                <a:ea typeface="Nimbus Sans"/>
-                <a:cs typeface="Nimbus Sans"/>
+                <a:latin typeface="Times New Roman" panose="02020603050405020304" pitchFamily="18" charset="0"/>
+                <a:cs typeface="Times New Roman" panose="02020603050405020304" pitchFamily="18" charset="0"/>
               </a:rPr>
               <a:t>P07_M029</a:t>
             </a:r>
@@ -11362,36 +11219,36 @@
       <p:sp>
         <p:nvSpPr>
           <p:cNvPr id="64" name="control trust heading">
-            <a:extLst xmlns:a="http://schemas.openxmlformats.org/drawingml/2006/main">
+            <a:extLst>
               <a:ext uri="{FF2B5EF4-FFF2-40B4-BE49-F238E27FC236}">
                 <a16:creationId xmlns:a16="http://schemas.microsoft.com/office/drawing/2014/main" id="{99813F2C-03D1-4A15-B1A5-37940EE13DA1}"/>
               </a:ext>
             </a:extLst>
           </p:cNvPr>
           <p:cNvSpPr>
-            <a:spLocks xmlns:a="http://schemas.openxmlformats.org/drawingml/2006/main" noGrp="1"/>
+            <a:spLocks noGrp="1"/>
           </p:cNvSpPr>
           <p:nvPr/>
         </p:nvSpPr>
         <p:spPr>
-          <a:xfrm xmlns:a="http://schemas.openxmlformats.org/drawingml/2006/main">
+          <a:xfrm>
             <a:off x="12725400" y="10363200"/>
             <a:ext cx="5791200" cy="314325"/>
           </a:xfrm>
-          <a:prstGeom xmlns:a="http://schemas.openxmlformats.org/drawingml/2006/main" prst="rect">
+          <a:prstGeom prst="rect">
             <a:avLst/>
           </a:prstGeom>
-          <a:noFill xmlns:a="http://schemas.openxmlformats.org/drawingml/2006/main"/>
-          <a:ln xmlns:a="http://schemas.openxmlformats.org/drawingml/2006/main" w="0">
+          <a:noFill/>
+          <a:ln w="0">
             <a:noFill/>
             <a:prstDash val="solid"/>
           </a:ln>
         </p:spPr>
         <p:txBody>
-          <a:bodyPr xmlns:a="http://schemas.openxmlformats.org/drawingml/2006/main" wrap="square" lIns="0" tIns="0" rIns="0" bIns="0" anchor="ctr">
+          <a:bodyPr wrap="square" lIns="0" tIns="0" rIns="0" bIns="0" anchor="ctr">
             <a:noAutofit/>
           </a:bodyPr>
-          <a:lstStyle xmlns:a="http://schemas.openxmlformats.org/drawingml/2006/main">
+          <a:lstStyle>
             <a:defPPr algn="l">
               <a:defRPr sz="1545" b="1" i="0">
                 <a:solidFill>
@@ -11493,7 +11350,7 @@
               </a:defRPr>
             </a:lvl9pPr>
           </a:lstStyle>
-          <a:p xmlns:a="http://schemas.openxmlformats.org/drawingml/2006/main">
+          <a:p>
             <a:pPr algn="l">
               <a:lnSpc>
                 <a:spcPct val="102000"/>
@@ -11513,9 +11370,8 @@
                 <a:solidFill>
                   <a:srgbClr val="FFFFFF"/>
                 </a:solidFill>
-                <a:latin typeface="Nimbus Sans"/>
-                <a:ea typeface="Nimbus Sans"/>
-                <a:cs typeface="Nimbus Sans"/>
+                <a:latin typeface="Times New Roman" panose="02020603050405020304" pitchFamily="18" charset="0"/>
+                <a:cs typeface="Times New Roman" panose="02020603050405020304" pitchFamily="18" charset="0"/>
               </a:rPr>
               <a:t>USER CONTROL OVER PLANS</a:t>
             </a:r>
@@ -11525,36 +11381,36 @@
       <p:sp>
         <p:nvSpPr>
           <p:cNvPr id="65" name="control trust quote">
-            <a:extLst xmlns:a="http://schemas.openxmlformats.org/drawingml/2006/main">
+            <a:extLst>
               <a:ext uri="{FF2B5EF4-FFF2-40B4-BE49-F238E27FC236}">
                 <a16:creationId xmlns:a16="http://schemas.microsoft.com/office/drawing/2014/main" id="{C0E117C1-EEF3-4468-A2FD-6D1474204F05}"/>
               </a:ext>
             </a:extLst>
           </p:cNvPr>
           <p:cNvSpPr>
-            <a:spLocks xmlns:a="http://schemas.openxmlformats.org/drawingml/2006/main" noGrp="1"/>
+            <a:spLocks noGrp="1"/>
           </p:cNvSpPr>
           <p:nvPr/>
         </p:nvSpPr>
         <p:spPr>
-          <a:xfrm xmlns:a="http://schemas.openxmlformats.org/drawingml/2006/main">
+          <a:xfrm>
             <a:off x="12725400" y="10744200"/>
             <a:ext cx="5724525" cy="590550"/>
           </a:xfrm>
-          <a:prstGeom xmlns:a="http://schemas.openxmlformats.org/drawingml/2006/main" prst="rect">
+          <a:prstGeom prst="rect">
             <a:avLst/>
           </a:prstGeom>
-          <a:noFill xmlns:a="http://schemas.openxmlformats.org/drawingml/2006/main"/>
-          <a:ln xmlns:a="http://schemas.openxmlformats.org/drawingml/2006/main" w="0">
+          <a:noFill/>
+          <a:ln w="0">
             <a:noFill/>
             <a:prstDash val="solid"/>
           </a:ln>
         </p:spPr>
         <p:txBody>
-          <a:bodyPr xmlns:a="http://schemas.openxmlformats.org/drawingml/2006/main" wrap="square" lIns="0" tIns="0" rIns="0" bIns="0" anchor="ctr">
+          <a:bodyPr wrap="square" lIns="0" tIns="0" rIns="0" bIns="0" anchor="ctr">
             <a:noAutofit/>
           </a:bodyPr>
-          <a:lstStyle xmlns:a="http://schemas.openxmlformats.org/drawingml/2006/main">
+          <a:lstStyle>
             <a:defPPr algn="l">
               <a:defRPr sz="1583" b="0" i="1">
                 <a:solidFill>
@@ -11656,7 +11512,7 @@
               </a:defRPr>
             </a:lvl9pPr>
           </a:lstStyle>
-          <a:p xmlns:a="http://schemas.openxmlformats.org/drawingml/2006/main">
+          <a:p>
             <a:pPr algn="l">
               <a:lnSpc>
                 <a:spcPct val="102000"/>
@@ -11676,9 +11532,8 @@
                 <a:solidFill>
                   <a:srgbClr val="F9F6F5"/>
                 </a:solidFill>
-                <a:latin typeface="Nimbus Sans"/>
-                <a:ea typeface="Nimbus Sans"/>
-                <a:cs typeface="Nimbus Sans"/>
+                <a:latin typeface="Times New Roman" panose="02020603050405020304" pitchFamily="18" charset="0"/>
+                <a:cs typeface="Times New Roman" panose="02020603050405020304" pitchFamily="18" charset="0"/>
               </a:rPr>
               <a:t>“Let the chatbot propose a course plan, but I want to decide and register myself.”</a:t>
             </a:r>
@@ -11688,36 +11543,36 @@
       <p:sp>
         <p:nvSpPr>
           <p:cNvPr id="66" name="control trust citation">
-            <a:extLst xmlns:a="http://schemas.openxmlformats.org/drawingml/2006/main">
+            <a:extLst>
               <a:ext uri="{FF2B5EF4-FFF2-40B4-BE49-F238E27FC236}">
                 <a16:creationId xmlns:a16="http://schemas.microsoft.com/office/drawing/2014/main" id="{70EA4280-2A88-4CE2-8375-BBEF6A03361D}"/>
               </a:ext>
             </a:extLst>
           </p:cNvPr>
           <p:cNvSpPr>
-            <a:spLocks xmlns:a="http://schemas.openxmlformats.org/drawingml/2006/main" noGrp="1"/>
+            <a:spLocks noGrp="1"/>
           </p:cNvSpPr>
           <p:nvPr/>
         </p:nvSpPr>
         <p:spPr>
-          <a:xfrm xmlns:a="http://schemas.openxmlformats.org/drawingml/2006/main">
+          <a:xfrm>
             <a:off x="12725400" y="11382375"/>
             <a:ext cx="5724525" cy="228600"/>
           </a:xfrm>
-          <a:prstGeom xmlns:a="http://schemas.openxmlformats.org/drawingml/2006/main" prst="rect">
+          <a:prstGeom prst="rect">
             <a:avLst/>
           </a:prstGeom>
-          <a:noFill xmlns:a="http://schemas.openxmlformats.org/drawingml/2006/main"/>
-          <a:ln xmlns:a="http://schemas.openxmlformats.org/drawingml/2006/main" w="0">
+          <a:noFill/>
+          <a:ln w="0">
             <a:noFill/>
             <a:prstDash val="solid"/>
           </a:ln>
         </p:spPr>
         <p:txBody>
-          <a:bodyPr xmlns:a="http://schemas.openxmlformats.org/drawingml/2006/main" wrap="square" lIns="0" tIns="0" rIns="0" bIns="0" anchor="ctr">
+          <a:bodyPr wrap="square" lIns="0" tIns="0" rIns="0" bIns="0" anchor="ctr">
             <a:noAutofit/>
           </a:bodyPr>
-          <a:lstStyle xmlns:a="http://schemas.openxmlformats.org/drawingml/2006/main">
+          <a:lstStyle>
             <a:defPPr algn="l">
               <a:defRPr sz="1148" b="1" i="0">
                 <a:solidFill>
@@ -11819,7 +11674,7 @@
               </a:defRPr>
             </a:lvl9pPr>
           </a:lstStyle>
-          <a:p xmlns:a="http://schemas.openxmlformats.org/drawingml/2006/main">
+          <a:p>
             <a:pPr algn="l">
               <a:lnSpc>
                 <a:spcPct val="102000"/>
@@ -11839,9 +11694,8 @@
                 <a:solidFill>
                   <a:srgbClr val="F0E4E7"/>
                 </a:solidFill>
-                <a:latin typeface="Nimbus Sans"/>
-                <a:ea typeface="Nimbus Sans"/>
-                <a:cs typeface="Nimbus Sans"/>
+                <a:latin typeface="Times New Roman" panose="02020603050405020304" pitchFamily="18" charset="0"/>
+                <a:cs typeface="Times New Roman" panose="02020603050405020304" pitchFamily="18" charset="0"/>
               </a:rPr>
               <a:t>P03_M036</a:t>
             </a:r>
@@ -11855,6 +11709,9 @@
       </p:ext>
     </p:extLst>
   </p:cSld>
+  <p:clrMapOvr>
+    <a:masterClrMapping/>
+  </p:clrMapOvr>
 </p:sld>
 </file>
 
@@ -12100,5 +11957,254 @@
       </a:bgFillStyleLst>
     </a:fmtScheme>
   </a:themeElements>
+  <a:objectDefaults/>
+  <a:extraClrSchemeLst/>
+</a:theme>
+</file>
+
+<file path=ppt/theme/theme2.xml><?xml version="1.0" encoding="utf-8"?>
+<a:theme xmlns:a="http://schemas.openxmlformats.org/drawingml/2006/main" name="ChatGPT">
+  <a:themeElements>
+    <a:clrScheme name="ChatGPT">
+      <a:dk1>
+        <a:srgbClr val="000000"/>
+      </a:dk1>
+      <a:lt1>
+        <a:srgbClr val="FFFFFF"/>
+      </a:lt1>
+      <a:dk2>
+        <a:srgbClr val="0E2841"/>
+      </a:dk2>
+      <a:lt2>
+        <a:srgbClr val="E8E8E8"/>
+      </a:lt2>
+      <a:accent1>
+        <a:srgbClr val="156082"/>
+      </a:accent1>
+      <a:accent2>
+        <a:srgbClr val="E97132"/>
+      </a:accent2>
+      <a:accent3>
+        <a:srgbClr val="196B24"/>
+      </a:accent3>
+      <a:accent4>
+        <a:srgbClr val="0F9ED5"/>
+      </a:accent4>
+      <a:accent5>
+        <a:srgbClr val="A02B93"/>
+      </a:accent5>
+      <a:accent6>
+        <a:srgbClr val="4EA72E"/>
+      </a:accent6>
+      <a:hlink>
+        <a:srgbClr val="467886"/>
+      </a:hlink>
+      <a:folHlink>
+        <a:srgbClr val="96607D"/>
+      </a:folHlink>
+    </a:clrScheme>
+    <a:fontScheme name="">
+      <a:majorFont>
+        <a:latin typeface="Aptos"/>
+        <a:ea typeface=""/>
+        <a:cs typeface=""/>
+      </a:majorFont>
+      <a:minorFont>
+        <a:latin typeface="Aptos"/>
+        <a:ea typeface=""/>
+        <a:cs typeface=""/>
+      </a:minorFont>
+    </a:fontScheme>
+    <a:fmtScheme name="ChatGPT">
+      <a:fillStyleLst>
+        <a:solidFill>
+          <a:schemeClr val="phClr"/>
+        </a:solidFill>
+        <a:gradFill>
+          <a:gsLst>
+            <a:gs pos="0">
+              <a:schemeClr val="phClr">
+                <a:tint val="67000"/>
+                <a:lumMod val="110000"/>
+                <a:satMod val="105000"/>
+              </a:schemeClr>
+            </a:gs>
+            <a:gs pos="50000">
+              <a:schemeClr val="phClr">
+                <a:tint val="73000"/>
+                <a:lumMod val="105000"/>
+                <a:satMod val="103000"/>
+              </a:schemeClr>
+            </a:gs>
+            <a:gs pos="100000">
+              <a:schemeClr val="phClr">
+                <a:tint val="81000"/>
+                <a:lumMod val="105000"/>
+                <a:satMod val="109000"/>
+              </a:schemeClr>
+            </a:gs>
+          </a:gsLst>
+          <a:lin ang="5400000" scaled="0"/>
+        </a:gradFill>
+        <a:gradFill>
+          <a:gsLst>
+            <a:gs pos="0">
+              <a:schemeClr val="phClr">
+                <a:tint val="94000"/>
+                <a:lumMod val="102000"/>
+                <a:satMod val="103000"/>
+              </a:schemeClr>
+            </a:gs>
+            <a:gs pos="50000">
+              <a:schemeClr val="phClr">
+                <a:shade val="100000"/>
+                <a:lumMod val="100000"/>
+                <a:satMod val="110000"/>
+              </a:schemeClr>
+            </a:gs>
+            <a:gs pos="100000">
+              <a:schemeClr val="phClr">
+                <a:shade val="78000"/>
+                <a:lumMod val="99000"/>
+                <a:satMod val="120000"/>
+              </a:schemeClr>
+            </a:gs>
+          </a:gsLst>
+          <a:lin ang="5400000" scaled="0"/>
+        </a:gradFill>
+      </a:fillStyleLst>
+      <a:lnStyleLst>
+        <a:ln w="12700">
+          <a:solidFill>
+            <a:schemeClr val="phClr"/>
+          </a:solidFill>
+          <a:prstDash val="solid"/>
+        </a:ln>
+        <a:ln w="19050">
+          <a:solidFill>
+            <a:schemeClr val="phClr"/>
+          </a:solidFill>
+          <a:prstDash val="solid"/>
+        </a:ln>
+        <a:ln w="25400">
+          <a:solidFill>
+            <a:schemeClr val="phClr"/>
+          </a:solidFill>
+          <a:prstDash val="solid"/>
+        </a:ln>
+      </a:lnStyleLst>
+      <a:effectStyleLst>
+        <a:effectStyle>
+          <a:effectLst/>
+        </a:effectStyle>
+        <a:effectStyle>
+          <a:effectLst/>
+        </a:effectStyle>
+        <a:effectStyle>
+          <a:effectLst>
+            <a:outerShdw blurRad="57150" dist="19050" dir="5400000">
+              <a:srgbClr val="000000">
+                <a:alpha val="16000"/>
+              </a:srgbClr>
+            </a:outerShdw>
+          </a:effectLst>
+        </a:effectStyle>
+        <a:effectStyle>
+          <a:effectLst>
+            <a:outerShdw blurRad="19050" dist="9525" dir="5400000">
+              <a:srgbClr val="000000">
+                <a:alpha val="6000"/>
+              </a:srgbClr>
+            </a:outerShdw>
+          </a:effectLst>
+        </a:effectStyle>
+        <a:effectStyle>
+          <a:effectLst>
+            <a:outerShdw blurRad="28575" dist="9525" dir="5400000">
+              <a:srgbClr val="000000">
+                <a:alpha val="8000"/>
+              </a:srgbClr>
+            </a:outerShdw>
+          </a:effectLst>
+        </a:effectStyle>
+        <a:effectStyle>
+          <a:effectLst>
+            <a:outerShdw blurRad="57150" dist="19050" dir="5400000">
+              <a:srgbClr val="000000">
+                <a:alpha val="10000"/>
+              </a:srgbClr>
+            </a:outerShdw>
+          </a:effectLst>
+        </a:effectStyle>
+        <a:effectStyle>
+          <a:effectLst>
+            <a:outerShdw blurRad="114300" dist="38100" dir="5400000">
+              <a:srgbClr val="000000">
+                <a:alpha val="12000"/>
+              </a:srgbClr>
+            </a:outerShdw>
+          </a:effectLst>
+        </a:effectStyle>
+        <a:effectStyle>
+          <a:effectLst>
+            <a:outerShdw blurRad="171450" dist="57150" dir="5400000">
+              <a:srgbClr val="000000">
+                <a:alpha val="16000"/>
+              </a:srgbClr>
+            </a:outerShdw>
+          </a:effectLst>
+        </a:effectStyle>
+        <a:effectStyle>
+          <a:effectLst>
+            <a:outerShdw blurRad="266700" dist="95250" dir="5400000">
+              <a:srgbClr val="000000">
+                <a:alpha val="24000"/>
+              </a:srgbClr>
+            </a:outerShdw>
+          </a:effectLst>
+        </a:effectStyle>
+      </a:effectStyleLst>
+      <a:bgFillStyleLst>
+        <a:solidFill>
+          <a:schemeClr val="phClr"/>
+        </a:solidFill>
+        <a:solidFill>
+          <a:schemeClr val="phClr">
+            <a:tint val="95000"/>
+            <a:satMod val="170000"/>
+          </a:schemeClr>
+        </a:solidFill>
+        <a:gradFill>
+          <a:gsLst>
+            <a:gs pos="0">
+              <a:schemeClr val="phClr">
+                <a:tint val="93000"/>
+                <a:shade val="98000"/>
+                <a:lumMod val="102000"/>
+                <a:satMod val="150000"/>
+              </a:schemeClr>
+            </a:gs>
+            <a:gs pos="50000">
+              <a:schemeClr val="phClr">
+                <a:tint val="98000"/>
+                <a:shade val="90000"/>
+                <a:lumMod val="103000"/>
+                <a:satMod val="130000"/>
+              </a:schemeClr>
+            </a:gs>
+            <a:gs pos="100000">
+              <a:schemeClr val="phClr">
+                <a:shade val="63000"/>
+                <a:satMod val="120000"/>
+              </a:schemeClr>
+            </a:gs>
+          </a:gsLst>
+          <a:lin ang="5400000" scaled="0"/>
+        </a:gradFill>
+      </a:bgFillStyleLst>
+    </a:fmtScheme>
+  </a:themeElements>
+  <a:objectDefaults/>
+  <a:extraClrSchemeLst/>
 </a:theme>
 </file>
--- a/Takeaway.pptx
+++ b/Takeaway.pptx
@@ -107,6 +107,11 @@
       </a:defRPr>
     </a:lvl9pPr>
   </p:defaultTextStyle>
+  <p:extLst>
+    <p:ext uri="{EFAFB233-063F-42B5-8137-9DF3F51BA10A}">
+      <p15:sldGuideLst xmlns:p15="http://schemas.microsoft.com/office/powerpoint/2012/main"/>
+    </p:ext>
+  </p:extLst>
 </p:presentation>
 </file>
 
@@ -3494,8 +3499,8 @@
         </p:nvSpPr>
         <p:spPr>
           <a:xfrm>
-            <a:off x="133350" y="885825"/>
-            <a:ext cx="17430750" cy="800100"/>
+            <a:off x="298580" y="885825"/>
+            <a:ext cx="17265520" cy="800100"/>
           </a:xfrm>
           <a:prstGeom prst="rect">
             <a:avLst/>
@@ -3628,14 +3633,34 @@
               </a:defRPr>
             </a:pPr>
             <a:r>
-              <a:rPr sz="4875" b="1" i="0">
+              <a:rPr sz="4875" b="1" i="0" dirty="0">
                 <a:solidFill>
                   <a:srgbClr val="27333B"/>
                 </a:solidFill>
                 <a:latin typeface="Times New Roman" panose="02020603050405020304" pitchFamily="18" charset="0"/>
                 <a:cs typeface="Times New Roman" panose="02020603050405020304" pitchFamily="18" charset="0"/>
               </a:rPr>
-              <a:t>Why BrownAI? What Students Told Us.</a:t>
+              <a:t>Why </a:t>
+            </a:r>
+            <a:r>
+              <a:rPr sz="4875" b="1" i="0" dirty="0" err="1">
+                <a:solidFill>
+                  <a:srgbClr val="27333B"/>
+                </a:solidFill>
+                <a:latin typeface="Times New Roman" panose="02020603050405020304" pitchFamily="18" charset="0"/>
+                <a:cs typeface="Times New Roman" panose="02020603050405020304" pitchFamily="18" charset="0"/>
+              </a:rPr>
+              <a:t>BrownAI</a:t>
+            </a:r>
+            <a:r>
+              <a:rPr sz="4875" b="1" i="0" dirty="0">
+                <a:solidFill>
+                  <a:srgbClr val="27333B"/>
+                </a:solidFill>
+                <a:latin typeface="Times New Roman" panose="02020603050405020304" pitchFamily="18" charset="0"/>
+                <a:cs typeface="Times New Roman" panose="02020603050405020304" pitchFamily="18" charset="0"/>
+              </a:rPr>
+              <a:t>? What Students Told Us.</a:t>
             </a:r>
           </a:p>
         </p:txBody>
@@ -4567,7 +4592,7 @@
               </a:defRPr>
             </a:pPr>
             <a:r>
-              <a:rPr sz="2033" b="0" i="0" dirty="0">
+              <a:rPr sz="2400" b="0" i="0" dirty="0">
                 <a:solidFill>
                   <a:srgbClr val="27333B"/>
                 </a:solidFill>
@@ -4729,7 +4754,7 @@
               </a:defRPr>
             </a:pPr>
             <a:r>
-              <a:rPr sz="1665" b="1" i="0">
+              <a:rPr sz="1800" b="1" i="0" dirty="0">
                 <a:solidFill>
                   <a:srgbClr val="206E65"/>
                 </a:solidFill>
@@ -5096,7 +5121,7 @@
               </a:defRPr>
             </a:pPr>
             <a:r>
-              <a:rPr sz="1538" b="0" i="1">
+              <a:rPr sz="1538" b="0" i="1" dirty="0">
                 <a:solidFill>
                   <a:srgbClr val="27333B"/>
                 </a:solidFill>
@@ -6564,7 +6589,7 @@
               </a:defRPr>
             </a:pPr>
             <a:r>
-              <a:rPr sz="2033" b="0" i="0">
+              <a:rPr sz="2400" b="0" i="0" dirty="0">
                 <a:solidFill>
                   <a:srgbClr val="27333B"/>
                 </a:solidFill>
@@ -6726,7 +6751,7 @@
               </a:defRPr>
             </a:pPr>
             <a:r>
-              <a:rPr sz="1665" b="1" i="0">
+              <a:rPr sz="1800" b="1" i="0" dirty="0">
                 <a:solidFill>
                   <a:srgbClr val="206E65"/>
                 </a:solidFill>
@@ -8561,7 +8586,7 @@
               </a:defRPr>
             </a:pPr>
             <a:r>
-              <a:rPr sz="2033" b="0" i="0">
+              <a:rPr sz="2400" b="0" i="0" dirty="0">
                 <a:solidFill>
                   <a:srgbClr val="27333B"/>
                 </a:solidFill>
@@ -8723,7 +8748,7 @@
               </a:defRPr>
             </a:pPr>
             <a:r>
-              <a:rPr sz="1665" b="1" i="0">
+              <a:rPr sz="1800" b="1" i="0" dirty="0">
                 <a:solidFill>
                   <a:srgbClr val="206E65"/>
                 </a:solidFill>

--- a/Takeaway.pptx
+++ b/Takeaway.pptx
@@ -4020,7 +4020,7 @@
               </a:defRPr>
             </a:pPr>
             <a:r>
-              <a:rPr sz="2550" b="1" i="0">
+              <a:rPr sz="2550" b="1" i="0" dirty="0">
                 <a:solidFill>
                   <a:srgbClr val="27333B"/>
                 </a:solidFill>
@@ -4987,7 +4987,7 @@
         </p:nvSpPr>
         <p:spPr>
           <a:xfrm>
-            <a:off x="800100" y="6486525"/>
+            <a:off x="800100" y="6523847"/>
             <a:ext cx="4543425" cy="628650"/>
           </a:xfrm>
           <a:prstGeom prst="rect">
@@ -5121,7 +5121,7 @@
               </a:defRPr>
             </a:pPr>
             <a:r>
-              <a:rPr sz="1538" b="0" i="1" dirty="0">
+              <a:rPr sz="1800" i="1" dirty="0">
                 <a:solidFill>
                   <a:srgbClr val="27333B"/>
                 </a:solidFill>
@@ -5354,7 +5354,7 @@
         </p:nvSpPr>
         <p:spPr>
           <a:xfrm>
-            <a:off x="800100" y="7429500"/>
+            <a:off x="800100" y="7466822"/>
             <a:ext cx="4543425" cy="628650"/>
           </a:xfrm>
           <a:prstGeom prst="rect">
@@ -5488,7 +5488,7 @@
               </a:defRPr>
             </a:pPr>
             <a:r>
-              <a:rPr sz="1538" b="0" i="1">
+              <a:rPr sz="1800" i="1" dirty="0">
                 <a:solidFill>
                   <a:srgbClr val="27333B"/>
                 </a:solidFill>
@@ -5721,7 +5721,7 @@
         </p:nvSpPr>
         <p:spPr>
           <a:xfrm>
-            <a:off x="800100" y="8372475"/>
+            <a:off x="800100" y="8409797"/>
             <a:ext cx="4543425" cy="628650"/>
           </a:xfrm>
           <a:prstGeom prst="rect">
@@ -5855,7 +5855,7 @@
               </a:defRPr>
             </a:pPr>
             <a:r>
-              <a:rPr sz="1538" b="0" i="1">
+              <a:rPr sz="1800" i="1">
                 <a:solidFill>
                   <a:srgbClr val="27333B"/>
                 </a:solidFill>
@@ -6984,7 +6984,7 @@
         </p:nvSpPr>
         <p:spPr>
           <a:xfrm>
-            <a:off x="7153275" y="6486525"/>
+            <a:off x="7153275" y="6523847"/>
             <a:ext cx="4543425" cy="628650"/>
           </a:xfrm>
           <a:prstGeom prst="rect">
@@ -7118,7 +7118,7 @@
               </a:defRPr>
             </a:pPr>
             <a:r>
-              <a:rPr sz="1538" b="0" i="1">
+              <a:rPr sz="1800" i="1">
                 <a:solidFill>
                   <a:srgbClr val="27333B"/>
                 </a:solidFill>
@@ -7351,7 +7351,7 @@
         </p:nvSpPr>
         <p:spPr>
           <a:xfrm>
-            <a:off x="7153275" y="7429500"/>
+            <a:off x="7153275" y="7466822"/>
             <a:ext cx="4543425" cy="628650"/>
           </a:xfrm>
           <a:prstGeom prst="rect">
@@ -7485,7 +7485,7 @@
               </a:defRPr>
             </a:pPr>
             <a:r>
-              <a:rPr sz="1538" b="0" i="1">
+              <a:rPr sz="1800" i="1">
                 <a:solidFill>
                   <a:srgbClr val="27333B"/>
                 </a:solidFill>
@@ -7718,7 +7718,7 @@
         </p:nvSpPr>
         <p:spPr>
           <a:xfrm>
-            <a:off x="7153275" y="8372475"/>
+            <a:off x="7153275" y="8409797"/>
             <a:ext cx="4543425" cy="628650"/>
           </a:xfrm>
           <a:prstGeom prst="rect">
@@ -7852,7 +7852,7 @@
               </a:defRPr>
             </a:pPr>
             <a:r>
-              <a:rPr sz="1538" b="0" i="1">
+              <a:rPr sz="1800" i="1">
                 <a:solidFill>
                   <a:srgbClr val="27333B"/>
                 </a:solidFill>
@@ -8981,7 +8981,7 @@
         </p:nvSpPr>
         <p:spPr>
           <a:xfrm>
-            <a:off x="13506450" y="6486525"/>
+            <a:off x="13506450" y="6523847"/>
             <a:ext cx="4543425" cy="628650"/>
           </a:xfrm>
           <a:prstGeom prst="rect">
@@ -9115,7 +9115,7 @@
               </a:defRPr>
             </a:pPr>
             <a:r>
-              <a:rPr sz="1538" b="0" i="1">
+              <a:rPr sz="1800" i="1">
                 <a:solidFill>
                   <a:srgbClr val="27333B"/>
                 </a:solidFill>
@@ -9348,7 +9348,7 @@
         </p:nvSpPr>
         <p:spPr>
           <a:xfrm>
-            <a:off x="13506450" y="7429500"/>
+            <a:off x="13506450" y="7466822"/>
             <a:ext cx="4543425" cy="628650"/>
           </a:xfrm>
           <a:prstGeom prst="rect">
@@ -9482,7 +9482,7 @@
               </a:defRPr>
             </a:pPr>
             <a:r>
-              <a:rPr sz="1538" b="0" i="1">
+              <a:rPr sz="1800" i="1">
                 <a:solidFill>
                   <a:srgbClr val="27333B"/>
                 </a:solidFill>
@@ -9715,7 +9715,7 @@
         </p:nvSpPr>
         <p:spPr>
           <a:xfrm>
-            <a:off x="13506450" y="8372475"/>
+            <a:off x="13506450" y="8409797"/>
             <a:ext cx="4543425" cy="628650"/>
           </a:xfrm>
           <a:prstGeom prst="rect">
@@ -9849,7 +9849,7 @@
               </a:defRPr>
             </a:pPr>
             <a:r>
-              <a:rPr sz="1538" b="0" i="1">
+              <a:rPr sz="1800" i="1">
                 <a:solidFill>
                   <a:srgbClr val="27333B"/>
                 </a:solidFill>
@@ -10581,7 +10581,7 @@
               </a:defRPr>
             </a:pPr>
             <a:r>
-              <a:rPr sz="1583" b="0" i="1">
+              <a:rPr sz="1800" b="1" i="1" dirty="0">
                 <a:solidFill>
                   <a:srgbClr val="F9F6F5"/>
                 </a:solidFill>
@@ -10728,7 +10728,7 @@
             </a:lvl9pPr>
           </a:lstStyle>
           <a:p>
-            <a:pPr algn="l">
+            <a:pPr algn="r">
               <a:lnSpc>
                 <a:spcPct val="102000"/>
               </a:lnSpc>
@@ -10743,7 +10743,7 @@
               </a:defRPr>
             </a:pPr>
             <a:r>
-              <a:rPr sz="1148" b="1" i="0">
+              <a:rPr sz="1148" b="1" i="0" dirty="0">
                 <a:solidFill>
                   <a:srgbClr val="F0E4E7"/>
                 </a:solidFill>
@@ -11067,7 +11067,7 @@
               </a:defRPr>
             </a:pPr>
             <a:r>
-              <a:rPr sz="1583" b="0" i="1">
+              <a:rPr sz="1800" b="1" i="1">
                 <a:solidFill>
                   <a:srgbClr val="F9F6F5"/>
                 </a:solidFill>
@@ -11214,7 +11214,7 @@
             </a:lvl9pPr>
           </a:lstStyle>
           <a:p>
-            <a:pPr algn="l">
+            <a:pPr algn="r">
               <a:lnSpc>
                 <a:spcPct val="102000"/>
               </a:lnSpc>
@@ -11553,7 +11553,7 @@
               </a:defRPr>
             </a:pPr>
             <a:r>
-              <a:rPr sz="1583" b="0" i="1">
+              <a:rPr sz="1800" b="1" i="1">
                 <a:solidFill>
                   <a:srgbClr val="F9F6F5"/>
                 </a:solidFill>
@@ -11700,7 +11700,7 @@
             </a:lvl9pPr>
           </a:lstStyle>
           <a:p>
-            <a:pPr algn="l">
+            <a:pPr algn="r">
               <a:lnSpc>
                 <a:spcPct val="102000"/>
               </a:lnSpc>
